--- a/sha-ntieb.pptx
+++ b/sha-ntieb.pptx
@@ -5,7 +5,7 @@
     <p:sldMasterId id="2147483648" r:id="rId1"/>
   </p:sldMasterIdLst>
   <p:notesMasterIdLst>
-    <p:notesMasterId r:id="rId16"/>
+    <p:notesMasterId r:id="rId17"/>
   </p:notesMasterIdLst>
   <p:sldIdLst>
     <p:sldId id="256" r:id="rId2"/>
@@ -14,14 +14,15 @@
     <p:sldId id="270" r:id="rId5"/>
     <p:sldId id="271" r:id="rId6"/>
     <p:sldId id="261" r:id="rId7"/>
-    <p:sldId id="262" r:id="rId8"/>
-    <p:sldId id="272" r:id="rId9"/>
-    <p:sldId id="273" r:id="rId10"/>
-    <p:sldId id="274" r:id="rId11"/>
-    <p:sldId id="275" r:id="rId12"/>
-    <p:sldId id="276" r:id="rId13"/>
-    <p:sldId id="264" r:id="rId14"/>
-    <p:sldId id="265" r:id="rId15"/>
+    <p:sldId id="277" r:id="rId8"/>
+    <p:sldId id="262" r:id="rId9"/>
+    <p:sldId id="272" r:id="rId10"/>
+    <p:sldId id="273" r:id="rId11"/>
+    <p:sldId id="274" r:id="rId12"/>
+    <p:sldId id="275" r:id="rId13"/>
+    <p:sldId id="276" r:id="rId14"/>
+    <p:sldId id="264" r:id="rId15"/>
+    <p:sldId id="265" r:id="rId16"/>
   </p:sldIdLst>
   <p:sldSz cx="9144000" cy="5143500" type="screen16x9"/>
   <p:notesSz cx="5143500" cy="9144000"/>
@@ -754,6 +755,90 @@
 </p:notes>
 </file>
 
+<file path=ppt/notesSlides/notesSlide15.xml><?xml version="1.0" encoding="utf-8"?>
+<p:notes xmlns:a="http://schemas.openxmlformats.org/drawingml/2006/main" xmlns:r="http://schemas.openxmlformats.org/officeDocument/2006/relationships" xmlns:p="http://schemas.openxmlformats.org/presentationml/2006/main">
+  <p:cSld>
+    <p:spTree>
+      <p:nvGrpSpPr>
+        <p:cNvPr id="1" name=""/>
+        <p:cNvGrpSpPr/>
+        <p:nvPr/>
+      </p:nvGrpSpPr>
+      <p:grpSpPr>
+        <a:xfrm>
+          <a:off x="0" y="0"/>
+          <a:ext cx="0" cy="0"/>
+          <a:chOff x="0" y="0"/>
+          <a:chExt cx="0" cy="0"/>
+        </a:xfrm>
+      </p:grpSpPr>
+      <p:sp>
+        <p:nvSpPr>
+          <p:cNvPr id="2" name="Slide Image Placeholder 1"/>
+          <p:cNvSpPr>
+            <a:spLocks noGrp="1" noRot="1" noChangeAspect="1"/>
+          </p:cNvSpPr>
+          <p:nvPr>
+            <p:ph type="sldImg"/>
+          </p:nvPr>
+        </p:nvSpPr>
+        <p:spPr/>
+      </p:sp>
+      <p:sp>
+        <p:nvSpPr>
+          <p:cNvPr id="3" name="Notes Placeholder 2"/>
+          <p:cNvSpPr>
+            <a:spLocks noGrp="1"/>
+          </p:cNvSpPr>
+          <p:nvPr>
+            <p:ph type="body" idx="1"/>
+          </p:nvPr>
+        </p:nvSpPr>
+        <p:spPr/>
+        <p:txBody>
+          <a:bodyPr/>
+          <a:lstStyle/>
+          <a:p>
+            <a:endParaRPr lang="en-US" dirty="0"/>
+          </a:p>
+        </p:txBody>
+      </p:sp>
+      <p:sp>
+        <p:nvSpPr>
+          <p:cNvPr id="4" name="Slide Number Placeholder 3"/>
+          <p:cNvSpPr>
+            <a:spLocks noGrp="1"/>
+          </p:cNvSpPr>
+          <p:nvPr>
+            <p:ph type="sldNum" sz="quarter" idx="10"/>
+          </p:nvPr>
+        </p:nvSpPr>
+        <p:spPr/>
+        <p:txBody>
+          <a:bodyPr/>
+          <a:lstStyle/>
+          <a:p>
+            <a:fld id="{F7021451-1387-4CA6-816F-3879F97B5CBC}" type="slidenum">
+              <a:rPr lang="en-US"/>
+              <a:t>15</a:t>
+            </a:fld>
+            <a:endParaRPr lang="en-US"/>
+          </a:p>
+        </p:txBody>
+      </p:sp>
+    </p:spTree>
+    <p:extLst>
+      <p:ext uri="{BB962C8B-B14F-4D97-AF65-F5344CB8AC3E}">
+        <p14:creationId xmlns:p14="http://schemas.microsoft.com/office/powerpoint/2010/main" val="1024086991"/>
+      </p:ext>
+    </p:extLst>
+  </p:cSld>
+  <p:clrMapOvr>
+    <a:masterClrMapping/>
+  </p:clrMapOvr>
+</p:notes>
+</file>
+
 <file path=ppt/notesSlides/notesSlide2.xml><?xml version="1.0" encoding="utf-8"?>
 <p:notes xmlns:a="http://schemas.openxmlformats.org/drawingml/2006/main" xmlns:r="http://schemas.openxmlformats.org/officeDocument/2006/relationships" xmlns:p="http://schemas.openxmlformats.org/presentationml/2006/main">
   <p:cSld>
@@ -1179,7 +1264,13 @@
   <p:cSld>
     <p:spTree>
       <p:nvGrpSpPr>
-        <p:cNvPr id="1" name=""/>
+        <p:cNvPr id="1" name="">
+          <a:extLst>
+            <a:ext uri="{FF2B5EF4-FFF2-40B4-BE49-F238E27FC236}">
+              <a16:creationId xmlns:a16="http://schemas.microsoft.com/office/drawing/2014/main" id="{D4458AE8-0435-E206-5B67-EF34993E8136}"/>
+            </a:ext>
+          </a:extLst>
+        </p:cNvPr>
         <p:cNvGrpSpPr/>
         <p:nvPr/>
       </p:nvGrpSpPr>
@@ -1193,7 +1284,13 @@
       </p:grpSpPr>
       <p:sp>
         <p:nvSpPr>
-          <p:cNvPr id="2" name="Slide Image Placeholder 1"/>
+          <p:cNvPr id="2" name="Slide Image Placeholder 1">
+            <a:extLst>
+              <a:ext uri="{FF2B5EF4-FFF2-40B4-BE49-F238E27FC236}">
+                <a16:creationId xmlns:a16="http://schemas.microsoft.com/office/drawing/2014/main" id="{C8D48AFE-24F5-C049-A6A4-325413B7375E}"/>
+              </a:ext>
+            </a:extLst>
+          </p:cNvPr>
           <p:cNvSpPr>
             <a:spLocks noGrp="1" noRot="1" noChangeAspect="1"/>
           </p:cNvSpPr>
@@ -1205,7 +1302,13 @@
       </p:sp>
       <p:sp>
         <p:nvSpPr>
-          <p:cNvPr id="3" name="Notes Placeholder 2"/>
+          <p:cNvPr id="3" name="Notes Placeholder 2">
+            <a:extLst>
+              <a:ext uri="{FF2B5EF4-FFF2-40B4-BE49-F238E27FC236}">
+                <a16:creationId xmlns:a16="http://schemas.microsoft.com/office/drawing/2014/main" id="{C78442D2-2E7B-DF02-031F-02D33B5E27AC}"/>
+              </a:ext>
+            </a:extLst>
+          </p:cNvPr>
           <p:cNvSpPr>
             <a:spLocks noGrp="1"/>
           </p:cNvSpPr>
@@ -1224,7 +1327,13 @@
       </p:sp>
       <p:sp>
         <p:nvSpPr>
-          <p:cNvPr id="4" name="Slide Number Placeholder 3"/>
+          <p:cNvPr id="4" name="Slide Number Placeholder 3">
+            <a:extLst>
+              <a:ext uri="{FF2B5EF4-FFF2-40B4-BE49-F238E27FC236}">
+                <a16:creationId xmlns:a16="http://schemas.microsoft.com/office/drawing/2014/main" id="{69B8BEB2-F5BE-D85C-3F0F-59553F65F056}"/>
+              </a:ext>
+            </a:extLst>
+          </p:cNvPr>
           <p:cNvSpPr>
             <a:spLocks noGrp="1"/>
           </p:cNvSpPr>
@@ -1248,7 +1357,7 @@
     </p:spTree>
     <p:extLst>
       <p:ext uri="{BB962C8B-B14F-4D97-AF65-F5344CB8AC3E}">
-        <p14:creationId xmlns:p14="http://schemas.microsoft.com/office/powerpoint/2010/main" val="1024086991"/>
+        <p14:creationId xmlns:p14="http://schemas.microsoft.com/office/powerpoint/2010/main" val="3651418978"/>
       </p:ext>
     </p:extLst>
   </p:cSld>
@@ -3240,7 +3349,7 @@
                 <a:ea typeface="Georgia" pitchFamily="34" charset="-122"/>
                 <a:cs typeface="Georgia" pitchFamily="34" charset="-120"/>
               </a:rPr>
-              <a:t>Part 4 : Results &amp; Interpretation</a:t>
+              <a:t>Part 4 :Results &amp; Interpretation</a:t>
             </a:r>
             <a:endParaRPr lang="en-US" sz="2200" dirty="0">
               <a:latin typeface="Ubuntu" panose="020B0504030602030204" pitchFamily="34" charset="0"/>
@@ -3250,14 +3359,14 @@
       </p:sp>
       <p:sp>
         <p:nvSpPr>
-          <p:cNvPr id="16" name="Shape 14"/>
-          <p:cNvSpPr/>
-          <p:nvPr/>
-        </p:nvSpPr>
-        <p:spPr>
-          <a:xfrm>
-            <a:off x="64712" y="836323"/>
-            <a:ext cx="9001916" cy="4221011"/>
+          <p:cNvPr id="21" name="Shape 19"/>
+          <p:cNvSpPr/>
+          <p:nvPr/>
+        </p:nvSpPr>
+        <p:spPr>
+          <a:xfrm>
+            <a:off x="91440" y="829291"/>
+            <a:ext cx="8961120" cy="4249146"/>
           </a:xfrm>
           <a:prstGeom prst="rect">
             <a:avLst/>
@@ -3269,7 +3378,7 @@
           </a:solidFill>
           <a:ln w="12700">
             <a:solidFill>
-              <a:srgbClr val="1A6B3C"/>
+              <a:srgbClr val="7B2D8B"/>
             </a:solidFill>
             <a:prstDash val="solid"/>
           </a:ln>
@@ -3284,20 +3393,20 @@
       </p:sp>
       <p:sp>
         <p:nvSpPr>
-          <p:cNvPr id="17" name="Shape 15"/>
-          <p:cNvSpPr/>
-          <p:nvPr/>
-        </p:nvSpPr>
-        <p:spPr>
-          <a:xfrm>
-            <a:off x="64712" y="836324"/>
-            <a:ext cx="9001916" cy="777240"/>
-          </a:xfrm>
-          <a:prstGeom prst="rect">
-            <a:avLst/>
-          </a:prstGeom>
-          <a:solidFill>
-            <a:srgbClr val="1A6B3C">
+          <p:cNvPr id="22" name="Shape 20"/>
+          <p:cNvSpPr/>
+          <p:nvPr/>
+        </p:nvSpPr>
+        <p:spPr>
+          <a:xfrm>
+            <a:off x="91440" y="829291"/>
+            <a:ext cx="8961120" cy="777240"/>
+          </a:xfrm>
+          <a:prstGeom prst="rect">
+            <a:avLst/>
+          </a:prstGeom>
+          <a:solidFill>
+            <a:srgbClr val="7B2D8B">
               <a:alpha val="65000"/>
             </a:srgbClr>
           </a:solidFill>
@@ -3306,14 +3415,14 @@
       </p:sp>
       <p:sp>
         <p:nvSpPr>
-          <p:cNvPr id="18" name="Text 16"/>
-          <p:cNvSpPr/>
-          <p:nvPr/>
-        </p:nvSpPr>
-        <p:spPr>
-          <a:xfrm>
-            <a:off x="64712" y="863756"/>
-            <a:ext cx="9001916" cy="502920"/>
+          <p:cNvPr id="23" name="Text 21"/>
+          <p:cNvSpPr/>
+          <p:nvPr/>
+        </p:nvSpPr>
+        <p:spPr>
+          <a:xfrm>
+            <a:off x="91440" y="856723"/>
+            <a:ext cx="8961120" cy="502920"/>
           </a:xfrm>
           <a:prstGeom prst="rect">
             <a:avLst/>
@@ -3335,7 +3444,7 @@
                 </a:solidFill>
                 <a:latin typeface="Ubuntu" panose="020B0504030602030204" pitchFamily="34" charset="0"/>
               </a:rPr>
-              <a:t>📖</a:t>
+              <a:t>🎛️</a:t>
             </a:r>
             <a:endParaRPr lang="en-US" sz="3000" dirty="0">
               <a:latin typeface="Ubuntu" panose="020B0504030602030204" pitchFamily="34" charset="0"/>
@@ -3345,14 +3454,14 @@
       </p:sp>
       <p:sp>
         <p:nvSpPr>
-          <p:cNvPr id="19" name="Text 17"/>
-          <p:cNvSpPr/>
-          <p:nvPr/>
-        </p:nvSpPr>
-        <p:spPr>
-          <a:xfrm>
-            <a:off x="64712" y="1339244"/>
-            <a:ext cx="9001916" cy="320040"/>
+          <p:cNvPr id="24" name="Text 22"/>
+          <p:cNvSpPr/>
+          <p:nvPr/>
+        </p:nvSpPr>
+        <p:spPr>
+          <a:xfrm>
+            <a:off x="91440" y="1332211"/>
+            <a:ext cx="8961120" cy="320040"/>
           </a:xfrm>
           <a:prstGeom prst="rect">
             <a:avLst/>
@@ -3376,7 +3485,7 @@
                 <a:ea typeface="Georgia" pitchFamily="34" charset="-122"/>
                 <a:cs typeface="Georgia" pitchFamily="34" charset="-120"/>
               </a:rPr>
-              <a:t>Recipe Detail</a:t>
+              <a:t>Admin Dashboard</a:t>
             </a:r>
             <a:endParaRPr lang="en-US" sz="1200" dirty="0">
               <a:latin typeface="Ubuntu" panose="020B0504030602030204" pitchFamily="34" charset="0"/>
@@ -3389,7 +3498,7 @@
           <p:cNvPr id="37" name="Image 36">
             <a:extLst>
               <a:ext uri="{FF2B5EF4-FFF2-40B4-BE49-F238E27FC236}">
-                <a16:creationId xmlns:a16="http://schemas.microsoft.com/office/drawing/2014/main" id="{0C7B2F93-B3F4-5EA4-4217-6EACC8B77A9D}"/>
+                <a16:creationId xmlns:a16="http://schemas.microsoft.com/office/drawing/2014/main" id="{DE6F1983-2199-9378-70FD-1F615D78C0CB}"/>
               </a:ext>
             </a:extLst>
           </p:cNvPr>
@@ -3406,8 +3515,8 @@
         </p:blipFill>
         <p:spPr>
           <a:xfrm>
-            <a:off x="77373" y="1620950"/>
-            <a:ext cx="8989256" cy="3463816"/>
+            <a:off x="91440" y="1606532"/>
+            <a:ext cx="8961120" cy="3471906"/>
           </a:xfrm>
           <a:prstGeom prst="rect">
             <a:avLst/>
@@ -3522,14 +3631,14 @@
       </p:sp>
       <p:sp>
         <p:nvSpPr>
-          <p:cNvPr id="26" name="Shape 24"/>
-          <p:cNvSpPr/>
-          <p:nvPr/>
-        </p:nvSpPr>
-        <p:spPr>
-          <a:xfrm>
-            <a:off x="80888" y="832102"/>
-            <a:ext cx="8985739" cy="4311397"/>
+          <p:cNvPr id="16" name="Shape 14"/>
+          <p:cNvSpPr/>
+          <p:nvPr/>
+        </p:nvSpPr>
+        <p:spPr>
+          <a:xfrm>
+            <a:off x="64712" y="836323"/>
+            <a:ext cx="9001916" cy="4221011"/>
           </a:xfrm>
           <a:prstGeom prst="rect">
             <a:avLst/>
@@ -3541,7 +3650,7 @@
           </a:solidFill>
           <a:ln w="12700">
             <a:solidFill>
-              <a:srgbClr val="15618A"/>
+              <a:srgbClr val="1A6B3C"/>
             </a:solidFill>
             <a:prstDash val="solid"/>
           </a:ln>
@@ -3556,20 +3665,20 @@
       </p:sp>
       <p:sp>
         <p:nvSpPr>
-          <p:cNvPr id="27" name="Shape 25"/>
-          <p:cNvSpPr/>
-          <p:nvPr/>
-        </p:nvSpPr>
-        <p:spPr>
-          <a:xfrm>
-            <a:off x="80888" y="832103"/>
-            <a:ext cx="8985739" cy="777240"/>
-          </a:xfrm>
-          <a:prstGeom prst="rect">
-            <a:avLst/>
-          </a:prstGeom>
-          <a:solidFill>
-            <a:srgbClr val="15618A">
+          <p:cNvPr id="17" name="Shape 15"/>
+          <p:cNvSpPr/>
+          <p:nvPr/>
+        </p:nvSpPr>
+        <p:spPr>
+          <a:xfrm>
+            <a:off x="64712" y="836324"/>
+            <a:ext cx="9001916" cy="777240"/>
+          </a:xfrm>
+          <a:prstGeom prst="rect">
+            <a:avLst/>
+          </a:prstGeom>
+          <a:solidFill>
+            <a:srgbClr val="1A6B3C">
               <a:alpha val="65000"/>
             </a:srgbClr>
           </a:solidFill>
@@ -3578,14 +3687,14 @@
       </p:sp>
       <p:sp>
         <p:nvSpPr>
-          <p:cNvPr id="28" name="Text 26"/>
-          <p:cNvSpPr/>
-          <p:nvPr/>
-        </p:nvSpPr>
-        <p:spPr>
-          <a:xfrm>
-            <a:off x="80888" y="859535"/>
-            <a:ext cx="8985739" cy="502920"/>
+          <p:cNvPr id="18" name="Text 16"/>
+          <p:cNvSpPr/>
+          <p:nvPr/>
+        </p:nvSpPr>
+        <p:spPr>
+          <a:xfrm>
+            <a:off x="64712" y="863756"/>
+            <a:ext cx="9001916" cy="502920"/>
           </a:xfrm>
           <a:prstGeom prst="rect">
             <a:avLst/>
@@ -3607,7 +3716,7 @@
                 </a:solidFill>
                 <a:latin typeface="Ubuntu" panose="020B0504030602030204" pitchFamily="34" charset="0"/>
               </a:rPr>
-              <a:t>🔐</a:t>
+              <a:t>📖</a:t>
             </a:r>
             <a:endParaRPr lang="en-US" sz="3000" dirty="0">
               <a:latin typeface="Ubuntu" panose="020B0504030602030204" pitchFamily="34" charset="0"/>
@@ -3617,14 +3726,14 @@
       </p:sp>
       <p:sp>
         <p:nvSpPr>
-          <p:cNvPr id="29" name="Text 27"/>
-          <p:cNvSpPr/>
-          <p:nvPr/>
-        </p:nvSpPr>
-        <p:spPr>
-          <a:xfrm>
-            <a:off x="80888" y="1335023"/>
-            <a:ext cx="8985739" cy="320040"/>
+          <p:cNvPr id="19" name="Text 17"/>
+          <p:cNvSpPr/>
+          <p:nvPr/>
+        </p:nvSpPr>
+        <p:spPr>
+          <a:xfrm>
+            <a:off x="64712" y="1339244"/>
+            <a:ext cx="9001916" cy="320040"/>
           </a:xfrm>
           <a:prstGeom prst="rect">
             <a:avLst/>
@@ -3648,7 +3757,7 @@
                 <a:ea typeface="Georgia" pitchFamily="34" charset="-122"/>
                 <a:cs typeface="Georgia" pitchFamily="34" charset="-120"/>
               </a:rPr>
-              <a:t>Login/Register</a:t>
+              <a:t>Recipe Detail</a:t>
             </a:r>
             <a:endParaRPr lang="en-US" sz="1200" dirty="0">
               <a:latin typeface="Ubuntu" panose="020B0504030602030204" pitchFamily="34" charset="0"/>
@@ -3661,7 +3770,7 @@
           <p:cNvPr id="37" name="Image 36">
             <a:extLst>
               <a:ext uri="{FF2B5EF4-FFF2-40B4-BE49-F238E27FC236}">
-                <a16:creationId xmlns:a16="http://schemas.microsoft.com/office/drawing/2014/main" id="{D521F2AF-576A-5A31-5C0A-19258F2501DF}"/>
+                <a16:creationId xmlns:a16="http://schemas.microsoft.com/office/drawing/2014/main" id="{0C7B2F93-B3F4-5EA4-4217-6EACC8B77A9D}"/>
               </a:ext>
             </a:extLst>
           </p:cNvPr>
@@ -3678,8 +3787,8 @@
         </p:blipFill>
         <p:spPr>
           <a:xfrm>
-            <a:off x="77373" y="1609343"/>
-            <a:ext cx="8985739" cy="3534156"/>
+            <a:off x="77373" y="1620950"/>
+            <a:ext cx="8989256" cy="3463816"/>
           </a:xfrm>
           <a:prstGeom prst="rect">
             <a:avLst/>
@@ -3784,7 +3893,7 @@
                 <a:ea typeface="Georgia" pitchFamily="34" charset="-122"/>
                 <a:cs typeface="Georgia" pitchFamily="34" charset="-120"/>
               </a:rPr>
-              <a:t>Part 4 :Results &amp; Interpretation</a:t>
+              <a:t>Part 4 : Results &amp; Interpretation</a:t>
             </a:r>
             <a:endParaRPr lang="en-US" sz="2200" dirty="0">
               <a:latin typeface="Ubuntu" panose="020B0504030602030204" pitchFamily="34" charset="0"/>
@@ -3794,44 +3903,14 @@
       </p:sp>
       <p:sp>
         <p:nvSpPr>
-          <p:cNvPr id="28" name="Text 26"/>
-          <p:cNvSpPr/>
-          <p:nvPr/>
-        </p:nvSpPr>
-        <p:spPr>
-          <a:xfrm>
-            <a:off x="3172968" y="5065776"/>
-            <a:ext cx="2788920" cy="502920"/>
-          </a:xfrm>
-          <a:prstGeom prst="rect">
-            <a:avLst/>
-          </a:prstGeom>
-          <a:noFill/>
-          <a:ln/>
-        </p:spPr>
-        <p:txBody>
-          <a:bodyPr wrap="square" rtlCol="0" anchor="ctr"/>
-          <a:lstStyle/>
-          <a:p>
-            <a:pPr marL="0" indent="0" algn="ctr">
-              <a:buNone/>
-            </a:pPr>
-            <a:endParaRPr lang="en-US" sz="3000" dirty="0">
-              <a:latin typeface="Ubuntu" panose="020B0504030602030204" pitchFamily="34" charset="0"/>
-            </a:endParaRPr>
-          </a:p>
-        </p:txBody>
-      </p:sp>
-      <p:sp>
-        <p:nvSpPr>
-          <p:cNvPr id="31" name="Shape 29"/>
-          <p:cNvSpPr/>
-          <p:nvPr/>
-        </p:nvSpPr>
-        <p:spPr>
-          <a:xfrm>
-            <a:off x="57677" y="829114"/>
-            <a:ext cx="9037085" cy="4236662"/>
+          <p:cNvPr id="26" name="Shape 24"/>
+          <p:cNvSpPr/>
+          <p:nvPr/>
+        </p:nvSpPr>
+        <p:spPr>
+          <a:xfrm>
+            <a:off x="80888" y="832102"/>
+            <a:ext cx="8985739" cy="4311397"/>
           </a:xfrm>
           <a:prstGeom prst="rect">
             <a:avLst/>
@@ -3843,7 +3922,7 @@
           </a:solidFill>
           <a:ln w="12700">
             <a:solidFill>
-              <a:srgbClr val="E67E22"/>
+              <a:srgbClr val="15618A"/>
             </a:solidFill>
             <a:prstDash val="solid"/>
           </a:ln>
@@ -3858,20 +3937,20 @@
       </p:sp>
       <p:sp>
         <p:nvSpPr>
-          <p:cNvPr id="32" name="Shape 30"/>
-          <p:cNvSpPr/>
-          <p:nvPr/>
-        </p:nvSpPr>
-        <p:spPr>
-          <a:xfrm>
-            <a:off x="57677" y="829114"/>
-            <a:ext cx="9037085" cy="777240"/>
-          </a:xfrm>
-          <a:prstGeom prst="rect">
-            <a:avLst/>
-          </a:prstGeom>
-          <a:solidFill>
-            <a:srgbClr val="E67E22">
+          <p:cNvPr id="27" name="Shape 25"/>
+          <p:cNvSpPr/>
+          <p:nvPr/>
+        </p:nvSpPr>
+        <p:spPr>
+          <a:xfrm>
+            <a:off x="80888" y="832103"/>
+            <a:ext cx="8985739" cy="777240"/>
+          </a:xfrm>
+          <a:prstGeom prst="rect">
+            <a:avLst/>
+          </a:prstGeom>
+          <a:solidFill>
+            <a:srgbClr val="15618A">
               <a:alpha val="65000"/>
             </a:srgbClr>
           </a:solidFill>
@@ -3880,14 +3959,14 @@
       </p:sp>
       <p:sp>
         <p:nvSpPr>
-          <p:cNvPr id="33" name="Text 31"/>
-          <p:cNvSpPr/>
-          <p:nvPr/>
-        </p:nvSpPr>
-        <p:spPr>
-          <a:xfrm>
-            <a:off x="57677" y="856546"/>
-            <a:ext cx="9037085" cy="502920"/>
+          <p:cNvPr id="28" name="Text 26"/>
+          <p:cNvSpPr/>
+          <p:nvPr/>
+        </p:nvSpPr>
+        <p:spPr>
+          <a:xfrm>
+            <a:off x="80888" y="859535"/>
+            <a:ext cx="8985739" cy="502920"/>
           </a:xfrm>
           <a:prstGeom prst="rect">
             <a:avLst/>
@@ -3909,7 +3988,7 @@
                 </a:solidFill>
                 <a:latin typeface="Ubuntu" panose="020B0504030602030204" pitchFamily="34" charset="0"/>
               </a:rPr>
-              <a:t>📊</a:t>
+              <a:t>🔐</a:t>
             </a:r>
             <a:endParaRPr lang="en-US" sz="3000" dirty="0">
               <a:latin typeface="Ubuntu" panose="020B0504030602030204" pitchFamily="34" charset="0"/>
@@ -3919,14 +3998,14 @@
       </p:sp>
       <p:sp>
         <p:nvSpPr>
-          <p:cNvPr id="34" name="Text 32"/>
-          <p:cNvSpPr/>
-          <p:nvPr/>
-        </p:nvSpPr>
-        <p:spPr>
-          <a:xfrm>
-            <a:off x="57677" y="1332034"/>
-            <a:ext cx="9037085" cy="320040"/>
+          <p:cNvPr id="29" name="Text 27"/>
+          <p:cNvSpPr/>
+          <p:nvPr/>
+        </p:nvSpPr>
+        <p:spPr>
+          <a:xfrm>
+            <a:off x="80888" y="1335023"/>
+            <a:ext cx="8985739" cy="320040"/>
           </a:xfrm>
           <a:prstGeom prst="rect">
             <a:avLst/>
@@ -3950,7 +4029,7 @@
                 <a:ea typeface="Georgia" pitchFamily="34" charset="-122"/>
                 <a:cs typeface="Georgia" pitchFamily="34" charset="-120"/>
               </a:rPr>
-              <a:t>Swagger API Docs</a:t>
+              <a:t>Login/Register</a:t>
             </a:r>
             <a:endParaRPr lang="en-US" sz="1200" dirty="0">
               <a:latin typeface="Ubuntu" panose="020B0504030602030204" pitchFamily="34" charset="0"/>
@@ -3963,7 +4042,7 @@
           <p:cNvPr id="37" name="Image 36">
             <a:extLst>
               <a:ext uri="{FF2B5EF4-FFF2-40B4-BE49-F238E27FC236}">
-                <a16:creationId xmlns:a16="http://schemas.microsoft.com/office/drawing/2014/main" id="{F23CA3D6-753C-7DAA-8B92-8749258EE8D6}"/>
+                <a16:creationId xmlns:a16="http://schemas.microsoft.com/office/drawing/2014/main" id="{D521F2AF-576A-5A31-5C0A-19258F2501DF}"/>
               </a:ext>
             </a:extLst>
           </p:cNvPr>
@@ -3980,8 +4059,8 @@
         </p:blipFill>
         <p:spPr>
           <a:xfrm>
-            <a:off x="57677" y="1606355"/>
-            <a:ext cx="9028645" cy="3413702"/>
+            <a:off x="77373" y="1609343"/>
+            <a:ext cx="8985739" cy="3534156"/>
           </a:xfrm>
           <a:prstGeom prst="rect">
             <a:avLst/>
@@ -4086,7 +4165,7 @@
                 <a:ea typeface="Georgia" pitchFamily="34" charset="-122"/>
                 <a:cs typeface="Georgia" pitchFamily="34" charset="-120"/>
               </a:rPr>
-              <a:t>Part 5 : Conclusion</a:t>
+              <a:t>Part 4 :Results &amp; Interpretation</a:t>
             </a:r>
             <a:endParaRPr lang="en-US" sz="2200" dirty="0">
               <a:latin typeface="Ubuntu" panose="020B0504030602030204" pitchFamily="34" charset="0"/>
@@ -4096,14 +4175,44 @@
       </p:sp>
       <p:sp>
         <p:nvSpPr>
-          <p:cNvPr id="6" name="Shape 4"/>
-          <p:cNvSpPr/>
-          <p:nvPr/>
-        </p:nvSpPr>
-        <p:spPr>
-          <a:xfrm>
-            <a:off x="182880" y="868680"/>
-            <a:ext cx="2834640" cy="4160520"/>
+          <p:cNvPr id="28" name="Text 26"/>
+          <p:cNvSpPr/>
+          <p:nvPr/>
+        </p:nvSpPr>
+        <p:spPr>
+          <a:xfrm>
+            <a:off x="3172968" y="5065776"/>
+            <a:ext cx="2788920" cy="502920"/>
+          </a:xfrm>
+          <a:prstGeom prst="rect">
+            <a:avLst/>
+          </a:prstGeom>
+          <a:noFill/>
+          <a:ln/>
+        </p:spPr>
+        <p:txBody>
+          <a:bodyPr wrap="square" rtlCol="0" anchor="ctr"/>
+          <a:lstStyle/>
+          <a:p>
+            <a:pPr marL="0" indent="0" algn="ctr">
+              <a:buNone/>
+            </a:pPr>
+            <a:endParaRPr lang="en-US" sz="3000" dirty="0">
+              <a:latin typeface="Ubuntu" panose="020B0504030602030204" pitchFamily="34" charset="0"/>
+            </a:endParaRPr>
+          </a:p>
+        </p:txBody>
+      </p:sp>
+      <p:sp>
+        <p:nvSpPr>
+          <p:cNvPr id="31" name="Shape 29"/>
+          <p:cNvSpPr/>
+          <p:nvPr/>
+        </p:nvSpPr>
+        <p:spPr>
+          <a:xfrm>
+            <a:off x="57677" y="829114"/>
+            <a:ext cx="9037085" cy="4236662"/>
           </a:xfrm>
           <a:prstGeom prst="rect">
             <a:avLst/>
@@ -4113,59 +4222,107 @@
               <a:alpha val="7000"/>
             </a:srgbClr>
           </a:solidFill>
-          <a:ln w="19050">
+          <a:ln w="12700">
             <a:solidFill>
-              <a:srgbClr val="C0392B"/>
+              <a:srgbClr val="E67E22"/>
             </a:solidFill>
             <a:prstDash val="solid"/>
           </a:ln>
-        </p:spPr>
-      </p:sp>
-      <p:sp>
-        <p:nvSpPr>
-          <p:cNvPr id="7" name="Shape 5"/>
-          <p:cNvSpPr/>
-          <p:nvPr/>
-        </p:nvSpPr>
-        <p:spPr>
-          <a:xfrm>
-            <a:off x="182880" y="868680"/>
-            <a:ext cx="2834640" cy="502920"/>
-          </a:xfrm>
-          <a:prstGeom prst="rect">
-            <a:avLst/>
-          </a:prstGeom>
-          <a:solidFill>
-            <a:srgbClr val="C0392B"/>
-          </a:solidFill>
-          <a:ln/>
-        </p:spPr>
-      </p:sp>
-      <p:sp>
-        <p:nvSpPr>
-          <p:cNvPr id="8" name="Text 6"/>
-          <p:cNvSpPr/>
-          <p:nvPr/>
-        </p:nvSpPr>
-        <p:spPr>
-          <a:xfrm>
-            <a:off x="182880" y="868680"/>
-            <a:ext cx="2834640" cy="502920"/>
-          </a:xfrm>
-          <a:prstGeom prst="rect">
-            <a:avLst/>
-          </a:prstGeom>
-          <a:noFill/>
-          <a:ln/>
-        </p:spPr>
-        <p:txBody>
-          <a:bodyPr wrap="square" lIns="0" tIns="0" rIns="0" bIns="0" rtlCol="0" anchor="ctr"/>
+          <a:effectLst>
+            <a:outerShdw blurRad="101600" dist="38100" dir="8100000" algn="bl" rotWithShape="0">
+              <a:srgbClr val="000000">
+                <a:alpha val="15000"/>
+              </a:srgbClr>
+            </a:outerShdw>
+          </a:effectLst>
+        </p:spPr>
+      </p:sp>
+      <p:sp>
+        <p:nvSpPr>
+          <p:cNvPr id="32" name="Shape 30"/>
+          <p:cNvSpPr/>
+          <p:nvPr/>
+        </p:nvSpPr>
+        <p:spPr>
+          <a:xfrm>
+            <a:off x="57677" y="829114"/>
+            <a:ext cx="9037085" cy="777240"/>
+          </a:xfrm>
+          <a:prstGeom prst="rect">
+            <a:avLst/>
+          </a:prstGeom>
+          <a:solidFill>
+            <a:srgbClr val="E67E22">
+              <a:alpha val="65000"/>
+            </a:srgbClr>
+          </a:solidFill>
+          <a:ln/>
+        </p:spPr>
+      </p:sp>
+      <p:sp>
+        <p:nvSpPr>
+          <p:cNvPr id="33" name="Text 31"/>
+          <p:cNvSpPr/>
+          <p:nvPr/>
+        </p:nvSpPr>
+        <p:spPr>
+          <a:xfrm>
+            <a:off x="57677" y="856546"/>
+            <a:ext cx="9037085" cy="502920"/>
+          </a:xfrm>
+          <a:prstGeom prst="rect">
+            <a:avLst/>
+          </a:prstGeom>
+          <a:noFill/>
+          <a:ln/>
+        </p:spPr>
+        <p:txBody>
+          <a:bodyPr wrap="square" rtlCol="0" anchor="ctr"/>
           <a:lstStyle/>
           <a:p>
             <a:pPr marL="0" indent="0" algn="ctr">
               <a:buNone/>
             </a:pPr>
             <a:r>
+              <a:rPr lang="en-US" sz="3000" dirty="0">
+                <a:solidFill>
+                  <a:srgbClr val="000000"/>
+                </a:solidFill>
+                <a:latin typeface="Ubuntu" panose="020B0504030602030204" pitchFamily="34" charset="0"/>
+              </a:rPr>
+              <a:t>📊</a:t>
+            </a:r>
+            <a:endParaRPr lang="en-US" sz="3000" dirty="0">
+              <a:latin typeface="Ubuntu" panose="020B0504030602030204" pitchFamily="34" charset="0"/>
+            </a:endParaRPr>
+          </a:p>
+        </p:txBody>
+      </p:sp>
+      <p:sp>
+        <p:nvSpPr>
+          <p:cNvPr id="34" name="Text 32"/>
+          <p:cNvSpPr/>
+          <p:nvPr/>
+        </p:nvSpPr>
+        <p:spPr>
+          <a:xfrm>
+            <a:off x="57677" y="1332034"/>
+            <a:ext cx="9037085" cy="320040"/>
+          </a:xfrm>
+          <a:prstGeom prst="rect">
+            <a:avLst/>
+          </a:prstGeom>
+          <a:noFill/>
+          <a:ln/>
+        </p:spPr>
+        <p:txBody>
+          <a:bodyPr wrap="square" lIns="0" tIns="0" rIns="0" bIns="0" rtlCol="0" anchor="ctr"/>
+          <a:lstStyle/>
+          <a:p>
+            <a:pPr marL="0" indent="0" algn="ctr">
+              <a:buNone/>
+            </a:pPr>
+            <a:r>
               <a:rPr lang="en-US" sz="1200" b="1" dirty="0">
                 <a:solidFill>
                   <a:srgbClr val="FFFFFF"/>
@@ -4174,7 +4331,7 @@
                 <a:ea typeface="Georgia" pitchFamily="34" charset="-122"/>
                 <a:cs typeface="Georgia" pitchFamily="34" charset="-120"/>
               </a:rPr>
-              <a:t>📋 Summary of Work</a:t>
+              <a:t>Swagger API Docs</a:t>
             </a:r>
             <a:endParaRPr lang="en-US" sz="1200" dirty="0">
               <a:latin typeface="Ubuntu" panose="020B0504030602030204" pitchFamily="34" charset="0"/>
@@ -4182,984 +4339,36 @@
           </a:p>
         </p:txBody>
       </p:sp>
-      <p:sp>
-        <p:nvSpPr>
-          <p:cNvPr id="9" name="Shape 7"/>
-          <p:cNvSpPr/>
-          <p:nvPr/>
-        </p:nvSpPr>
-        <p:spPr>
-          <a:xfrm>
-            <a:off x="292608" y="1508760"/>
-            <a:ext cx="164592" cy="164592"/>
-          </a:xfrm>
-          <a:prstGeom prst="ellipse">
-            <a:avLst/>
-          </a:prstGeom>
-          <a:solidFill>
-            <a:srgbClr val="C0392B"/>
-          </a:solidFill>
-          <a:ln/>
-        </p:spPr>
-      </p:sp>
-      <p:sp>
-        <p:nvSpPr>
-          <p:cNvPr id="10" name="Text 8"/>
-          <p:cNvSpPr/>
-          <p:nvPr/>
-        </p:nvSpPr>
-        <p:spPr>
-          <a:xfrm>
-            <a:off x="530352" y="1481328"/>
-            <a:ext cx="2377440" cy="411480"/>
-          </a:xfrm>
-          <a:prstGeom prst="rect">
-            <a:avLst/>
-          </a:prstGeom>
-          <a:noFill/>
-          <a:ln/>
-        </p:spPr>
-        <p:txBody>
-          <a:bodyPr wrap="square" lIns="0" tIns="0" rIns="0" bIns="0" rtlCol="0" anchor="ctr"/>
-          <a:lstStyle/>
-          <a:p>
-            <a:pPr marL="0" indent="0">
-              <a:buNone/>
-            </a:pPr>
-            <a:r>
-              <a:rPr lang="en-US" sz="1000" dirty="0">
-                <a:latin typeface="Ubuntu" panose="020B0504030602030204" pitchFamily="34" charset="0"/>
-                <a:ea typeface="Calibri" pitchFamily="34" charset="-122"/>
-                <a:cs typeface="Calibri" pitchFamily="34" charset="-120"/>
-              </a:rPr>
-              <a:t>Built a full-stack web app for Algerian recipe recommendations</a:t>
-            </a:r>
-            <a:endParaRPr lang="en-US" sz="1000" dirty="0">
-              <a:latin typeface="Ubuntu" panose="020B0504030602030204" pitchFamily="34" charset="0"/>
-            </a:endParaRPr>
-          </a:p>
-        </p:txBody>
-      </p:sp>
-      <p:sp>
-        <p:nvSpPr>
-          <p:cNvPr id="11" name="Shape 9"/>
-          <p:cNvSpPr/>
-          <p:nvPr/>
-        </p:nvSpPr>
-        <p:spPr>
-          <a:xfrm>
-            <a:off x="292608" y="2167128"/>
-            <a:ext cx="164592" cy="164592"/>
-          </a:xfrm>
-          <a:prstGeom prst="ellipse">
-            <a:avLst/>
-          </a:prstGeom>
-          <a:solidFill>
-            <a:srgbClr val="C0392B"/>
-          </a:solidFill>
-          <a:ln/>
-        </p:spPr>
-      </p:sp>
-      <p:sp>
-        <p:nvSpPr>
-          <p:cNvPr id="12" name="Text 10"/>
-          <p:cNvSpPr/>
-          <p:nvPr/>
-        </p:nvSpPr>
-        <p:spPr>
-          <a:xfrm>
-            <a:off x="530352" y="2139696"/>
-            <a:ext cx="2377440" cy="411480"/>
-          </a:xfrm>
-          <a:prstGeom prst="rect">
-            <a:avLst/>
-          </a:prstGeom>
-          <a:noFill/>
-          <a:ln/>
-        </p:spPr>
-        <p:txBody>
-          <a:bodyPr wrap="square" lIns="0" tIns="0" rIns="0" bIns="0" rtlCol="0" anchor="ctr"/>
-          <a:lstStyle/>
-          <a:p>
-            <a:r>
-              <a:rPr lang="en-US" sz="1000" dirty="0">
-                <a:latin typeface="Ubuntu" panose="020B0504030602030204" pitchFamily="34" charset="0"/>
-                <a:ea typeface="Calibri" pitchFamily="34" charset="-122"/>
-                <a:cs typeface="Calibri" pitchFamily="34" charset="-120"/>
-              </a:rPr>
-              <a:t>Implemented 3-level AI engine: Simple Match + TF-IDF + Transformers</a:t>
-            </a:r>
-          </a:p>
-        </p:txBody>
-      </p:sp>
-      <p:sp>
-        <p:nvSpPr>
-          <p:cNvPr id="13" name="Shape 11"/>
-          <p:cNvSpPr/>
-          <p:nvPr/>
-        </p:nvSpPr>
-        <p:spPr>
-          <a:xfrm>
-            <a:off x="292608" y="2825496"/>
-            <a:ext cx="164592" cy="164592"/>
-          </a:xfrm>
-          <a:prstGeom prst="ellipse">
-            <a:avLst/>
-          </a:prstGeom>
-          <a:solidFill>
-            <a:srgbClr val="C0392B"/>
-          </a:solidFill>
-          <a:ln/>
-        </p:spPr>
-      </p:sp>
-      <p:sp>
-        <p:nvSpPr>
-          <p:cNvPr id="14" name="Text 12"/>
-          <p:cNvSpPr/>
-          <p:nvPr/>
-        </p:nvSpPr>
-        <p:spPr>
-          <a:xfrm>
-            <a:off x="530352" y="2798064"/>
-            <a:ext cx="2377440" cy="411480"/>
-          </a:xfrm>
-          <a:prstGeom prst="rect">
-            <a:avLst/>
-          </a:prstGeom>
-          <a:noFill/>
-          <a:ln/>
-        </p:spPr>
-        <p:txBody>
-          <a:bodyPr wrap="square" lIns="0" tIns="0" rIns="0" bIns="0" rtlCol="0" anchor="ctr"/>
-          <a:lstStyle/>
-          <a:p>
-            <a:r>
-              <a:rPr lang="en-US" sz="1000" dirty="0">
-                <a:latin typeface="Ubuntu" panose="020B0504030602030204" pitchFamily="34" charset="0"/>
-                <a:ea typeface="Calibri" pitchFamily="34" charset="-122"/>
-                <a:cs typeface="Calibri" pitchFamily="34" charset="-120"/>
-              </a:rPr>
-              <a:t>Created Admin Dashboard with CSV import functionality</a:t>
-            </a:r>
-          </a:p>
-        </p:txBody>
-      </p:sp>
-      <p:sp>
-        <p:nvSpPr>
-          <p:cNvPr id="15" name="Shape 13"/>
-          <p:cNvSpPr/>
-          <p:nvPr/>
-        </p:nvSpPr>
-        <p:spPr>
-          <a:xfrm>
-            <a:off x="292608" y="3483864"/>
-            <a:ext cx="164592" cy="164592"/>
-          </a:xfrm>
-          <a:prstGeom prst="ellipse">
-            <a:avLst/>
-          </a:prstGeom>
-          <a:solidFill>
-            <a:srgbClr val="C0392B"/>
-          </a:solidFill>
-          <a:ln/>
-        </p:spPr>
-      </p:sp>
-      <p:sp>
-        <p:nvSpPr>
-          <p:cNvPr id="16" name="Text 14"/>
-          <p:cNvSpPr/>
-          <p:nvPr/>
-        </p:nvSpPr>
-        <p:spPr>
-          <a:xfrm>
-            <a:off x="530352" y="3456432"/>
-            <a:ext cx="2377440" cy="411480"/>
-          </a:xfrm>
-          <a:prstGeom prst="rect">
-            <a:avLst/>
-          </a:prstGeom>
-          <a:noFill/>
-          <a:ln/>
-        </p:spPr>
-        <p:txBody>
-          <a:bodyPr wrap="square" lIns="0" tIns="0" rIns="0" bIns="0" rtlCol="0" anchor="ctr"/>
-          <a:lstStyle/>
-          <a:p>
-            <a:r>
-              <a:rPr lang="en-US" sz="1000" dirty="0">
-                <a:latin typeface="Ubuntu" panose="020B0504030602030204" pitchFamily="34" charset="0"/>
-                <a:ea typeface="Calibri" pitchFamily="34" charset="-122"/>
-                <a:cs typeface="Calibri" pitchFamily="34" charset="-120"/>
-              </a:rPr>
-              <a:t>Developed bilingual support (Arabic RTL + English LTR)</a:t>
-            </a:r>
-          </a:p>
-        </p:txBody>
-      </p:sp>
-      <p:sp>
-        <p:nvSpPr>
-          <p:cNvPr id="17" name="Shape 15"/>
-          <p:cNvSpPr/>
-          <p:nvPr/>
-        </p:nvSpPr>
-        <p:spPr>
-          <a:xfrm>
-            <a:off x="292608" y="4142232"/>
-            <a:ext cx="164592" cy="164592"/>
-          </a:xfrm>
-          <a:prstGeom prst="ellipse">
-            <a:avLst/>
-          </a:prstGeom>
-          <a:solidFill>
-            <a:srgbClr val="C0392B"/>
-          </a:solidFill>
-          <a:ln/>
-        </p:spPr>
-      </p:sp>
-      <p:sp>
-        <p:nvSpPr>
-          <p:cNvPr id="18" name="Text 16"/>
-          <p:cNvSpPr/>
-          <p:nvPr/>
-        </p:nvSpPr>
-        <p:spPr>
-          <a:xfrm>
-            <a:off x="530352" y="4114800"/>
-            <a:ext cx="2377440" cy="411480"/>
-          </a:xfrm>
-          <a:prstGeom prst="rect">
-            <a:avLst/>
-          </a:prstGeom>
-          <a:noFill/>
-          <a:ln/>
-        </p:spPr>
-        <p:txBody>
-          <a:bodyPr wrap="square" lIns="0" tIns="0" rIns="0" bIns="0" rtlCol="0" anchor="ctr"/>
-          <a:lstStyle/>
-          <a:p>
-            <a:r>
-              <a:rPr lang="en-US" sz="1000" dirty="0">
-                <a:latin typeface="Ubuntu" panose="020B0504030602030204" pitchFamily="34" charset="0"/>
-                <a:ea typeface="Calibri" pitchFamily="34" charset="-122"/>
-                <a:cs typeface="Calibri" pitchFamily="34" charset="-120"/>
-              </a:rPr>
-              <a:t>Secured with JWT authentication and bcrypt password hashing</a:t>
-            </a:r>
-          </a:p>
-        </p:txBody>
-      </p:sp>
-      <p:sp>
-        <p:nvSpPr>
-          <p:cNvPr id="19" name="Shape 17"/>
-          <p:cNvSpPr/>
-          <p:nvPr/>
-        </p:nvSpPr>
-        <p:spPr>
-          <a:xfrm>
-            <a:off x="3172968" y="868680"/>
-            <a:ext cx="2834640" cy="4160520"/>
-          </a:xfrm>
-          <a:prstGeom prst="rect">
-            <a:avLst/>
-          </a:prstGeom>
-          <a:solidFill>
-            <a:srgbClr val="FFFFFF">
-              <a:alpha val="7000"/>
-            </a:srgbClr>
-          </a:solidFill>
-          <a:ln w="19050">
-            <a:solidFill>
-              <a:srgbClr val="D4A017"/>
-            </a:solidFill>
-            <a:prstDash val="solid"/>
-          </a:ln>
-        </p:spPr>
-      </p:sp>
-      <p:sp>
-        <p:nvSpPr>
-          <p:cNvPr id="20" name="Shape 18"/>
-          <p:cNvSpPr/>
-          <p:nvPr/>
-        </p:nvSpPr>
-        <p:spPr>
-          <a:xfrm>
-            <a:off x="3172968" y="868680"/>
-            <a:ext cx="2834640" cy="502920"/>
-          </a:xfrm>
-          <a:prstGeom prst="rect">
-            <a:avLst/>
-          </a:prstGeom>
-          <a:solidFill>
-            <a:srgbClr val="D4A017"/>
-          </a:solidFill>
-          <a:ln/>
-        </p:spPr>
-      </p:sp>
-      <p:sp>
-        <p:nvSpPr>
-          <p:cNvPr id="21" name="Text 19"/>
-          <p:cNvSpPr/>
-          <p:nvPr/>
-        </p:nvSpPr>
-        <p:spPr>
-          <a:xfrm>
-            <a:off x="3172968" y="868680"/>
-            <a:ext cx="2834640" cy="502920"/>
-          </a:xfrm>
-          <a:prstGeom prst="rect">
-            <a:avLst/>
-          </a:prstGeom>
-          <a:noFill/>
-          <a:ln/>
-        </p:spPr>
-        <p:txBody>
-          <a:bodyPr wrap="square" lIns="0" tIns="0" rIns="0" bIns="0" rtlCol="0" anchor="ctr"/>
-          <a:lstStyle/>
-          <a:p>
-            <a:pPr marL="0" indent="0" algn="ctr">
-              <a:buNone/>
-            </a:pPr>
-            <a:r>
-              <a:rPr lang="en-US" sz="1200" b="1" dirty="0">
-                <a:solidFill>
-                  <a:srgbClr val="FFFFFF"/>
-                </a:solidFill>
-                <a:latin typeface="Ubuntu" panose="020B0504030602030204" pitchFamily="34" charset="0"/>
-                <a:ea typeface="Georgia" pitchFamily="34" charset="-122"/>
-                <a:cs typeface="Georgia" pitchFamily="34" charset="-120"/>
-              </a:rPr>
-              <a:t>⚠️ Difficulties Encountered</a:t>
-            </a:r>
-            <a:endParaRPr lang="en-US" sz="1200" dirty="0">
-              <a:latin typeface="Ubuntu" panose="020B0504030602030204" pitchFamily="34" charset="0"/>
-            </a:endParaRPr>
-          </a:p>
-        </p:txBody>
-      </p:sp>
-      <p:sp>
-        <p:nvSpPr>
-          <p:cNvPr id="22" name="Shape 20"/>
-          <p:cNvSpPr/>
-          <p:nvPr/>
-        </p:nvSpPr>
-        <p:spPr>
-          <a:xfrm>
-            <a:off x="3282696" y="1508760"/>
-            <a:ext cx="164592" cy="164592"/>
-          </a:xfrm>
-          <a:prstGeom prst="ellipse">
-            <a:avLst/>
-          </a:prstGeom>
-          <a:solidFill>
-            <a:srgbClr val="D4A017"/>
-          </a:solidFill>
-          <a:ln/>
-        </p:spPr>
-      </p:sp>
-      <p:sp>
-        <p:nvSpPr>
-          <p:cNvPr id="23" name="Text 21"/>
-          <p:cNvSpPr/>
-          <p:nvPr/>
-        </p:nvSpPr>
-        <p:spPr>
-          <a:xfrm>
-            <a:off x="3520440" y="1481328"/>
-            <a:ext cx="2377440" cy="411480"/>
-          </a:xfrm>
-          <a:prstGeom prst="rect">
-            <a:avLst/>
-          </a:prstGeom>
-          <a:noFill/>
-          <a:ln/>
-        </p:spPr>
-        <p:txBody>
-          <a:bodyPr wrap="square" lIns="0" tIns="0" rIns="0" bIns="0" rtlCol="0" anchor="ctr"/>
-          <a:lstStyle/>
-          <a:p>
-            <a:r>
-              <a:rPr lang="en-US" sz="1000" dirty="0">
-                <a:latin typeface="Ubuntu" panose="020B0504030602030204" pitchFamily="34" charset="0"/>
-                <a:ea typeface="Calibri" pitchFamily="34" charset="-122"/>
-                <a:cs typeface="Calibri" pitchFamily="34" charset="-120"/>
-              </a:rPr>
-              <a:t>bcrypt version conflict with </a:t>
-            </a:r>
-            <a:r>
-              <a:rPr lang="en-US" sz="1000" dirty="0" err="1">
-                <a:latin typeface="Ubuntu" panose="020B0504030602030204" pitchFamily="34" charset="0"/>
-                <a:ea typeface="Calibri" pitchFamily="34" charset="-122"/>
-                <a:cs typeface="Calibri" pitchFamily="34" charset="-120"/>
-              </a:rPr>
-              <a:t>passlib</a:t>
-            </a:r>
-            <a:r>
-              <a:rPr lang="en-US" sz="1000" dirty="0">
-                <a:latin typeface="Ubuntu" panose="020B0504030602030204" pitchFamily="34" charset="0"/>
-                <a:ea typeface="Calibri" pitchFamily="34" charset="-122"/>
-                <a:cs typeface="Calibri" pitchFamily="34" charset="-120"/>
-              </a:rPr>
-              <a:t> library</a:t>
-            </a:r>
-          </a:p>
-        </p:txBody>
-      </p:sp>
-      <p:sp>
-        <p:nvSpPr>
-          <p:cNvPr id="24" name="Shape 22"/>
-          <p:cNvSpPr/>
-          <p:nvPr/>
-        </p:nvSpPr>
-        <p:spPr>
-          <a:xfrm>
-            <a:off x="3282696" y="2167128"/>
-            <a:ext cx="164592" cy="164592"/>
-          </a:xfrm>
-          <a:prstGeom prst="ellipse">
-            <a:avLst/>
-          </a:prstGeom>
-          <a:solidFill>
-            <a:srgbClr val="D4A017"/>
-          </a:solidFill>
-          <a:ln/>
-        </p:spPr>
-      </p:sp>
-      <p:sp>
-        <p:nvSpPr>
-          <p:cNvPr id="25" name="Text 23"/>
-          <p:cNvSpPr/>
-          <p:nvPr/>
-        </p:nvSpPr>
-        <p:spPr>
-          <a:xfrm>
-            <a:off x="3520440" y="2139696"/>
-            <a:ext cx="2377440" cy="411480"/>
-          </a:xfrm>
-          <a:prstGeom prst="rect">
-            <a:avLst/>
-          </a:prstGeom>
-          <a:noFill/>
-          <a:ln/>
-        </p:spPr>
-        <p:txBody>
-          <a:bodyPr wrap="square" lIns="0" tIns="0" rIns="0" bIns="0" rtlCol="0" anchor="ctr"/>
-          <a:lstStyle/>
-          <a:p>
-            <a:r>
-              <a:rPr lang="en-US" sz="1000" dirty="0">
-                <a:latin typeface="Ubuntu" panose="020B0504030602030204" pitchFamily="34" charset="0"/>
-                <a:ea typeface="Calibri" pitchFamily="34" charset="-122"/>
-                <a:cs typeface="Calibri" pitchFamily="34" charset="-120"/>
-              </a:rPr>
-              <a:t>CSV encoding issues with Arabic text (BOM, UTF-8-sig)</a:t>
-            </a:r>
-          </a:p>
-        </p:txBody>
-      </p:sp>
-      <p:sp>
-        <p:nvSpPr>
-          <p:cNvPr id="26" name="Shape 24"/>
-          <p:cNvSpPr/>
-          <p:nvPr/>
-        </p:nvSpPr>
-        <p:spPr>
-          <a:xfrm>
-            <a:off x="3282696" y="2825496"/>
-            <a:ext cx="164592" cy="164592"/>
-          </a:xfrm>
-          <a:prstGeom prst="ellipse">
-            <a:avLst/>
-          </a:prstGeom>
-          <a:solidFill>
-            <a:srgbClr val="D4A017"/>
-          </a:solidFill>
-          <a:ln/>
-        </p:spPr>
-      </p:sp>
-      <p:sp>
-        <p:nvSpPr>
-          <p:cNvPr id="27" name="Text 25"/>
-          <p:cNvSpPr/>
-          <p:nvPr/>
-        </p:nvSpPr>
-        <p:spPr>
-          <a:xfrm>
-            <a:off x="3520440" y="2798064"/>
-            <a:ext cx="2377440" cy="411480"/>
-          </a:xfrm>
-          <a:prstGeom prst="rect">
-            <a:avLst/>
-          </a:prstGeom>
-          <a:noFill/>
-          <a:ln/>
-        </p:spPr>
-        <p:txBody>
-          <a:bodyPr wrap="square" lIns="0" tIns="0" rIns="0" bIns="0" rtlCol="0" anchor="ctr"/>
-          <a:lstStyle/>
-          <a:p>
-            <a:r>
-              <a:rPr lang="en-US" sz="1000" dirty="0">
-                <a:latin typeface="Ubuntu" panose="020B0504030602030204" pitchFamily="34" charset="0"/>
-                <a:ea typeface="Calibri" pitchFamily="34" charset="-122"/>
-                <a:cs typeface="Calibri" pitchFamily="34" charset="-120"/>
-              </a:rPr>
-              <a:t>MySQL foreign key constraints during data deletion</a:t>
-            </a:r>
-          </a:p>
-        </p:txBody>
-      </p:sp>
-      <p:sp>
-        <p:nvSpPr>
-          <p:cNvPr id="28" name="Shape 26"/>
-          <p:cNvSpPr/>
-          <p:nvPr/>
-        </p:nvSpPr>
-        <p:spPr>
-          <a:xfrm>
-            <a:off x="3282696" y="3483864"/>
-            <a:ext cx="164592" cy="164592"/>
-          </a:xfrm>
-          <a:prstGeom prst="ellipse">
-            <a:avLst/>
-          </a:prstGeom>
-          <a:solidFill>
-            <a:srgbClr val="D4A017"/>
-          </a:solidFill>
-          <a:ln/>
-        </p:spPr>
-      </p:sp>
-      <p:sp>
-        <p:nvSpPr>
-          <p:cNvPr id="29" name="Text 27"/>
-          <p:cNvSpPr/>
-          <p:nvPr/>
-        </p:nvSpPr>
-        <p:spPr>
-          <a:xfrm>
-            <a:off x="3520440" y="3456432"/>
-            <a:ext cx="2377440" cy="411480"/>
-          </a:xfrm>
-          <a:prstGeom prst="rect">
-            <a:avLst/>
-          </a:prstGeom>
-          <a:noFill/>
-          <a:ln/>
-        </p:spPr>
-        <p:txBody>
-          <a:bodyPr wrap="square" lIns="0" tIns="0" rIns="0" bIns="0" rtlCol="0" anchor="ctr"/>
-          <a:lstStyle/>
-          <a:p>
-            <a:r>
-              <a:rPr lang="en-US" sz="1000" dirty="0">
-                <a:latin typeface="Ubuntu" panose="020B0504030602030204" pitchFamily="34" charset="0"/>
-                <a:ea typeface="Calibri" pitchFamily="34" charset="-122"/>
-                <a:cs typeface="Calibri" pitchFamily="34" charset="-120"/>
-              </a:rPr>
-              <a:t>CORS configuration between FastAPI and Vue.js</a:t>
-            </a:r>
-          </a:p>
-        </p:txBody>
-      </p:sp>
-      <p:sp>
-        <p:nvSpPr>
-          <p:cNvPr id="30" name="Shape 28"/>
-          <p:cNvSpPr/>
-          <p:nvPr/>
-        </p:nvSpPr>
-        <p:spPr>
-          <a:xfrm>
-            <a:off x="3282696" y="4142232"/>
-            <a:ext cx="164592" cy="164592"/>
-          </a:xfrm>
-          <a:prstGeom prst="ellipse">
-            <a:avLst/>
-          </a:prstGeom>
-          <a:solidFill>
-            <a:srgbClr val="D4A017"/>
-          </a:solidFill>
-          <a:ln/>
-        </p:spPr>
-      </p:sp>
-      <p:sp>
-        <p:nvSpPr>
-          <p:cNvPr id="31" name="Text 29"/>
-          <p:cNvSpPr/>
-          <p:nvPr/>
-        </p:nvSpPr>
-        <p:spPr>
-          <a:xfrm>
-            <a:off x="3520440" y="4114800"/>
-            <a:ext cx="2377440" cy="411480"/>
-          </a:xfrm>
-          <a:prstGeom prst="rect">
-            <a:avLst/>
-          </a:prstGeom>
-          <a:noFill/>
-          <a:ln/>
-        </p:spPr>
-        <p:txBody>
-          <a:bodyPr wrap="square" lIns="0" tIns="0" rIns="0" bIns="0" rtlCol="0" anchor="ctr"/>
-          <a:lstStyle/>
-          <a:p>
-            <a:r>
-              <a:rPr lang="en-US" sz="1000" dirty="0">
-                <a:latin typeface="Ubuntu" panose="020B0504030602030204" pitchFamily="34" charset="0"/>
-                <a:ea typeface="Calibri" pitchFamily="34" charset="-122"/>
-                <a:cs typeface="Calibri" pitchFamily="34" charset="-120"/>
-              </a:rPr>
-              <a:t>Arabic text normalization for AI matching accuracy</a:t>
-            </a:r>
-          </a:p>
-        </p:txBody>
-      </p:sp>
-      <p:sp>
-        <p:nvSpPr>
-          <p:cNvPr id="32" name="Shape 30"/>
-          <p:cNvSpPr/>
-          <p:nvPr/>
-        </p:nvSpPr>
-        <p:spPr>
-          <a:xfrm>
-            <a:off x="6163056" y="868680"/>
-            <a:ext cx="2834640" cy="4160520"/>
-          </a:xfrm>
-          <a:prstGeom prst="rect">
-            <a:avLst/>
-          </a:prstGeom>
-          <a:solidFill>
-            <a:srgbClr val="FFFFFF">
-              <a:alpha val="7000"/>
-            </a:srgbClr>
-          </a:solidFill>
-          <a:ln w="19050">
-            <a:solidFill>
-              <a:srgbClr val="1A6B3C"/>
-            </a:solidFill>
-            <a:prstDash val="solid"/>
-          </a:ln>
-        </p:spPr>
-      </p:sp>
-      <p:sp>
-        <p:nvSpPr>
-          <p:cNvPr id="33" name="Shape 31"/>
-          <p:cNvSpPr/>
-          <p:nvPr/>
-        </p:nvSpPr>
-        <p:spPr>
-          <a:xfrm>
-            <a:off x="6163056" y="868680"/>
-            <a:ext cx="2834640" cy="502920"/>
-          </a:xfrm>
-          <a:prstGeom prst="rect">
-            <a:avLst/>
-          </a:prstGeom>
-          <a:solidFill>
-            <a:srgbClr val="1A6B3C"/>
-          </a:solidFill>
-          <a:ln/>
-        </p:spPr>
-      </p:sp>
-      <p:sp>
-        <p:nvSpPr>
-          <p:cNvPr id="34" name="Text 32"/>
-          <p:cNvSpPr/>
-          <p:nvPr/>
-        </p:nvSpPr>
-        <p:spPr>
-          <a:xfrm>
-            <a:off x="6163056" y="868680"/>
-            <a:ext cx="2834640" cy="502920"/>
-          </a:xfrm>
-          <a:prstGeom prst="rect">
-            <a:avLst/>
-          </a:prstGeom>
-          <a:noFill/>
-          <a:ln/>
-        </p:spPr>
-        <p:txBody>
-          <a:bodyPr wrap="square" lIns="0" tIns="0" rIns="0" bIns="0" rtlCol="0" anchor="ctr"/>
-          <a:lstStyle/>
-          <a:p>
-            <a:pPr marL="0" indent="0" algn="ctr">
-              <a:buNone/>
-            </a:pPr>
-            <a:r>
-              <a:rPr lang="en-US" sz="1200" b="1" dirty="0">
-                <a:solidFill>
-                  <a:srgbClr val="FFFFFF"/>
-                </a:solidFill>
-                <a:latin typeface="Ubuntu" panose="020B0504030602030204" pitchFamily="34" charset="0"/>
-                <a:ea typeface="Georgia" pitchFamily="34" charset="-122"/>
-                <a:cs typeface="Georgia" pitchFamily="34" charset="-120"/>
-              </a:rPr>
-              <a:t>🚀 Areas for Improvement</a:t>
-            </a:r>
-            <a:endParaRPr lang="en-US" sz="1200" dirty="0">
-              <a:latin typeface="Ubuntu" panose="020B0504030602030204" pitchFamily="34" charset="0"/>
-            </a:endParaRPr>
-          </a:p>
-        </p:txBody>
-      </p:sp>
-      <p:sp>
-        <p:nvSpPr>
-          <p:cNvPr id="35" name="Shape 33"/>
-          <p:cNvSpPr/>
-          <p:nvPr/>
-        </p:nvSpPr>
-        <p:spPr>
-          <a:xfrm>
-            <a:off x="6272784" y="1508760"/>
-            <a:ext cx="164592" cy="164592"/>
-          </a:xfrm>
-          <a:prstGeom prst="ellipse">
-            <a:avLst/>
-          </a:prstGeom>
-          <a:solidFill>
-            <a:srgbClr val="1A6B3C"/>
-          </a:solidFill>
-          <a:ln/>
-        </p:spPr>
-      </p:sp>
-      <p:sp>
-        <p:nvSpPr>
-          <p:cNvPr id="36" name="Text 34"/>
-          <p:cNvSpPr/>
-          <p:nvPr/>
-        </p:nvSpPr>
-        <p:spPr>
-          <a:xfrm>
-            <a:off x="6510528" y="1481328"/>
-            <a:ext cx="2377440" cy="411480"/>
-          </a:xfrm>
-          <a:prstGeom prst="rect">
-            <a:avLst/>
-          </a:prstGeom>
-          <a:noFill/>
-          <a:ln/>
-        </p:spPr>
-        <p:txBody>
-          <a:bodyPr wrap="square" lIns="0" tIns="0" rIns="0" bIns="0" rtlCol="0" anchor="ctr"/>
-          <a:lstStyle/>
-          <a:p>
-            <a:r>
-              <a:rPr lang="en-US" sz="1000" dirty="0">
-                <a:latin typeface="Ubuntu" panose="020B0504030602030204" pitchFamily="34" charset="0"/>
-                <a:ea typeface="Calibri" pitchFamily="34" charset="-122"/>
-                <a:cs typeface="Calibri" pitchFamily="34" charset="-120"/>
-              </a:rPr>
-              <a:t>Add Flutter mobile application for iOS/Android</a:t>
-            </a:r>
-          </a:p>
-        </p:txBody>
-      </p:sp>
-      <p:sp>
-        <p:nvSpPr>
-          <p:cNvPr id="37" name="Shape 35"/>
-          <p:cNvSpPr/>
-          <p:nvPr/>
-        </p:nvSpPr>
-        <p:spPr>
-          <a:xfrm>
-            <a:off x="6272784" y="2167128"/>
-            <a:ext cx="164592" cy="164592"/>
-          </a:xfrm>
-          <a:prstGeom prst="ellipse">
-            <a:avLst/>
-          </a:prstGeom>
-          <a:solidFill>
-            <a:srgbClr val="1A6B3C"/>
-          </a:solidFill>
-          <a:ln/>
-        </p:spPr>
-      </p:sp>
-      <p:sp>
-        <p:nvSpPr>
-          <p:cNvPr id="38" name="Text 36"/>
-          <p:cNvSpPr/>
-          <p:nvPr/>
-        </p:nvSpPr>
-        <p:spPr>
-          <a:xfrm>
-            <a:off x="6510528" y="2139696"/>
-            <a:ext cx="2377440" cy="411480"/>
-          </a:xfrm>
-          <a:prstGeom prst="rect">
-            <a:avLst/>
-          </a:prstGeom>
-          <a:noFill/>
-          <a:ln/>
-        </p:spPr>
-        <p:txBody>
-          <a:bodyPr wrap="square" lIns="0" tIns="0" rIns="0" bIns="0" rtlCol="0" anchor="ctr"/>
-          <a:lstStyle/>
-          <a:p>
-            <a:r>
-              <a:rPr lang="en-US" sz="1000" dirty="0">
-                <a:latin typeface="Ubuntu" panose="020B0504030602030204" pitchFamily="34" charset="0"/>
-                <a:ea typeface="Calibri" pitchFamily="34" charset="-122"/>
-                <a:cs typeface="Calibri" pitchFamily="34" charset="-120"/>
-              </a:rPr>
-              <a:t>Integrate GPT API for recipe explanation in Arabic</a:t>
-            </a:r>
-          </a:p>
-        </p:txBody>
-      </p:sp>
-      <p:sp>
-        <p:nvSpPr>
-          <p:cNvPr id="39" name="Shape 37"/>
-          <p:cNvSpPr/>
-          <p:nvPr/>
-        </p:nvSpPr>
-        <p:spPr>
-          <a:xfrm>
-            <a:off x="6272784" y="2825496"/>
-            <a:ext cx="164592" cy="164592"/>
-          </a:xfrm>
-          <a:prstGeom prst="ellipse">
-            <a:avLst/>
-          </a:prstGeom>
-          <a:solidFill>
-            <a:srgbClr val="1A6B3C"/>
-          </a:solidFill>
-          <a:ln/>
-        </p:spPr>
-      </p:sp>
-      <p:sp>
-        <p:nvSpPr>
-          <p:cNvPr id="40" name="Text 38"/>
-          <p:cNvSpPr/>
-          <p:nvPr/>
-        </p:nvSpPr>
-        <p:spPr>
-          <a:xfrm>
-            <a:off x="6510528" y="2798064"/>
-            <a:ext cx="2377440" cy="411480"/>
-          </a:xfrm>
-          <a:prstGeom prst="rect">
-            <a:avLst/>
-          </a:prstGeom>
-          <a:noFill/>
-          <a:ln/>
-        </p:spPr>
-        <p:txBody>
-          <a:bodyPr wrap="square" lIns="0" tIns="0" rIns="0" bIns="0" rtlCol="0" anchor="ctr"/>
-          <a:lstStyle/>
-          <a:p>
-            <a:r>
-              <a:rPr lang="en-US" sz="1000" dirty="0">
-                <a:latin typeface="Ubuntu" panose="020B0504030602030204" pitchFamily="34" charset="0"/>
-                <a:ea typeface="Calibri" pitchFamily="34" charset="-122"/>
-                <a:cs typeface="Calibri" pitchFamily="34" charset="-120"/>
-              </a:rPr>
-              <a:t>Calculate nutritional values and calories per recipe</a:t>
-            </a:r>
-          </a:p>
-        </p:txBody>
-      </p:sp>
-      <p:sp>
-        <p:nvSpPr>
-          <p:cNvPr id="41" name="Shape 39"/>
-          <p:cNvSpPr/>
-          <p:nvPr/>
-        </p:nvSpPr>
-        <p:spPr>
-          <a:xfrm>
-            <a:off x="6272784" y="3483864"/>
-            <a:ext cx="164592" cy="164592"/>
-          </a:xfrm>
-          <a:prstGeom prst="ellipse">
-            <a:avLst/>
-          </a:prstGeom>
-          <a:solidFill>
-            <a:srgbClr val="1A6B3C"/>
-          </a:solidFill>
-          <a:ln/>
-        </p:spPr>
-      </p:sp>
-      <p:sp>
-        <p:nvSpPr>
-          <p:cNvPr id="42" name="Text 40"/>
-          <p:cNvSpPr/>
-          <p:nvPr/>
-        </p:nvSpPr>
-        <p:spPr>
-          <a:xfrm>
-            <a:off x="6510528" y="3456432"/>
-            <a:ext cx="2377440" cy="411480"/>
-          </a:xfrm>
-          <a:prstGeom prst="rect">
-            <a:avLst/>
-          </a:prstGeom>
-          <a:noFill/>
-          <a:ln/>
-        </p:spPr>
-        <p:txBody>
-          <a:bodyPr wrap="square" lIns="0" tIns="0" rIns="0" bIns="0" rtlCol="0" anchor="ctr"/>
-          <a:lstStyle/>
-          <a:p>
-            <a:r>
-              <a:rPr lang="en-US" sz="1000" dirty="0">
-                <a:latin typeface="Ubuntu" panose="020B0504030602030204" pitchFamily="34" charset="0"/>
-                <a:ea typeface="Calibri" pitchFamily="34" charset="-122"/>
-                <a:cs typeface="Calibri" pitchFamily="34" charset="-120"/>
-              </a:rPr>
-              <a:t>Add voice search in Arabic using Speech Recognition</a:t>
-            </a:r>
-          </a:p>
-        </p:txBody>
-      </p:sp>
-      <p:sp>
-        <p:nvSpPr>
-          <p:cNvPr id="43" name="Shape 41"/>
-          <p:cNvSpPr/>
-          <p:nvPr/>
-        </p:nvSpPr>
-        <p:spPr>
-          <a:xfrm>
-            <a:off x="6272784" y="4142232"/>
-            <a:ext cx="164592" cy="164592"/>
-          </a:xfrm>
-          <a:prstGeom prst="ellipse">
-            <a:avLst/>
-          </a:prstGeom>
-          <a:solidFill>
-            <a:srgbClr val="1A6B3C"/>
-          </a:solidFill>
-          <a:ln/>
-        </p:spPr>
-      </p:sp>
-      <p:sp>
-        <p:nvSpPr>
-          <p:cNvPr id="44" name="Text 42"/>
-          <p:cNvSpPr/>
-          <p:nvPr/>
-        </p:nvSpPr>
-        <p:spPr>
-          <a:xfrm>
-            <a:off x="6510528" y="4114800"/>
-            <a:ext cx="2377440" cy="411480"/>
-          </a:xfrm>
-          <a:prstGeom prst="rect">
-            <a:avLst/>
-          </a:prstGeom>
-          <a:noFill/>
-          <a:ln/>
-        </p:spPr>
-        <p:txBody>
-          <a:bodyPr wrap="square" lIns="0" tIns="0" rIns="0" bIns="0" rtlCol="0" anchor="ctr"/>
-          <a:lstStyle/>
-          <a:p>
-            <a:r>
-              <a:rPr lang="en-US" sz="1000" dirty="0">
-                <a:latin typeface="Ubuntu" panose="020B0504030602030204" pitchFamily="34" charset="0"/>
-                <a:ea typeface="Calibri" pitchFamily="34" charset="-122"/>
-                <a:cs typeface="Calibri" pitchFamily="34" charset="-120"/>
-              </a:rPr>
-              <a:t>Build community features for users to share recipes</a:t>
-            </a:r>
-          </a:p>
-        </p:txBody>
-      </p:sp>
+      <p:pic>
+        <p:nvPicPr>
+          <p:cNvPr id="37" name="Image 36">
+            <a:extLst>
+              <a:ext uri="{FF2B5EF4-FFF2-40B4-BE49-F238E27FC236}">
+                <a16:creationId xmlns:a16="http://schemas.microsoft.com/office/drawing/2014/main" id="{F23CA3D6-753C-7DAA-8B92-8749258EE8D6}"/>
+              </a:ext>
+            </a:extLst>
+          </p:cNvPr>
+          <p:cNvPicPr>
+            <a:picLocks noChangeAspect="1"/>
+          </p:cNvPicPr>
+          <p:nvPr/>
+        </p:nvPicPr>
+        <p:blipFill>
+          <a:blip r:embed="rId3"/>
+          <a:stretch>
+            <a:fillRect/>
+          </a:stretch>
+        </p:blipFill>
+        <p:spPr>
+          <a:xfrm>
+            <a:off x="57677" y="1606355"/>
+            <a:ext cx="9028645" cy="3413702"/>
+          </a:xfrm>
+          <a:prstGeom prst="rect">
+            <a:avLst/>
+          </a:prstGeom>
+        </p:spPr>
+      </p:pic>
     </p:spTree>
   </p:cSld>
   <p:clrMapOvr>
@@ -5169,6 +4378,1178 @@
 </file>
 
 <file path=ppt/slides/slide14.xml><?xml version="1.0" encoding="utf-8"?>
+<p:sld xmlns:a="http://schemas.openxmlformats.org/drawingml/2006/main" xmlns:r="http://schemas.openxmlformats.org/officeDocument/2006/relationships" xmlns:p="http://schemas.openxmlformats.org/presentationml/2006/main">
+  <p:cSld>
+    <p:spTree>
+      <p:nvGrpSpPr>
+        <p:cNvPr id="1" name=""/>
+        <p:cNvGrpSpPr/>
+        <p:nvPr/>
+      </p:nvGrpSpPr>
+      <p:grpSpPr>
+        <a:xfrm>
+          <a:off x="0" y="0"/>
+          <a:ext cx="0" cy="0"/>
+          <a:chOff x="0" y="0"/>
+          <a:chExt cx="0" cy="0"/>
+        </a:xfrm>
+      </p:grpSpPr>
+      <p:sp>
+        <p:nvSpPr>
+          <p:cNvPr id="2" name="Shape 0"/>
+          <p:cNvSpPr/>
+          <p:nvPr/>
+        </p:nvSpPr>
+        <p:spPr>
+          <a:xfrm>
+            <a:off x="0" y="0"/>
+            <a:ext cx="9144000" cy="777240"/>
+          </a:xfrm>
+          <a:prstGeom prst="rect">
+            <a:avLst/>
+          </a:prstGeom>
+          <a:solidFill>
+            <a:srgbClr val="C0392B"/>
+          </a:solidFill>
+          <a:ln/>
+        </p:spPr>
+      </p:sp>
+      <p:sp>
+        <p:nvSpPr>
+          <p:cNvPr id="3" name="Shape 1"/>
+          <p:cNvSpPr/>
+          <p:nvPr/>
+        </p:nvSpPr>
+        <p:spPr>
+          <a:xfrm>
+            <a:off x="0" y="0"/>
+            <a:ext cx="457200" cy="777240"/>
+          </a:xfrm>
+          <a:prstGeom prst="rect">
+            <a:avLst/>
+          </a:prstGeom>
+          <a:solidFill>
+            <a:srgbClr val="C0392B"/>
+          </a:solidFill>
+          <a:ln/>
+        </p:spPr>
+      </p:sp>
+      <p:sp>
+        <p:nvSpPr>
+          <p:cNvPr id="4" name="Text 2"/>
+          <p:cNvSpPr/>
+          <p:nvPr/>
+        </p:nvSpPr>
+        <p:spPr>
+          <a:xfrm>
+            <a:off x="548640" y="0"/>
+            <a:ext cx="7315200" cy="777240"/>
+          </a:xfrm>
+          <a:prstGeom prst="rect">
+            <a:avLst/>
+          </a:prstGeom>
+          <a:noFill/>
+          <a:ln/>
+        </p:spPr>
+        <p:txBody>
+          <a:bodyPr wrap="square" lIns="0" tIns="0" rIns="0" bIns="0" rtlCol="0" anchor="ctr"/>
+          <a:lstStyle/>
+          <a:p>
+            <a:pPr marL="0" indent="0" algn="l">
+              <a:buNone/>
+            </a:pPr>
+            <a:r>
+              <a:rPr lang="en-US" sz="2200" b="1" dirty="0">
+                <a:solidFill>
+                  <a:srgbClr val="FFFFFF"/>
+                </a:solidFill>
+                <a:latin typeface="Ubuntu" panose="020B0504030602030204" pitchFamily="34" charset="0"/>
+                <a:ea typeface="Georgia" pitchFamily="34" charset="-122"/>
+                <a:cs typeface="Georgia" pitchFamily="34" charset="-120"/>
+              </a:rPr>
+              <a:t>Part 5 : Conclusion</a:t>
+            </a:r>
+            <a:endParaRPr lang="en-US" sz="2200" dirty="0">
+              <a:latin typeface="Ubuntu" panose="020B0504030602030204" pitchFamily="34" charset="0"/>
+            </a:endParaRPr>
+          </a:p>
+        </p:txBody>
+      </p:sp>
+      <p:sp>
+        <p:nvSpPr>
+          <p:cNvPr id="6" name="Shape 4"/>
+          <p:cNvSpPr/>
+          <p:nvPr/>
+        </p:nvSpPr>
+        <p:spPr>
+          <a:xfrm>
+            <a:off x="182880" y="868680"/>
+            <a:ext cx="2834640" cy="4160520"/>
+          </a:xfrm>
+          <a:prstGeom prst="rect">
+            <a:avLst/>
+          </a:prstGeom>
+          <a:solidFill>
+            <a:srgbClr val="FFFFFF">
+              <a:alpha val="7000"/>
+            </a:srgbClr>
+          </a:solidFill>
+          <a:ln w="19050">
+            <a:solidFill>
+              <a:srgbClr val="C0392B"/>
+            </a:solidFill>
+            <a:prstDash val="solid"/>
+          </a:ln>
+        </p:spPr>
+      </p:sp>
+      <p:sp>
+        <p:nvSpPr>
+          <p:cNvPr id="7" name="Shape 5"/>
+          <p:cNvSpPr/>
+          <p:nvPr/>
+        </p:nvSpPr>
+        <p:spPr>
+          <a:xfrm>
+            <a:off x="182880" y="868680"/>
+            <a:ext cx="2834640" cy="502920"/>
+          </a:xfrm>
+          <a:prstGeom prst="rect">
+            <a:avLst/>
+          </a:prstGeom>
+          <a:solidFill>
+            <a:srgbClr val="C0392B"/>
+          </a:solidFill>
+          <a:ln/>
+        </p:spPr>
+      </p:sp>
+      <p:sp>
+        <p:nvSpPr>
+          <p:cNvPr id="8" name="Text 6"/>
+          <p:cNvSpPr/>
+          <p:nvPr/>
+        </p:nvSpPr>
+        <p:spPr>
+          <a:xfrm>
+            <a:off x="182880" y="868680"/>
+            <a:ext cx="2834640" cy="502920"/>
+          </a:xfrm>
+          <a:prstGeom prst="rect">
+            <a:avLst/>
+          </a:prstGeom>
+          <a:noFill/>
+          <a:ln/>
+        </p:spPr>
+        <p:txBody>
+          <a:bodyPr wrap="square" lIns="0" tIns="0" rIns="0" bIns="0" rtlCol="0" anchor="ctr"/>
+          <a:lstStyle/>
+          <a:p>
+            <a:pPr marL="0" indent="0" algn="ctr">
+              <a:buNone/>
+            </a:pPr>
+            <a:r>
+              <a:rPr lang="en-US" sz="1200" b="1" dirty="0">
+                <a:solidFill>
+                  <a:srgbClr val="FFFFFF"/>
+                </a:solidFill>
+                <a:latin typeface="Ubuntu" panose="020B0504030602030204" pitchFamily="34" charset="0"/>
+                <a:ea typeface="Georgia" pitchFamily="34" charset="-122"/>
+                <a:cs typeface="Georgia" pitchFamily="34" charset="-120"/>
+              </a:rPr>
+              <a:t>📋 Summary of Work</a:t>
+            </a:r>
+            <a:endParaRPr lang="en-US" sz="1200" dirty="0">
+              <a:latin typeface="Ubuntu" panose="020B0504030602030204" pitchFamily="34" charset="0"/>
+            </a:endParaRPr>
+          </a:p>
+        </p:txBody>
+      </p:sp>
+      <p:sp>
+        <p:nvSpPr>
+          <p:cNvPr id="9" name="Shape 7"/>
+          <p:cNvSpPr/>
+          <p:nvPr/>
+        </p:nvSpPr>
+        <p:spPr>
+          <a:xfrm>
+            <a:off x="292608" y="1508760"/>
+            <a:ext cx="164592" cy="164592"/>
+          </a:xfrm>
+          <a:prstGeom prst="ellipse">
+            <a:avLst/>
+          </a:prstGeom>
+          <a:solidFill>
+            <a:srgbClr val="C0392B"/>
+          </a:solidFill>
+          <a:ln/>
+        </p:spPr>
+      </p:sp>
+      <p:sp>
+        <p:nvSpPr>
+          <p:cNvPr id="10" name="Text 8"/>
+          <p:cNvSpPr/>
+          <p:nvPr/>
+        </p:nvSpPr>
+        <p:spPr>
+          <a:xfrm>
+            <a:off x="530352" y="1481328"/>
+            <a:ext cx="2377440" cy="411480"/>
+          </a:xfrm>
+          <a:prstGeom prst="rect">
+            <a:avLst/>
+          </a:prstGeom>
+          <a:noFill/>
+          <a:ln/>
+        </p:spPr>
+        <p:txBody>
+          <a:bodyPr wrap="square" lIns="0" tIns="0" rIns="0" bIns="0" rtlCol="0" anchor="ctr"/>
+          <a:lstStyle/>
+          <a:p>
+            <a:pPr marL="0" indent="0">
+              <a:buNone/>
+            </a:pPr>
+            <a:r>
+              <a:rPr lang="en-US" sz="1000" dirty="0">
+                <a:latin typeface="Ubuntu" panose="020B0504030602030204" pitchFamily="34" charset="0"/>
+                <a:ea typeface="Calibri" pitchFamily="34" charset="-122"/>
+                <a:cs typeface="Calibri" pitchFamily="34" charset="-120"/>
+              </a:rPr>
+              <a:t>Built a full-stack web app for Algerian recipe recommendations</a:t>
+            </a:r>
+            <a:endParaRPr lang="en-US" sz="1000" dirty="0">
+              <a:latin typeface="Ubuntu" panose="020B0504030602030204" pitchFamily="34" charset="0"/>
+            </a:endParaRPr>
+          </a:p>
+        </p:txBody>
+      </p:sp>
+      <p:sp>
+        <p:nvSpPr>
+          <p:cNvPr id="11" name="Shape 9"/>
+          <p:cNvSpPr/>
+          <p:nvPr/>
+        </p:nvSpPr>
+        <p:spPr>
+          <a:xfrm>
+            <a:off x="292608" y="2167128"/>
+            <a:ext cx="164592" cy="164592"/>
+          </a:xfrm>
+          <a:prstGeom prst="ellipse">
+            <a:avLst/>
+          </a:prstGeom>
+          <a:solidFill>
+            <a:srgbClr val="C0392B"/>
+          </a:solidFill>
+          <a:ln/>
+        </p:spPr>
+      </p:sp>
+      <p:sp>
+        <p:nvSpPr>
+          <p:cNvPr id="12" name="Text 10"/>
+          <p:cNvSpPr/>
+          <p:nvPr/>
+        </p:nvSpPr>
+        <p:spPr>
+          <a:xfrm>
+            <a:off x="530352" y="2139696"/>
+            <a:ext cx="2377440" cy="411480"/>
+          </a:xfrm>
+          <a:prstGeom prst="rect">
+            <a:avLst/>
+          </a:prstGeom>
+          <a:noFill/>
+          <a:ln/>
+        </p:spPr>
+        <p:txBody>
+          <a:bodyPr wrap="square" lIns="0" tIns="0" rIns="0" bIns="0" rtlCol="0" anchor="ctr"/>
+          <a:lstStyle/>
+          <a:p>
+            <a:r>
+              <a:rPr lang="en-US" sz="1000" dirty="0">
+                <a:latin typeface="Ubuntu" panose="020B0504030602030204" pitchFamily="34" charset="0"/>
+                <a:ea typeface="Calibri" pitchFamily="34" charset="-122"/>
+                <a:cs typeface="Calibri" pitchFamily="34" charset="-120"/>
+              </a:rPr>
+              <a:t>Implemented 3-level AI engine: Simple Match + TF-IDF + Transformers</a:t>
+            </a:r>
+          </a:p>
+        </p:txBody>
+      </p:sp>
+      <p:sp>
+        <p:nvSpPr>
+          <p:cNvPr id="13" name="Shape 11"/>
+          <p:cNvSpPr/>
+          <p:nvPr/>
+        </p:nvSpPr>
+        <p:spPr>
+          <a:xfrm>
+            <a:off x="292608" y="2825496"/>
+            <a:ext cx="164592" cy="164592"/>
+          </a:xfrm>
+          <a:prstGeom prst="ellipse">
+            <a:avLst/>
+          </a:prstGeom>
+          <a:solidFill>
+            <a:srgbClr val="C0392B"/>
+          </a:solidFill>
+          <a:ln/>
+        </p:spPr>
+      </p:sp>
+      <p:sp>
+        <p:nvSpPr>
+          <p:cNvPr id="14" name="Text 12"/>
+          <p:cNvSpPr/>
+          <p:nvPr/>
+        </p:nvSpPr>
+        <p:spPr>
+          <a:xfrm>
+            <a:off x="530352" y="2798064"/>
+            <a:ext cx="2377440" cy="411480"/>
+          </a:xfrm>
+          <a:prstGeom prst="rect">
+            <a:avLst/>
+          </a:prstGeom>
+          <a:noFill/>
+          <a:ln/>
+        </p:spPr>
+        <p:txBody>
+          <a:bodyPr wrap="square" lIns="0" tIns="0" rIns="0" bIns="0" rtlCol="0" anchor="ctr"/>
+          <a:lstStyle/>
+          <a:p>
+            <a:r>
+              <a:rPr lang="en-US" sz="1000" dirty="0">
+                <a:latin typeface="Ubuntu" panose="020B0504030602030204" pitchFamily="34" charset="0"/>
+                <a:ea typeface="Calibri" pitchFamily="34" charset="-122"/>
+                <a:cs typeface="Calibri" pitchFamily="34" charset="-120"/>
+              </a:rPr>
+              <a:t>Created Admin Dashboard with CSV import functionality</a:t>
+            </a:r>
+          </a:p>
+        </p:txBody>
+      </p:sp>
+      <p:sp>
+        <p:nvSpPr>
+          <p:cNvPr id="15" name="Shape 13"/>
+          <p:cNvSpPr/>
+          <p:nvPr/>
+        </p:nvSpPr>
+        <p:spPr>
+          <a:xfrm>
+            <a:off x="292608" y="3483864"/>
+            <a:ext cx="164592" cy="164592"/>
+          </a:xfrm>
+          <a:prstGeom prst="ellipse">
+            <a:avLst/>
+          </a:prstGeom>
+          <a:solidFill>
+            <a:srgbClr val="C0392B"/>
+          </a:solidFill>
+          <a:ln/>
+        </p:spPr>
+      </p:sp>
+      <p:sp>
+        <p:nvSpPr>
+          <p:cNvPr id="16" name="Text 14"/>
+          <p:cNvSpPr/>
+          <p:nvPr/>
+        </p:nvSpPr>
+        <p:spPr>
+          <a:xfrm>
+            <a:off x="530352" y="3456432"/>
+            <a:ext cx="2377440" cy="411480"/>
+          </a:xfrm>
+          <a:prstGeom prst="rect">
+            <a:avLst/>
+          </a:prstGeom>
+          <a:noFill/>
+          <a:ln/>
+        </p:spPr>
+        <p:txBody>
+          <a:bodyPr wrap="square" lIns="0" tIns="0" rIns="0" bIns="0" rtlCol="0" anchor="ctr"/>
+          <a:lstStyle/>
+          <a:p>
+            <a:r>
+              <a:rPr lang="en-US" sz="1000" dirty="0">
+                <a:latin typeface="Ubuntu" panose="020B0504030602030204" pitchFamily="34" charset="0"/>
+                <a:ea typeface="Calibri" pitchFamily="34" charset="-122"/>
+                <a:cs typeface="Calibri" pitchFamily="34" charset="-120"/>
+              </a:rPr>
+              <a:t>Developed bilingual support (Arabic RTL + English LTR)</a:t>
+            </a:r>
+          </a:p>
+        </p:txBody>
+      </p:sp>
+      <p:sp>
+        <p:nvSpPr>
+          <p:cNvPr id="17" name="Shape 15"/>
+          <p:cNvSpPr/>
+          <p:nvPr/>
+        </p:nvSpPr>
+        <p:spPr>
+          <a:xfrm>
+            <a:off x="292608" y="4142232"/>
+            <a:ext cx="164592" cy="164592"/>
+          </a:xfrm>
+          <a:prstGeom prst="ellipse">
+            <a:avLst/>
+          </a:prstGeom>
+          <a:solidFill>
+            <a:srgbClr val="C0392B"/>
+          </a:solidFill>
+          <a:ln/>
+        </p:spPr>
+      </p:sp>
+      <p:sp>
+        <p:nvSpPr>
+          <p:cNvPr id="18" name="Text 16"/>
+          <p:cNvSpPr/>
+          <p:nvPr/>
+        </p:nvSpPr>
+        <p:spPr>
+          <a:xfrm>
+            <a:off x="530352" y="4114800"/>
+            <a:ext cx="2377440" cy="411480"/>
+          </a:xfrm>
+          <a:prstGeom prst="rect">
+            <a:avLst/>
+          </a:prstGeom>
+          <a:noFill/>
+          <a:ln/>
+        </p:spPr>
+        <p:txBody>
+          <a:bodyPr wrap="square" lIns="0" tIns="0" rIns="0" bIns="0" rtlCol="0" anchor="ctr"/>
+          <a:lstStyle/>
+          <a:p>
+            <a:r>
+              <a:rPr lang="en-US" sz="1000" dirty="0">
+                <a:latin typeface="Ubuntu" panose="020B0504030602030204" pitchFamily="34" charset="0"/>
+                <a:ea typeface="Calibri" pitchFamily="34" charset="-122"/>
+                <a:cs typeface="Calibri" pitchFamily="34" charset="-120"/>
+              </a:rPr>
+              <a:t>Secured with JWT authentication and bcrypt password hashing</a:t>
+            </a:r>
+          </a:p>
+        </p:txBody>
+      </p:sp>
+      <p:sp>
+        <p:nvSpPr>
+          <p:cNvPr id="19" name="Shape 17"/>
+          <p:cNvSpPr/>
+          <p:nvPr/>
+        </p:nvSpPr>
+        <p:spPr>
+          <a:xfrm>
+            <a:off x="3172968" y="868680"/>
+            <a:ext cx="2834640" cy="4160520"/>
+          </a:xfrm>
+          <a:prstGeom prst="rect">
+            <a:avLst/>
+          </a:prstGeom>
+          <a:solidFill>
+            <a:srgbClr val="FFFFFF">
+              <a:alpha val="7000"/>
+            </a:srgbClr>
+          </a:solidFill>
+          <a:ln w="19050">
+            <a:solidFill>
+              <a:srgbClr val="D4A017"/>
+            </a:solidFill>
+            <a:prstDash val="solid"/>
+          </a:ln>
+        </p:spPr>
+      </p:sp>
+      <p:sp>
+        <p:nvSpPr>
+          <p:cNvPr id="20" name="Shape 18"/>
+          <p:cNvSpPr/>
+          <p:nvPr/>
+        </p:nvSpPr>
+        <p:spPr>
+          <a:xfrm>
+            <a:off x="3172968" y="868680"/>
+            <a:ext cx="2834640" cy="502920"/>
+          </a:xfrm>
+          <a:prstGeom prst="rect">
+            <a:avLst/>
+          </a:prstGeom>
+          <a:solidFill>
+            <a:srgbClr val="D4A017"/>
+          </a:solidFill>
+          <a:ln/>
+        </p:spPr>
+      </p:sp>
+      <p:sp>
+        <p:nvSpPr>
+          <p:cNvPr id="21" name="Text 19"/>
+          <p:cNvSpPr/>
+          <p:nvPr/>
+        </p:nvSpPr>
+        <p:spPr>
+          <a:xfrm>
+            <a:off x="3172968" y="868680"/>
+            <a:ext cx="2834640" cy="502920"/>
+          </a:xfrm>
+          <a:prstGeom prst="rect">
+            <a:avLst/>
+          </a:prstGeom>
+          <a:noFill/>
+          <a:ln/>
+        </p:spPr>
+        <p:txBody>
+          <a:bodyPr wrap="square" lIns="0" tIns="0" rIns="0" bIns="0" rtlCol="0" anchor="ctr"/>
+          <a:lstStyle/>
+          <a:p>
+            <a:pPr marL="0" indent="0" algn="ctr">
+              <a:buNone/>
+            </a:pPr>
+            <a:r>
+              <a:rPr lang="en-US" sz="1200" b="1" dirty="0">
+                <a:solidFill>
+                  <a:srgbClr val="FFFFFF"/>
+                </a:solidFill>
+                <a:latin typeface="Ubuntu" panose="020B0504030602030204" pitchFamily="34" charset="0"/>
+                <a:ea typeface="Georgia" pitchFamily="34" charset="-122"/>
+                <a:cs typeface="Georgia" pitchFamily="34" charset="-120"/>
+              </a:rPr>
+              <a:t>⚠️ Difficulties Encountered</a:t>
+            </a:r>
+            <a:endParaRPr lang="en-US" sz="1200" dirty="0">
+              <a:latin typeface="Ubuntu" panose="020B0504030602030204" pitchFamily="34" charset="0"/>
+            </a:endParaRPr>
+          </a:p>
+        </p:txBody>
+      </p:sp>
+      <p:sp>
+        <p:nvSpPr>
+          <p:cNvPr id="22" name="Shape 20"/>
+          <p:cNvSpPr/>
+          <p:nvPr/>
+        </p:nvSpPr>
+        <p:spPr>
+          <a:xfrm>
+            <a:off x="3282696" y="1508760"/>
+            <a:ext cx="164592" cy="164592"/>
+          </a:xfrm>
+          <a:prstGeom prst="ellipse">
+            <a:avLst/>
+          </a:prstGeom>
+          <a:solidFill>
+            <a:srgbClr val="D4A017"/>
+          </a:solidFill>
+          <a:ln/>
+        </p:spPr>
+      </p:sp>
+      <p:sp>
+        <p:nvSpPr>
+          <p:cNvPr id="23" name="Text 21"/>
+          <p:cNvSpPr/>
+          <p:nvPr/>
+        </p:nvSpPr>
+        <p:spPr>
+          <a:xfrm>
+            <a:off x="3520440" y="1481328"/>
+            <a:ext cx="2377440" cy="411480"/>
+          </a:xfrm>
+          <a:prstGeom prst="rect">
+            <a:avLst/>
+          </a:prstGeom>
+          <a:noFill/>
+          <a:ln/>
+        </p:spPr>
+        <p:txBody>
+          <a:bodyPr wrap="square" lIns="0" tIns="0" rIns="0" bIns="0" rtlCol="0" anchor="ctr"/>
+          <a:lstStyle/>
+          <a:p>
+            <a:r>
+              <a:rPr lang="en-US" sz="1000" dirty="0">
+                <a:latin typeface="Ubuntu" panose="020B0504030602030204" pitchFamily="34" charset="0"/>
+                <a:ea typeface="Calibri" pitchFamily="34" charset="-122"/>
+                <a:cs typeface="Calibri" pitchFamily="34" charset="-120"/>
+              </a:rPr>
+              <a:t>bcrypt version conflict with </a:t>
+            </a:r>
+            <a:r>
+              <a:rPr lang="en-US" sz="1000" dirty="0" err="1">
+                <a:latin typeface="Ubuntu" panose="020B0504030602030204" pitchFamily="34" charset="0"/>
+                <a:ea typeface="Calibri" pitchFamily="34" charset="-122"/>
+                <a:cs typeface="Calibri" pitchFamily="34" charset="-120"/>
+              </a:rPr>
+              <a:t>passlib</a:t>
+            </a:r>
+            <a:r>
+              <a:rPr lang="en-US" sz="1000" dirty="0">
+                <a:latin typeface="Ubuntu" panose="020B0504030602030204" pitchFamily="34" charset="0"/>
+                <a:ea typeface="Calibri" pitchFamily="34" charset="-122"/>
+                <a:cs typeface="Calibri" pitchFamily="34" charset="-120"/>
+              </a:rPr>
+              <a:t> library</a:t>
+            </a:r>
+          </a:p>
+        </p:txBody>
+      </p:sp>
+      <p:sp>
+        <p:nvSpPr>
+          <p:cNvPr id="24" name="Shape 22"/>
+          <p:cNvSpPr/>
+          <p:nvPr/>
+        </p:nvSpPr>
+        <p:spPr>
+          <a:xfrm>
+            <a:off x="3282696" y="2167128"/>
+            <a:ext cx="164592" cy="164592"/>
+          </a:xfrm>
+          <a:prstGeom prst="ellipse">
+            <a:avLst/>
+          </a:prstGeom>
+          <a:solidFill>
+            <a:srgbClr val="D4A017"/>
+          </a:solidFill>
+          <a:ln/>
+        </p:spPr>
+      </p:sp>
+      <p:sp>
+        <p:nvSpPr>
+          <p:cNvPr id="25" name="Text 23"/>
+          <p:cNvSpPr/>
+          <p:nvPr/>
+        </p:nvSpPr>
+        <p:spPr>
+          <a:xfrm>
+            <a:off x="3520440" y="2139696"/>
+            <a:ext cx="2377440" cy="411480"/>
+          </a:xfrm>
+          <a:prstGeom prst="rect">
+            <a:avLst/>
+          </a:prstGeom>
+          <a:noFill/>
+          <a:ln/>
+        </p:spPr>
+        <p:txBody>
+          <a:bodyPr wrap="square" lIns="0" tIns="0" rIns="0" bIns="0" rtlCol="0" anchor="ctr"/>
+          <a:lstStyle/>
+          <a:p>
+            <a:r>
+              <a:rPr lang="en-US" sz="1000" dirty="0">
+                <a:latin typeface="Ubuntu" panose="020B0504030602030204" pitchFamily="34" charset="0"/>
+                <a:ea typeface="Calibri" pitchFamily="34" charset="-122"/>
+                <a:cs typeface="Calibri" pitchFamily="34" charset="-120"/>
+              </a:rPr>
+              <a:t>CSV encoding issues with Arabic text (BOM, UTF-8-sig)</a:t>
+            </a:r>
+          </a:p>
+        </p:txBody>
+      </p:sp>
+      <p:sp>
+        <p:nvSpPr>
+          <p:cNvPr id="26" name="Shape 24"/>
+          <p:cNvSpPr/>
+          <p:nvPr/>
+        </p:nvSpPr>
+        <p:spPr>
+          <a:xfrm>
+            <a:off x="3282696" y="2825496"/>
+            <a:ext cx="164592" cy="164592"/>
+          </a:xfrm>
+          <a:prstGeom prst="ellipse">
+            <a:avLst/>
+          </a:prstGeom>
+          <a:solidFill>
+            <a:srgbClr val="D4A017"/>
+          </a:solidFill>
+          <a:ln/>
+        </p:spPr>
+      </p:sp>
+      <p:sp>
+        <p:nvSpPr>
+          <p:cNvPr id="27" name="Text 25"/>
+          <p:cNvSpPr/>
+          <p:nvPr/>
+        </p:nvSpPr>
+        <p:spPr>
+          <a:xfrm>
+            <a:off x="3520440" y="2798064"/>
+            <a:ext cx="2377440" cy="411480"/>
+          </a:xfrm>
+          <a:prstGeom prst="rect">
+            <a:avLst/>
+          </a:prstGeom>
+          <a:noFill/>
+          <a:ln/>
+        </p:spPr>
+        <p:txBody>
+          <a:bodyPr wrap="square" lIns="0" tIns="0" rIns="0" bIns="0" rtlCol="0" anchor="ctr"/>
+          <a:lstStyle/>
+          <a:p>
+            <a:r>
+              <a:rPr lang="en-US" sz="1000" dirty="0">
+                <a:latin typeface="Ubuntu" panose="020B0504030602030204" pitchFamily="34" charset="0"/>
+                <a:ea typeface="Calibri" pitchFamily="34" charset="-122"/>
+                <a:cs typeface="Calibri" pitchFamily="34" charset="-120"/>
+              </a:rPr>
+              <a:t>MySQL foreign key constraints during data deletion</a:t>
+            </a:r>
+          </a:p>
+        </p:txBody>
+      </p:sp>
+      <p:sp>
+        <p:nvSpPr>
+          <p:cNvPr id="28" name="Shape 26"/>
+          <p:cNvSpPr/>
+          <p:nvPr/>
+        </p:nvSpPr>
+        <p:spPr>
+          <a:xfrm>
+            <a:off x="3282696" y="3483864"/>
+            <a:ext cx="164592" cy="164592"/>
+          </a:xfrm>
+          <a:prstGeom prst="ellipse">
+            <a:avLst/>
+          </a:prstGeom>
+          <a:solidFill>
+            <a:srgbClr val="D4A017"/>
+          </a:solidFill>
+          <a:ln/>
+        </p:spPr>
+      </p:sp>
+      <p:sp>
+        <p:nvSpPr>
+          <p:cNvPr id="29" name="Text 27"/>
+          <p:cNvSpPr/>
+          <p:nvPr/>
+        </p:nvSpPr>
+        <p:spPr>
+          <a:xfrm>
+            <a:off x="3520440" y="3456432"/>
+            <a:ext cx="2377440" cy="411480"/>
+          </a:xfrm>
+          <a:prstGeom prst="rect">
+            <a:avLst/>
+          </a:prstGeom>
+          <a:noFill/>
+          <a:ln/>
+        </p:spPr>
+        <p:txBody>
+          <a:bodyPr wrap="square" lIns="0" tIns="0" rIns="0" bIns="0" rtlCol="0" anchor="ctr"/>
+          <a:lstStyle/>
+          <a:p>
+            <a:r>
+              <a:rPr lang="en-US" sz="1000" dirty="0">
+                <a:latin typeface="Ubuntu" panose="020B0504030602030204" pitchFamily="34" charset="0"/>
+                <a:ea typeface="Calibri" pitchFamily="34" charset="-122"/>
+                <a:cs typeface="Calibri" pitchFamily="34" charset="-120"/>
+              </a:rPr>
+              <a:t>CORS configuration between FastAPI and Vue.js</a:t>
+            </a:r>
+          </a:p>
+        </p:txBody>
+      </p:sp>
+      <p:sp>
+        <p:nvSpPr>
+          <p:cNvPr id="30" name="Shape 28"/>
+          <p:cNvSpPr/>
+          <p:nvPr/>
+        </p:nvSpPr>
+        <p:spPr>
+          <a:xfrm>
+            <a:off x="3282696" y="4142232"/>
+            <a:ext cx="164592" cy="164592"/>
+          </a:xfrm>
+          <a:prstGeom prst="ellipse">
+            <a:avLst/>
+          </a:prstGeom>
+          <a:solidFill>
+            <a:srgbClr val="D4A017"/>
+          </a:solidFill>
+          <a:ln/>
+        </p:spPr>
+      </p:sp>
+      <p:sp>
+        <p:nvSpPr>
+          <p:cNvPr id="31" name="Text 29"/>
+          <p:cNvSpPr/>
+          <p:nvPr/>
+        </p:nvSpPr>
+        <p:spPr>
+          <a:xfrm>
+            <a:off x="3520440" y="4114800"/>
+            <a:ext cx="2377440" cy="411480"/>
+          </a:xfrm>
+          <a:prstGeom prst="rect">
+            <a:avLst/>
+          </a:prstGeom>
+          <a:noFill/>
+          <a:ln/>
+        </p:spPr>
+        <p:txBody>
+          <a:bodyPr wrap="square" lIns="0" tIns="0" rIns="0" bIns="0" rtlCol="0" anchor="ctr"/>
+          <a:lstStyle/>
+          <a:p>
+            <a:r>
+              <a:rPr lang="en-US" sz="1000" dirty="0">
+                <a:latin typeface="Ubuntu" panose="020B0504030602030204" pitchFamily="34" charset="0"/>
+                <a:ea typeface="Calibri" pitchFamily="34" charset="-122"/>
+                <a:cs typeface="Calibri" pitchFamily="34" charset="-120"/>
+              </a:rPr>
+              <a:t>Arabic text normalization for AI matching accuracy</a:t>
+            </a:r>
+          </a:p>
+        </p:txBody>
+      </p:sp>
+      <p:sp>
+        <p:nvSpPr>
+          <p:cNvPr id="32" name="Shape 30"/>
+          <p:cNvSpPr/>
+          <p:nvPr/>
+        </p:nvSpPr>
+        <p:spPr>
+          <a:xfrm>
+            <a:off x="6163056" y="868680"/>
+            <a:ext cx="2834640" cy="4160520"/>
+          </a:xfrm>
+          <a:prstGeom prst="rect">
+            <a:avLst/>
+          </a:prstGeom>
+          <a:solidFill>
+            <a:srgbClr val="FFFFFF">
+              <a:alpha val="7000"/>
+            </a:srgbClr>
+          </a:solidFill>
+          <a:ln w="19050">
+            <a:solidFill>
+              <a:srgbClr val="1A6B3C"/>
+            </a:solidFill>
+            <a:prstDash val="solid"/>
+          </a:ln>
+        </p:spPr>
+      </p:sp>
+      <p:sp>
+        <p:nvSpPr>
+          <p:cNvPr id="33" name="Shape 31"/>
+          <p:cNvSpPr/>
+          <p:nvPr/>
+        </p:nvSpPr>
+        <p:spPr>
+          <a:xfrm>
+            <a:off x="6163056" y="868680"/>
+            <a:ext cx="2834640" cy="502920"/>
+          </a:xfrm>
+          <a:prstGeom prst="rect">
+            <a:avLst/>
+          </a:prstGeom>
+          <a:solidFill>
+            <a:srgbClr val="1A6B3C"/>
+          </a:solidFill>
+          <a:ln/>
+        </p:spPr>
+      </p:sp>
+      <p:sp>
+        <p:nvSpPr>
+          <p:cNvPr id="34" name="Text 32"/>
+          <p:cNvSpPr/>
+          <p:nvPr/>
+        </p:nvSpPr>
+        <p:spPr>
+          <a:xfrm>
+            <a:off x="6163056" y="868680"/>
+            <a:ext cx="2834640" cy="502920"/>
+          </a:xfrm>
+          <a:prstGeom prst="rect">
+            <a:avLst/>
+          </a:prstGeom>
+          <a:noFill/>
+          <a:ln/>
+        </p:spPr>
+        <p:txBody>
+          <a:bodyPr wrap="square" lIns="0" tIns="0" rIns="0" bIns="0" rtlCol="0" anchor="ctr"/>
+          <a:lstStyle/>
+          <a:p>
+            <a:pPr marL="0" indent="0" algn="ctr">
+              <a:buNone/>
+            </a:pPr>
+            <a:r>
+              <a:rPr lang="en-US" sz="1200" b="1" dirty="0">
+                <a:solidFill>
+                  <a:srgbClr val="FFFFFF"/>
+                </a:solidFill>
+                <a:latin typeface="Ubuntu" panose="020B0504030602030204" pitchFamily="34" charset="0"/>
+                <a:ea typeface="Georgia" pitchFamily="34" charset="-122"/>
+                <a:cs typeface="Georgia" pitchFamily="34" charset="-120"/>
+              </a:rPr>
+              <a:t>🚀 Areas for Improvement</a:t>
+            </a:r>
+            <a:endParaRPr lang="en-US" sz="1200" dirty="0">
+              <a:latin typeface="Ubuntu" panose="020B0504030602030204" pitchFamily="34" charset="0"/>
+            </a:endParaRPr>
+          </a:p>
+        </p:txBody>
+      </p:sp>
+      <p:sp>
+        <p:nvSpPr>
+          <p:cNvPr id="35" name="Shape 33"/>
+          <p:cNvSpPr/>
+          <p:nvPr/>
+        </p:nvSpPr>
+        <p:spPr>
+          <a:xfrm>
+            <a:off x="6272784" y="1508760"/>
+            <a:ext cx="164592" cy="164592"/>
+          </a:xfrm>
+          <a:prstGeom prst="ellipse">
+            <a:avLst/>
+          </a:prstGeom>
+          <a:solidFill>
+            <a:srgbClr val="1A6B3C"/>
+          </a:solidFill>
+          <a:ln/>
+        </p:spPr>
+      </p:sp>
+      <p:sp>
+        <p:nvSpPr>
+          <p:cNvPr id="36" name="Text 34"/>
+          <p:cNvSpPr/>
+          <p:nvPr/>
+        </p:nvSpPr>
+        <p:spPr>
+          <a:xfrm>
+            <a:off x="6510528" y="1481328"/>
+            <a:ext cx="2377440" cy="411480"/>
+          </a:xfrm>
+          <a:prstGeom prst="rect">
+            <a:avLst/>
+          </a:prstGeom>
+          <a:noFill/>
+          <a:ln/>
+        </p:spPr>
+        <p:txBody>
+          <a:bodyPr wrap="square" lIns="0" tIns="0" rIns="0" bIns="0" rtlCol="0" anchor="ctr"/>
+          <a:lstStyle/>
+          <a:p>
+            <a:r>
+              <a:rPr lang="en-US" sz="1000" dirty="0">
+                <a:latin typeface="Ubuntu" panose="020B0504030602030204" pitchFamily="34" charset="0"/>
+                <a:ea typeface="Calibri" pitchFamily="34" charset="-122"/>
+                <a:cs typeface="Calibri" pitchFamily="34" charset="-120"/>
+              </a:rPr>
+              <a:t>Add Flutter mobile application for iOS/Android</a:t>
+            </a:r>
+          </a:p>
+        </p:txBody>
+      </p:sp>
+      <p:sp>
+        <p:nvSpPr>
+          <p:cNvPr id="37" name="Shape 35"/>
+          <p:cNvSpPr/>
+          <p:nvPr/>
+        </p:nvSpPr>
+        <p:spPr>
+          <a:xfrm>
+            <a:off x="6272784" y="2167128"/>
+            <a:ext cx="164592" cy="164592"/>
+          </a:xfrm>
+          <a:prstGeom prst="ellipse">
+            <a:avLst/>
+          </a:prstGeom>
+          <a:solidFill>
+            <a:srgbClr val="1A6B3C"/>
+          </a:solidFill>
+          <a:ln/>
+        </p:spPr>
+      </p:sp>
+      <p:sp>
+        <p:nvSpPr>
+          <p:cNvPr id="38" name="Text 36"/>
+          <p:cNvSpPr/>
+          <p:nvPr/>
+        </p:nvSpPr>
+        <p:spPr>
+          <a:xfrm>
+            <a:off x="6510528" y="2139696"/>
+            <a:ext cx="2377440" cy="411480"/>
+          </a:xfrm>
+          <a:prstGeom prst="rect">
+            <a:avLst/>
+          </a:prstGeom>
+          <a:noFill/>
+          <a:ln/>
+        </p:spPr>
+        <p:txBody>
+          <a:bodyPr wrap="square" lIns="0" tIns="0" rIns="0" bIns="0" rtlCol="0" anchor="ctr"/>
+          <a:lstStyle/>
+          <a:p>
+            <a:r>
+              <a:rPr lang="en-US" sz="1000" dirty="0">
+                <a:latin typeface="Ubuntu" panose="020B0504030602030204" pitchFamily="34" charset="0"/>
+                <a:ea typeface="Calibri" pitchFamily="34" charset="-122"/>
+                <a:cs typeface="Calibri" pitchFamily="34" charset="-120"/>
+              </a:rPr>
+              <a:t>Integrate GPT API for recipe explanation in Arabic</a:t>
+            </a:r>
+          </a:p>
+        </p:txBody>
+      </p:sp>
+      <p:sp>
+        <p:nvSpPr>
+          <p:cNvPr id="39" name="Shape 37"/>
+          <p:cNvSpPr/>
+          <p:nvPr/>
+        </p:nvSpPr>
+        <p:spPr>
+          <a:xfrm>
+            <a:off x="6272784" y="2825496"/>
+            <a:ext cx="164592" cy="164592"/>
+          </a:xfrm>
+          <a:prstGeom prst="ellipse">
+            <a:avLst/>
+          </a:prstGeom>
+          <a:solidFill>
+            <a:srgbClr val="1A6B3C"/>
+          </a:solidFill>
+          <a:ln/>
+        </p:spPr>
+      </p:sp>
+      <p:sp>
+        <p:nvSpPr>
+          <p:cNvPr id="40" name="Text 38"/>
+          <p:cNvSpPr/>
+          <p:nvPr/>
+        </p:nvSpPr>
+        <p:spPr>
+          <a:xfrm>
+            <a:off x="6510528" y="2798064"/>
+            <a:ext cx="2377440" cy="411480"/>
+          </a:xfrm>
+          <a:prstGeom prst="rect">
+            <a:avLst/>
+          </a:prstGeom>
+          <a:noFill/>
+          <a:ln/>
+        </p:spPr>
+        <p:txBody>
+          <a:bodyPr wrap="square" lIns="0" tIns="0" rIns="0" bIns="0" rtlCol="0" anchor="ctr"/>
+          <a:lstStyle/>
+          <a:p>
+            <a:r>
+              <a:rPr lang="en-US" sz="1000" dirty="0">
+                <a:latin typeface="Ubuntu" panose="020B0504030602030204" pitchFamily="34" charset="0"/>
+                <a:ea typeface="Calibri" pitchFamily="34" charset="-122"/>
+                <a:cs typeface="Calibri" pitchFamily="34" charset="-120"/>
+              </a:rPr>
+              <a:t>Calculate nutritional values and calories per recipe</a:t>
+            </a:r>
+          </a:p>
+        </p:txBody>
+      </p:sp>
+      <p:sp>
+        <p:nvSpPr>
+          <p:cNvPr id="41" name="Shape 39"/>
+          <p:cNvSpPr/>
+          <p:nvPr/>
+        </p:nvSpPr>
+        <p:spPr>
+          <a:xfrm>
+            <a:off x="6272784" y="3483864"/>
+            <a:ext cx="164592" cy="164592"/>
+          </a:xfrm>
+          <a:prstGeom prst="ellipse">
+            <a:avLst/>
+          </a:prstGeom>
+          <a:solidFill>
+            <a:srgbClr val="1A6B3C"/>
+          </a:solidFill>
+          <a:ln/>
+        </p:spPr>
+      </p:sp>
+      <p:sp>
+        <p:nvSpPr>
+          <p:cNvPr id="42" name="Text 40"/>
+          <p:cNvSpPr/>
+          <p:nvPr/>
+        </p:nvSpPr>
+        <p:spPr>
+          <a:xfrm>
+            <a:off x="6510528" y="3456432"/>
+            <a:ext cx="2377440" cy="411480"/>
+          </a:xfrm>
+          <a:prstGeom prst="rect">
+            <a:avLst/>
+          </a:prstGeom>
+          <a:noFill/>
+          <a:ln/>
+        </p:spPr>
+        <p:txBody>
+          <a:bodyPr wrap="square" lIns="0" tIns="0" rIns="0" bIns="0" rtlCol="0" anchor="ctr"/>
+          <a:lstStyle/>
+          <a:p>
+            <a:r>
+              <a:rPr lang="en-US" sz="1000" dirty="0">
+                <a:latin typeface="Ubuntu" panose="020B0504030602030204" pitchFamily="34" charset="0"/>
+                <a:ea typeface="Calibri" pitchFamily="34" charset="-122"/>
+                <a:cs typeface="Calibri" pitchFamily="34" charset="-120"/>
+              </a:rPr>
+              <a:t>Add voice search in Arabic using Speech Recognition</a:t>
+            </a:r>
+          </a:p>
+        </p:txBody>
+      </p:sp>
+      <p:sp>
+        <p:nvSpPr>
+          <p:cNvPr id="43" name="Shape 41"/>
+          <p:cNvSpPr/>
+          <p:nvPr/>
+        </p:nvSpPr>
+        <p:spPr>
+          <a:xfrm>
+            <a:off x="6272784" y="4142232"/>
+            <a:ext cx="164592" cy="164592"/>
+          </a:xfrm>
+          <a:prstGeom prst="ellipse">
+            <a:avLst/>
+          </a:prstGeom>
+          <a:solidFill>
+            <a:srgbClr val="1A6B3C"/>
+          </a:solidFill>
+          <a:ln/>
+        </p:spPr>
+      </p:sp>
+      <p:sp>
+        <p:nvSpPr>
+          <p:cNvPr id="44" name="Text 42"/>
+          <p:cNvSpPr/>
+          <p:nvPr/>
+        </p:nvSpPr>
+        <p:spPr>
+          <a:xfrm>
+            <a:off x="6510528" y="4114800"/>
+            <a:ext cx="2377440" cy="411480"/>
+          </a:xfrm>
+          <a:prstGeom prst="rect">
+            <a:avLst/>
+          </a:prstGeom>
+          <a:noFill/>
+          <a:ln/>
+        </p:spPr>
+        <p:txBody>
+          <a:bodyPr wrap="square" lIns="0" tIns="0" rIns="0" bIns="0" rtlCol="0" anchor="ctr"/>
+          <a:lstStyle/>
+          <a:p>
+            <a:r>
+              <a:rPr lang="en-US" sz="1000" dirty="0">
+                <a:latin typeface="Ubuntu" panose="020B0504030602030204" pitchFamily="34" charset="0"/>
+                <a:ea typeface="Calibri" pitchFamily="34" charset="-122"/>
+                <a:cs typeface="Calibri" pitchFamily="34" charset="-120"/>
+              </a:rPr>
+              <a:t>Build community features for users to share recipes</a:t>
+            </a:r>
+          </a:p>
+        </p:txBody>
+      </p:sp>
+    </p:spTree>
+  </p:cSld>
+  <p:clrMapOvr>
+    <a:masterClrMapping/>
+  </p:clrMapOvr>
+</p:sld>
+</file>
+
+<file path=ppt/slides/slide15.xml><?xml version="1.0" encoding="utf-8"?>
 <p:sld xmlns:a="http://schemas.openxmlformats.org/drawingml/2006/main" xmlns:r="http://schemas.openxmlformats.org/officeDocument/2006/relationships" xmlns:p="http://schemas.openxmlformats.org/presentationml/2006/main">
   <p:cSld name="Slide 10">
     <p:bg>
@@ -11924,7 +12305,13 @@
   <p:cSld>
     <p:spTree>
       <p:nvGrpSpPr>
-        <p:cNvPr id="1" name=""/>
+        <p:cNvPr id="1" name="">
+          <a:extLst>
+            <a:ext uri="{FF2B5EF4-FFF2-40B4-BE49-F238E27FC236}">
+              <a16:creationId xmlns:a16="http://schemas.microsoft.com/office/drawing/2014/main" id="{EFE3E931-6C14-5980-93CE-DDE08AB68A45}"/>
+            </a:ext>
+          </a:extLst>
+        </p:cNvPr>
         <p:cNvGrpSpPr/>
         <p:nvPr/>
       </p:nvGrpSpPr>
@@ -11938,7 +12325,13 @@
       </p:grpSpPr>
       <p:sp>
         <p:nvSpPr>
-          <p:cNvPr id="2" name="Shape 0"/>
+          <p:cNvPr id="2" name="Shape 0">
+            <a:extLst>
+              <a:ext uri="{FF2B5EF4-FFF2-40B4-BE49-F238E27FC236}">
+                <a16:creationId xmlns:a16="http://schemas.microsoft.com/office/drawing/2014/main" id="{5C4B68EE-C4A6-B229-B6A8-FCD2B03DD145}"/>
+              </a:ext>
+            </a:extLst>
+          </p:cNvPr>
           <p:cNvSpPr/>
           <p:nvPr/>
         </p:nvSpPr>
@@ -11958,7 +12351,13 @@
       </p:sp>
       <p:sp>
         <p:nvSpPr>
-          <p:cNvPr id="3" name="Shape 1"/>
+          <p:cNvPr id="3" name="Shape 1">
+            <a:extLst>
+              <a:ext uri="{FF2B5EF4-FFF2-40B4-BE49-F238E27FC236}">
+                <a16:creationId xmlns:a16="http://schemas.microsoft.com/office/drawing/2014/main" id="{A8D9AAB5-2A88-5EF6-A6B7-A648D73A2B4B}"/>
+              </a:ext>
+            </a:extLst>
+          </p:cNvPr>
           <p:cNvSpPr/>
           <p:nvPr/>
         </p:nvSpPr>
@@ -11978,7 +12377,13 @@
       </p:sp>
       <p:sp>
         <p:nvSpPr>
-          <p:cNvPr id="4" name="Text 2"/>
+          <p:cNvPr id="4" name="Text 2">
+            <a:extLst>
+              <a:ext uri="{FF2B5EF4-FFF2-40B4-BE49-F238E27FC236}">
+                <a16:creationId xmlns:a16="http://schemas.microsoft.com/office/drawing/2014/main" id="{47799DC5-5F91-5F14-19A5-D57C189B900B}"/>
+              </a:ext>
+            </a:extLst>
+          </p:cNvPr>
           <p:cNvSpPr/>
           <p:nvPr/>
         </p:nvSpPr>
@@ -12005,41 +12410,42 @@
                 <a:solidFill>
                   <a:srgbClr val="FFFFFF"/>
                 </a:solidFill>
-                <a:latin typeface="Georgia" pitchFamily="34" charset="0"/>
+                <a:latin typeface="Ubuntu" panose="020B0504030602030204" pitchFamily="34" charset="0"/>
                 <a:ea typeface="Georgia" pitchFamily="34" charset="-122"/>
                 <a:cs typeface="Georgia" pitchFamily="34" charset="-120"/>
               </a:rPr>
-              <a:t>Part 4 : Results &amp; Interpretation</a:t>
-            </a:r>
-            <a:endParaRPr lang="en-US" sz="2200" dirty="0"/>
-          </a:p>
-        </p:txBody>
-      </p:sp>
-      <p:sp>
-        <p:nvSpPr>
-          <p:cNvPr id="6" name="Shape 4"/>
-          <p:cNvSpPr/>
-          <p:nvPr/>
-        </p:nvSpPr>
-        <p:spPr>
-          <a:xfrm>
-            <a:off x="182880" y="868679"/>
-            <a:ext cx="8869680" cy="4209757"/>
-          </a:xfrm>
-          <a:prstGeom prst="rect">
-            <a:avLst/>
-          </a:prstGeom>
-          <a:solidFill>
-            <a:srgbClr val="FFFFFF">
-              <a:alpha val="7000"/>
-            </a:srgbClr>
-          </a:solidFill>
-          <a:ln w="12700">
-            <a:solidFill>
-              <a:srgbClr val="C0392B"/>
-            </a:solidFill>
-            <a:prstDash val="solid"/>
-          </a:ln>
+              <a:t>Part 3 : Source Code Structure</a:t>
+            </a:r>
+            <a:endParaRPr lang="en-US" sz="2200" dirty="0">
+              <a:latin typeface="Ubuntu" panose="020B0504030602030204" pitchFamily="34" charset="0"/>
+            </a:endParaRPr>
+          </a:p>
+        </p:txBody>
+      </p:sp>
+      <p:sp>
+        <p:nvSpPr>
+          <p:cNvPr id="6" name="Shape 4">
+            <a:extLst>
+              <a:ext uri="{FF2B5EF4-FFF2-40B4-BE49-F238E27FC236}">
+                <a16:creationId xmlns:a16="http://schemas.microsoft.com/office/drawing/2014/main" id="{CA85B51A-E6E1-5A77-F232-EBB640F19D33}"/>
+              </a:ext>
+            </a:extLst>
+          </p:cNvPr>
+          <p:cNvSpPr/>
+          <p:nvPr/>
+        </p:nvSpPr>
+        <p:spPr>
+          <a:xfrm>
+            <a:off x="228599" y="868680"/>
+            <a:ext cx="2296551" cy="2060029"/>
+          </a:xfrm>
+          <a:prstGeom prst="rect">
+            <a:avLst/>
+          </a:prstGeom>
+          <a:solidFill>
+            <a:srgbClr val="FFFFFF"/>
+          </a:solidFill>
+          <a:ln/>
           <a:effectLst>
             <a:outerShdw blurRad="101600" dist="38100" dir="8100000" algn="bl" rotWithShape="0">
               <a:srgbClr val="000000">
@@ -12051,132 +12457,922 @@
       </p:sp>
       <p:sp>
         <p:nvSpPr>
-          <p:cNvPr id="7" name="Shape 5"/>
-          <p:cNvSpPr/>
-          <p:nvPr/>
-        </p:nvSpPr>
-        <p:spPr>
-          <a:xfrm>
-            <a:off x="182880" y="868680"/>
-            <a:ext cx="8869680" cy="777240"/>
-          </a:xfrm>
-          <a:prstGeom prst="rect">
-            <a:avLst/>
-          </a:prstGeom>
-          <a:solidFill>
-            <a:srgbClr val="C0392B">
-              <a:alpha val="65000"/>
-            </a:srgbClr>
-          </a:solidFill>
-          <a:ln/>
-        </p:spPr>
-      </p:sp>
-      <p:sp>
-        <p:nvSpPr>
-          <p:cNvPr id="8" name="Text 6"/>
-          <p:cNvSpPr/>
-          <p:nvPr/>
-        </p:nvSpPr>
-        <p:spPr>
-          <a:xfrm>
-            <a:off x="182880" y="868680"/>
-            <a:ext cx="8869680" cy="530352"/>
-          </a:xfrm>
-          <a:prstGeom prst="rect">
-            <a:avLst/>
-          </a:prstGeom>
-          <a:noFill/>
-          <a:ln/>
-        </p:spPr>
-        <p:txBody>
-          <a:bodyPr wrap="square" rtlCol="0" anchor="ctr"/>
-          <a:lstStyle/>
-          <a:p>
-            <a:pPr marL="0" indent="0" algn="ctr">
-              <a:buNone/>
-            </a:pPr>
-            <a:r>
-              <a:rPr lang="en-US" sz="3000" dirty="0">
-                <a:solidFill>
-                  <a:srgbClr val="000000"/>
-                </a:solidFill>
-              </a:rPr>
-              <a:t>🏠</a:t>
-            </a:r>
-            <a:endParaRPr lang="en-US" sz="3000" dirty="0"/>
-          </a:p>
-        </p:txBody>
-      </p:sp>
-      <p:sp>
-        <p:nvSpPr>
-          <p:cNvPr id="9" name="Text 7"/>
-          <p:cNvSpPr/>
-          <p:nvPr/>
-        </p:nvSpPr>
-        <p:spPr>
-          <a:xfrm>
-            <a:off x="182880" y="1371600"/>
-            <a:ext cx="8869680" cy="320040"/>
-          </a:xfrm>
-          <a:prstGeom prst="rect">
-            <a:avLst/>
-          </a:prstGeom>
-          <a:noFill/>
-          <a:ln/>
-        </p:spPr>
-        <p:txBody>
-          <a:bodyPr wrap="square" lIns="0" tIns="0" rIns="0" bIns="0" rtlCol="0" anchor="ctr"/>
-          <a:lstStyle/>
-          <a:p>
-            <a:pPr marL="0" indent="0" algn="ctr">
-              <a:buNone/>
-            </a:pPr>
-            <a:r>
-              <a:rPr lang="en-US" sz="1200" b="1" dirty="0">
-                <a:solidFill>
-                  <a:srgbClr val="FFFFFF"/>
-                </a:solidFill>
-                <a:latin typeface="Georgia" pitchFamily="34" charset="0"/>
-                <a:ea typeface="Georgia" pitchFamily="34" charset="-122"/>
-                <a:cs typeface="Georgia" pitchFamily="34" charset="-120"/>
-              </a:rPr>
-              <a:t>Home Page</a:t>
-            </a:r>
-            <a:endParaRPr lang="en-US" sz="1200" dirty="0"/>
-          </a:p>
-        </p:txBody>
-      </p:sp>
-      <p:pic>
-        <p:nvPicPr>
-          <p:cNvPr id="37" name="Image 36">
+          <p:cNvPr id="7" name="Shape 5">
             <a:extLst>
               <a:ext uri="{FF2B5EF4-FFF2-40B4-BE49-F238E27FC236}">
-                <a16:creationId xmlns:a16="http://schemas.microsoft.com/office/drawing/2014/main" id="{C82B1C71-74A9-CA88-FB44-A5BED7EBC056}"/>
+                <a16:creationId xmlns:a16="http://schemas.microsoft.com/office/drawing/2014/main" id="{2E1BC069-CBC6-9132-D412-414717E4BFC2}"/>
               </a:ext>
             </a:extLst>
           </p:cNvPr>
-          <p:cNvPicPr>
-            <a:picLocks noChangeAspect="1"/>
-          </p:cNvPicPr>
-          <p:nvPr/>
-        </p:nvPicPr>
-        <p:blipFill>
-          <a:blip r:embed="rId3"/>
-          <a:stretch>
-            <a:fillRect/>
-          </a:stretch>
-        </p:blipFill>
-        <p:spPr>
-          <a:xfrm>
-            <a:off x="182880" y="1645921"/>
-            <a:ext cx="8869680" cy="3432516"/>
-          </a:xfrm>
-          <a:prstGeom prst="rect">
-            <a:avLst/>
-          </a:prstGeom>
-        </p:spPr>
-      </p:pic>
+          <p:cNvSpPr/>
+          <p:nvPr/>
+        </p:nvSpPr>
+        <p:spPr>
+          <a:xfrm>
+            <a:off x="228599" y="868680"/>
+            <a:ext cx="2296551" cy="384048"/>
+          </a:xfrm>
+          <a:prstGeom prst="rect">
+            <a:avLst/>
+          </a:prstGeom>
+          <a:solidFill>
+            <a:srgbClr val="00B050"/>
+          </a:solidFill>
+          <a:ln/>
+        </p:spPr>
+        <p:txBody>
+          <a:bodyPr/>
+          <a:lstStyle/>
+          <a:p>
+            <a:endParaRPr lang="en-US" dirty="0">
+              <a:solidFill>
+                <a:srgbClr val="00B050"/>
+              </a:solidFill>
+            </a:endParaRPr>
+          </a:p>
+        </p:txBody>
+      </p:sp>
+      <p:sp>
+        <p:nvSpPr>
+          <p:cNvPr id="8" name="Text 6">
+            <a:extLst>
+              <a:ext uri="{FF2B5EF4-FFF2-40B4-BE49-F238E27FC236}">
+                <a16:creationId xmlns:a16="http://schemas.microsoft.com/office/drawing/2014/main" id="{F23ED901-0D30-9B94-B23E-AD9770448EB4}"/>
+              </a:ext>
+            </a:extLst>
+          </p:cNvPr>
+          <p:cNvSpPr/>
+          <p:nvPr/>
+        </p:nvSpPr>
+        <p:spPr>
+          <a:xfrm>
+            <a:off x="228600" y="868680"/>
+            <a:ext cx="2296550" cy="384048"/>
+          </a:xfrm>
+          <a:prstGeom prst="rect">
+            <a:avLst/>
+          </a:prstGeom>
+          <a:noFill/>
+          <a:ln/>
+        </p:spPr>
+        <p:txBody>
+          <a:bodyPr wrap="square" lIns="0" tIns="0" rIns="0" bIns="0" rtlCol="0" anchor="ctr"/>
+          <a:lstStyle/>
+          <a:p>
+            <a:pPr marL="0" indent="0" algn="ctr">
+              <a:buNone/>
+            </a:pPr>
+            <a:r>
+              <a:rPr lang="en-US" sz="1300" b="1" dirty="0">
+                <a:solidFill>
+                  <a:schemeClr val="bg1"/>
+                </a:solidFill>
+                <a:latin typeface="Ubuntu" panose="020B0504030602030204" pitchFamily="34" charset="0"/>
+                <a:ea typeface="Georgia" pitchFamily="34" charset="-122"/>
+                <a:cs typeface="Georgia" pitchFamily="34" charset="-120"/>
+              </a:rPr>
+              <a:t> Fast API</a:t>
+            </a:r>
+            <a:endParaRPr lang="en-US" sz="1300" dirty="0">
+              <a:solidFill>
+                <a:schemeClr val="bg1"/>
+              </a:solidFill>
+              <a:latin typeface="Ubuntu" panose="020B0504030602030204" pitchFamily="34" charset="0"/>
+            </a:endParaRPr>
+          </a:p>
+        </p:txBody>
+      </p:sp>
+      <p:sp>
+        <p:nvSpPr>
+          <p:cNvPr id="38" name="Shape 36">
+            <a:extLst>
+              <a:ext uri="{FF2B5EF4-FFF2-40B4-BE49-F238E27FC236}">
+                <a16:creationId xmlns:a16="http://schemas.microsoft.com/office/drawing/2014/main" id="{C7B3CC66-3862-7C30-450B-72B168D08B54}"/>
+              </a:ext>
+            </a:extLst>
+          </p:cNvPr>
+          <p:cNvSpPr/>
+          <p:nvPr/>
+        </p:nvSpPr>
+        <p:spPr>
+          <a:xfrm>
+            <a:off x="0" y="4881698"/>
+            <a:ext cx="9144000" cy="261802"/>
+          </a:xfrm>
+          <a:prstGeom prst="rect">
+            <a:avLst/>
+          </a:prstGeom>
+          <a:solidFill>
+            <a:srgbClr val="2C1810">
+              <a:alpha val="70000"/>
+            </a:srgbClr>
+          </a:solidFill>
+          <a:ln/>
+        </p:spPr>
+      </p:sp>
+      <p:sp>
+        <p:nvSpPr>
+          <p:cNvPr id="39" name="Text 37">
+            <a:extLst>
+              <a:ext uri="{FF2B5EF4-FFF2-40B4-BE49-F238E27FC236}">
+                <a16:creationId xmlns:a16="http://schemas.microsoft.com/office/drawing/2014/main" id="{2B62F20C-5775-C2B9-CC41-28D3B1333A7E}"/>
+              </a:ext>
+            </a:extLst>
+          </p:cNvPr>
+          <p:cNvSpPr/>
+          <p:nvPr/>
+        </p:nvSpPr>
+        <p:spPr>
+          <a:xfrm>
+            <a:off x="0" y="4895414"/>
+            <a:ext cx="8686800" cy="234370"/>
+          </a:xfrm>
+          <a:prstGeom prst="rect">
+            <a:avLst/>
+          </a:prstGeom>
+          <a:noFill/>
+          <a:ln/>
+        </p:spPr>
+        <p:txBody>
+          <a:bodyPr wrap="square" lIns="0" tIns="0" rIns="0" bIns="0" rtlCol="0" anchor="ctr"/>
+          <a:lstStyle/>
+          <a:p>
+            <a:pPr algn="ctr"/>
+            <a:r>
+              <a:rPr lang="en-US" sz="1100" b="1" dirty="0">
+                <a:solidFill>
+                  <a:srgbClr val="D4A017"/>
+                </a:solidFill>
+                <a:latin typeface="Ubuntu" panose="020B0504030602030204" pitchFamily="34" charset="0"/>
+                <a:ea typeface="Calibri" pitchFamily="34" charset="-122"/>
+                <a:cs typeface="Calibri" pitchFamily="34" charset="-120"/>
+              </a:rPr>
+              <a:t>🔗 https://github.com/feredj/sha-ntieb</a:t>
+            </a:r>
+            <a:endParaRPr lang="en-US" sz="1100" dirty="0">
+              <a:latin typeface="Ubuntu" panose="020B0504030602030204" pitchFamily="34" charset="0"/>
+            </a:endParaRPr>
+          </a:p>
+        </p:txBody>
+      </p:sp>
+      <p:sp>
+        <p:nvSpPr>
+          <p:cNvPr id="5" name="ZoneTexte 4">
+            <a:extLst>
+              <a:ext uri="{FF2B5EF4-FFF2-40B4-BE49-F238E27FC236}">
+                <a16:creationId xmlns:a16="http://schemas.microsoft.com/office/drawing/2014/main" id="{989BC618-CC94-EBF1-A4A3-9FE4F1A4C162}"/>
+              </a:ext>
+            </a:extLst>
+          </p:cNvPr>
+          <p:cNvSpPr txBox="1"/>
+          <p:nvPr/>
+        </p:nvSpPr>
+        <p:spPr>
+          <a:xfrm>
+            <a:off x="246180" y="1245903"/>
+            <a:ext cx="2296552" cy="1015663"/>
+          </a:xfrm>
+          <a:prstGeom prst="rect">
+            <a:avLst/>
+          </a:prstGeom>
+          <a:noFill/>
+        </p:spPr>
+        <p:txBody>
+          <a:bodyPr wrap="square" rtlCol="0">
+            <a:spAutoFit/>
+          </a:bodyPr>
+          <a:lstStyle/>
+          <a:p>
+            <a:pPr algn="just"/>
+            <a:r>
+              <a:rPr lang="en-US" sz="1200" dirty="0" err="1">
+                <a:latin typeface="Ubuntu" panose="020B0504030602030204" pitchFamily="34" charset="0"/>
+              </a:rPr>
+              <a:t>FastAPI</a:t>
+            </a:r>
+            <a:r>
+              <a:rPr lang="en-US" sz="1200" dirty="0">
+                <a:latin typeface="Ubuntu" panose="020B0504030602030204" pitchFamily="34" charset="0"/>
+              </a:rPr>
+              <a:t> is a modern, fast (high-performance), web framework for building APIs with Python based on standard Python type hints.</a:t>
+            </a:r>
+          </a:p>
+        </p:txBody>
+      </p:sp>
+      <p:sp>
+        <p:nvSpPr>
+          <p:cNvPr id="25" name="Shape 4">
+            <a:extLst>
+              <a:ext uri="{FF2B5EF4-FFF2-40B4-BE49-F238E27FC236}">
+                <a16:creationId xmlns:a16="http://schemas.microsoft.com/office/drawing/2014/main" id="{3728EA36-9B6B-24A6-592F-9F2C23187F4E}"/>
+              </a:ext>
+            </a:extLst>
+          </p:cNvPr>
+          <p:cNvSpPr/>
+          <p:nvPr/>
+        </p:nvSpPr>
+        <p:spPr>
+          <a:xfrm>
+            <a:off x="5152298" y="1180698"/>
+            <a:ext cx="2992895" cy="1748011"/>
+          </a:xfrm>
+          <a:prstGeom prst="rect">
+            <a:avLst/>
+          </a:prstGeom>
+          <a:solidFill>
+            <a:srgbClr val="FFFFFF"/>
+          </a:solidFill>
+          <a:ln/>
+          <a:effectLst>
+            <a:outerShdw blurRad="101600" dist="38100" dir="8100000" algn="bl" rotWithShape="0">
+              <a:srgbClr val="000000">
+                <a:alpha val="15000"/>
+              </a:srgbClr>
+            </a:outerShdw>
+          </a:effectLst>
+        </p:spPr>
+      </p:sp>
+      <p:sp>
+        <p:nvSpPr>
+          <p:cNvPr id="26" name="Shape 5">
+            <a:extLst>
+              <a:ext uri="{FF2B5EF4-FFF2-40B4-BE49-F238E27FC236}">
+                <a16:creationId xmlns:a16="http://schemas.microsoft.com/office/drawing/2014/main" id="{1C93EAD6-4A44-336D-414F-ED3318B7B433}"/>
+              </a:ext>
+            </a:extLst>
+          </p:cNvPr>
+          <p:cNvSpPr/>
+          <p:nvPr/>
+        </p:nvSpPr>
+        <p:spPr>
+          <a:xfrm>
+            <a:off x="5152297" y="868680"/>
+            <a:ext cx="2992897" cy="384048"/>
+          </a:xfrm>
+          <a:prstGeom prst="rect">
+            <a:avLst/>
+          </a:prstGeom>
+          <a:solidFill>
+            <a:schemeClr val="bg1">
+              <a:lumMod val="50000"/>
+            </a:schemeClr>
+          </a:solidFill>
+          <a:ln/>
+        </p:spPr>
+        <p:txBody>
+          <a:bodyPr/>
+          <a:lstStyle/>
+          <a:p>
+            <a:endParaRPr lang="en-US" dirty="0">
+              <a:solidFill>
+                <a:srgbClr val="00B050"/>
+              </a:solidFill>
+            </a:endParaRPr>
+          </a:p>
+        </p:txBody>
+      </p:sp>
+      <p:sp>
+        <p:nvSpPr>
+          <p:cNvPr id="27" name="Text 6">
+            <a:extLst>
+              <a:ext uri="{FF2B5EF4-FFF2-40B4-BE49-F238E27FC236}">
+                <a16:creationId xmlns:a16="http://schemas.microsoft.com/office/drawing/2014/main" id="{214D6048-C4A9-AD37-FC4F-1D7878D65878}"/>
+              </a:ext>
+            </a:extLst>
+          </p:cNvPr>
+          <p:cNvSpPr/>
+          <p:nvPr/>
+        </p:nvSpPr>
+        <p:spPr>
+          <a:xfrm>
+            <a:off x="5152298" y="868680"/>
+            <a:ext cx="2992896" cy="384048"/>
+          </a:xfrm>
+          <a:prstGeom prst="rect">
+            <a:avLst/>
+          </a:prstGeom>
+          <a:noFill/>
+          <a:ln/>
+        </p:spPr>
+        <p:txBody>
+          <a:bodyPr wrap="square" lIns="0" tIns="0" rIns="0" bIns="0" rtlCol="0" anchor="ctr"/>
+          <a:lstStyle/>
+          <a:p>
+            <a:pPr marL="0" indent="0" algn="ctr">
+              <a:buNone/>
+            </a:pPr>
+            <a:r>
+              <a:rPr lang="en-US" sz="1300" b="1" dirty="0">
+                <a:solidFill>
+                  <a:schemeClr val="bg1"/>
+                </a:solidFill>
+                <a:latin typeface="Ubuntu" panose="020B0504030602030204" pitchFamily="34" charset="0"/>
+                <a:ea typeface="Georgia" pitchFamily="34" charset="-122"/>
+                <a:cs typeface="Georgia" pitchFamily="34" charset="-120"/>
+              </a:rPr>
+              <a:t> </a:t>
+            </a:r>
+            <a:r>
+              <a:rPr lang="en-US" sz="1300" b="1" dirty="0" err="1">
+                <a:solidFill>
+                  <a:schemeClr val="bg1"/>
+                </a:solidFill>
+                <a:latin typeface="Ubuntu" panose="020B0504030602030204" pitchFamily="34" charset="0"/>
+                <a:ea typeface="Georgia" pitchFamily="34" charset="-122"/>
+                <a:cs typeface="Georgia" pitchFamily="34" charset="-120"/>
+              </a:rPr>
+              <a:t>MySql</a:t>
+            </a:r>
+            <a:endParaRPr lang="en-US" sz="1300" dirty="0">
+              <a:solidFill>
+                <a:schemeClr val="bg1"/>
+              </a:solidFill>
+              <a:latin typeface="Ubuntu" panose="020B0504030602030204" pitchFamily="34" charset="0"/>
+            </a:endParaRPr>
+          </a:p>
+        </p:txBody>
+      </p:sp>
+      <p:sp>
+        <p:nvSpPr>
+          <p:cNvPr id="28" name="ZoneTexte 27">
+            <a:extLst>
+              <a:ext uri="{FF2B5EF4-FFF2-40B4-BE49-F238E27FC236}">
+                <a16:creationId xmlns:a16="http://schemas.microsoft.com/office/drawing/2014/main" id="{897B0590-DC6B-A3F2-9C56-AB786B8D5565}"/>
+              </a:ext>
+            </a:extLst>
+          </p:cNvPr>
+          <p:cNvSpPr txBox="1"/>
+          <p:nvPr/>
+        </p:nvSpPr>
+        <p:spPr>
+          <a:xfrm>
+            <a:off x="5120646" y="1251872"/>
+            <a:ext cx="3024547" cy="1580882"/>
+          </a:xfrm>
+          <a:prstGeom prst="rect">
+            <a:avLst/>
+          </a:prstGeom>
+          <a:noFill/>
+        </p:spPr>
+        <p:txBody>
+          <a:bodyPr wrap="square" rtlCol="0">
+            <a:spAutoFit/>
+          </a:bodyPr>
+          <a:lstStyle/>
+          <a:p>
+            <a:pPr algn="just">
+              <a:lnSpc>
+                <a:spcPct val="150000"/>
+              </a:lnSpc>
+            </a:pPr>
+            <a:r>
+              <a:rPr lang="en-US" sz="1100" dirty="0">
+                <a:latin typeface="Ubuntu" panose="020B0504030602030204" pitchFamily="34" charset="0"/>
+              </a:rPr>
+              <a:t>MySQL is a widely used relational database management system (RDBMS).</a:t>
+            </a:r>
+          </a:p>
+          <a:p>
+            <a:pPr algn="just">
+              <a:lnSpc>
+                <a:spcPct val="150000"/>
+              </a:lnSpc>
+            </a:pPr>
+            <a:r>
+              <a:rPr lang="en-US" sz="1100" dirty="0">
+                <a:latin typeface="Ubuntu" panose="020B0504030602030204" pitchFamily="34" charset="0"/>
+              </a:rPr>
+              <a:t>MySQL is free and open-source.</a:t>
+            </a:r>
+          </a:p>
+          <a:p>
+            <a:pPr algn="just">
+              <a:lnSpc>
+                <a:spcPct val="150000"/>
+              </a:lnSpc>
+            </a:pPr>
+            <a:r>
+              <a:rPr lang="en-US" sz="1100" dirty="0">
+                <a:latin typeface="Ubuntu" panose="020B0504030602030204" pitchFamily="34" charset="0"/>
+              </a:rPr>
+              <a:t>MySQL is known for being fast, reliable, scalable, and easy to use, and is ideal for both small and large applications.</a:t>
+            </a:r>
+          </a:p>
+        </p:txBody>
+      </p:sp>
+      <p:sp>
+        <p:nvSpPr>
+          <p:cNvPr id="29" name="Shape 4">
+            <a:extLst>
+              <a:ext uri="{FF2B5EF4-FFF2-40B4-BE49-F238E27FC236}">
+                <a16:creationId xmlns:a16="http://schemas.microsoft.com/office/drawing/2014/main" id="{A716EB88-EDE7-1241-6967-D98C7719212C}"/>
+              </a:ext>
+            </a:extLst>
+          </p:cNvPr>
+          <p:cNvSpPr/>
+          <p:nvPr/>
+        </p:nvSpPr>
+        <p:spPr>
+          <a:xfrm>
+            <a:off x="277830" y="3182311"/>
+            <a:ext cx="2296551" cy="965781"/>
+          </a:xfrm>
+          <a:prstGeom prst="rect">
+            <a:avLst/>
+          </a:prstGeom>
+          <a:solidFill>
+            <a:srgbClr val="FFFFFF"/>
+          </a:solidFill>
+          <a:ln/>
+          <a:effectLst>
+            <a:outerShdw blurRad="101600" dist="38100" dir="8100000" algn="bl" rotWithShape="0">
+              <a:srgbClr val="000000">
+                <a:alpha val="15000"/>
+              </a:srgbClr>
+            </a:outerShdw>
+          </a:effectLst>
+        </p:spPr>
+      </p:sp>
+      <p:sp>
+        <p:nvSpPr>
+          <p:cNvPr id="30" name="Shape 5">
+            <a:extLst>
+              <a:ext uri="{FF2B5EF4-FFF2-40B4-BE49-F238E27FC236}">
+                <a16:creationId xmlns:a16="http://schemas.microsoft.com/office/drawing/2014/main" id="{5E23A2A3-2554-3A6E-8082-4AA8D18A5CF5}"/>
+              </a:ext>
+            </a:extLst>
+          </p:cNvPr>
+          <p:cNvSpPr/>
+          <p:nvPr/>
+        </p:nvSpPr>
+        <p:spPr>
+          <a:xfrm>
+            <a:off x="277830" y="3182312"/>
+            <a:ext cx="2296551" cy="384048"/>
+          </a:xfrm>
+          <a:prstGeom prst="rect">
+            <a:avLst/>
+          </a:prstGeom>
+          <a:solidFill>
+            <a:schemeClr val="accent1">
+              <a:lumMod val="75000"/>
+            </a:schemeClr>
+          </a:solidFill>
+          <a:ln>
+            <a:solidFill>
+              <a:schemeClr val="accent6">
+                <a:lumMod val="75000"/>
+              </a:schemeClr>
+            </a:solidFill>
+          </a:ln>
+        </p:spPr>
+        <p:txBody>
+          <a:bodyPr/>
+          <a:lstStyle/>
+          <a:p>
+            <a:endParaRPr lang="en-US" dirty="0">
+              <a:solidFill>
+                <a:srgbClr val="00B050"/>
+              </a:solidFill>
+            </a:endParaRPr>
+          </a:p>
+        </p:txBody>
+      </p:sp>
+      <p:sp>
+        <p:nvSpPr>
+          <p:cNvPr id="31" name="Text 6">
+            <a:extLst>
+              <a:ext uri="{FF2B5EF4-FFF2-40B4-BE49-F238E27FC236}">
+                <a16:creationId xmlns:a16="http://schemas.microsoft.com/office/drawing/2014/main" id="{DE525ED4-42BD-D741-83D7-002D2EABDDDB}"/>
+              </a:ext>
+            </a:extLst>
+          </p:cNvPr>
+          <p:cNvSpPr/>
+          <p:nvPr/>
+        </p:nvSpPr>
+        <p:spPr>
+          <a:xfrm>
+            <a:off x="277831" y="3182312"/>
+            <a:ext cx="2296550" cy="404971"/>
+          </a:xfrm>
+          <a:prstGeom prst="rect">
+            <a:avLst/>
+          </a:prstGeom>
+          <a:noFill/>
+          <a:ln/>
+        </p:spPr>
+        <p:txBody>
+          <a:bodyPr wrap="square" lIns="0" tIns="0" rIns="0" bIns="0" rtlCol="0" anchor="ctr"/>
+          <a:lstStyle/>
+          <a:p>
+            <a:pPr marL="0" indent="0" algn="ctr">
+              <a:buNone/>
+            </a:pPr>
+            <a:r>
+              <a:rPr lang="en-US" sz="1300" b="1" dirty="0">
+                <a:solidFill>
+                  <a:schemeClr val="bg1"/>
+                </a:solidFill>
+                <a:latin typeface="Ubuntu" panose="020B0504030602030204" pitchFamily="34" charset="0"/>
+                <a:ea typeface="Georgia" pitchFamily="34" charset="-122"/>
+                <a:cs typeface="Georgia" pitchFamily="34" charset="-120"/>
+              </a:rPr>
+              <a:t>Pandas</a:t>
+            </a:r>
+            <a:endParaRPr lang="en-US" sz="1300" dirty="0">
+              <a:solidFill>
+                <a:schemeClr val="bg1"/>
+              </a:solidFill>
+              <a:latin typeface="Ubuntu" panose="020B0504030602030204" pitchFamily="34" charset="0"/>
+            </a:endParaRPr>
+          </a:p>
+        </p:txBody>
+      </p:sp>
+      <p:sp>
+        <p:nvSpPr>
+          <p:cNvPr id="32" name="ZoneTexte 31">
+            <a:extLst>
+              <a:ext uri="{FF2B5EF4-FFF2-40B4-BE49-F238E27FC236}">
+                <a16:creationId xmlns:a16="http://schemas.microsoft.com/office/drawing/2014/main" id="{3A9B766D-A5FF-5B4D-10A9-6D4EDBF75A6B}"/>
+              </a:ext>
+            </a:extLst>
+          </p:cNvPr>
+          <p:cNvSpPr txBox="1"/>
+          <p:nvPr/>
+        </p:nvSpPr>
+        <p:spPr>
+          <a:xfrm>
+            <a:off x="246180" y="3565504"/>
+            <a:ext cx="2296552" cy="565219"/>
+          </a:xfrm>
+          <a:prstGeom prst="rect">
+            <a:avLst/>
+          </a:prstGeom>
+          <a:noFill/>
+        </p:spPr>
+        <p:txBody>
+          <a:bodyPr wrap="square" rtlCol="0">
+            <a:spAutoFit/>
+          </a:bodyPr>
+          <a:lstStyle/>
+          <a:p>
+            <a:pPr algn="just">
+              <a:lnSpc>
+                <a:spcPct val="150000"/>
+              </a:lnSpc>
+            </a:pPr>
+            <a:r>
+              <a:rPr lang="en-US" sz="1100" dirty="0">
+                <a:latin typeface="Ubuntu" panose="020B0504030602030204" pitchFamily="34" charset="0"/>
+              </a:rPr>
+              <a:t>Pandas is a Python library.</a:t>
+            </a:r>
+          </a:p>
+          <a:p>
+            <a:pPr algn="just">
+              <a:lnSpc>
+                <a:spcPct val="150000"/>
+              </a:lnSpc>
+            </a:pPr>
+            <a:r>
+              <a:rPr lang="en-US" sz="1100" dirty="0">
+                <a:latin typeface="Ubuntu" panose="020B0504030602030204" pitchFamily="34" charset="0"/>
+              </a:rPr>
+              <a:t>Pandas is used to analyze data.</a:t>
+            </a:r>
+          </a:p>
+        </p:txBody>
+      </p:sp>
+      <p:sp>
+        <p:nvSpPr>
+          <p:cNvPr id="33" name="Shape 4">
+            <a:extLst>
+              <a:ext uri="{FF2B5EF4-FFF2-40B4-BE49-F238E27FC236}">
+                <a16:creationId xmlns:a16="http://schemas.microsoft.com/office/drawing/2014/main" id="{1A588EB4-9E9C-A84A-D359-01C3088A140A}"/>
+              </a:ext>
+            </a:extLst>
+          </p:cNvPr>
+          <p:cNvSpPr/>
+          <p:nvPr/>
+        </p:nvSpPr>
+        <p:spPr>
+          <a:xfrm>
+            <a:off x="2690448" y="871744"/>
+            <a:ext cx="2296551" cy="2056965"/>
+          </a:xfrm>
+          <a:prstGeom prst="rect">
+            <a:avLst/>
+          </a:prstGeom>
+          <a:solidFill>
+            <a:srgbClr val="FFFFFF"/>
+          </a:solidFill>
+          <a:ln/>
+          <a:effectLst>
+            <a:outerShdw blurRad="101600" dist="38100" dir="8100000" algn="bl" rotWithShape="0">
+              <a:srgbClr val="000000">
+                <a:alpha val="15000"/>
+              </a:srgbClr>
+            </a:outerShdw>
+          </a:effectLst>
+        </p:spPr>
+      </p:sp>
+      <p:sp>
+        <p:nvSpPr>
+          <p:cNvPr id="34" name="Shape 5">
+            <a:extLst>
+              <a:ext uri="{FF2B5EF4-FFF2-40B4-BE49-F238E27FC236}">
+                <a16:creationId xmlns:a16="http://schemas.microsoft.com/office/drawing/2014/main" id="{AC483AEF-C98B-B4ED-D627-4C5C2E8DF80A}"/>
+              </a:ext>
+            </a:extLst>
+          </p:cNvPr>
+          <p:cNvSpPr/>
+          <p:nvPr/>
+        </p:nvSpPr>
+        <p:spPr>
+          <a:xfrm>
+            <a:off x="2690448" y="871745"/>
+            <a:ext cx="2296551" cy="384048"/>
+          </a:xfrm>
+          <a:prstGeom prst="rect">
+            <a:avLst/>
+          </a:prstGeom>
+          <a:solidFill>
+            <a:schemeClr val="accent2">
+              <a:lumMod val="75000"/>
+            </a:schemeClr>
+          </a:solidFill>
+          <a:ln/>
+        </p:spPr>
+        <p:txBody>
+          <a:bodyPr/>
+          <a:lstStyle/>
+          <a:p>
+            <a:endParaRPr lang="en-US" dirty="0">
+              <a:solidFill>
+                <a:srgbClr val="00B050"/>
+              </a:solidFill>
+            </a:endParaRPr>
+          </a:p>
+        </p:txBody>
+      </p:sp>
+      <p:sp>
+        <p:nvSpPr>
+          <p:cNvPr id="35" name="Text 6">
+            <a:extLst>
+              <a:ext uri="{FF2B5EF4-FFF2-40B4-BE49-F238E27FC236}">
+                <a16:creationId xmlns:a16="http://schemas.microsoft.com/office/drawing/2014/main" id="{627224F5-F404-FDF8-735D-FEC3D0923517}"/>
+              </a:ext>
+            </a:extLst>
+          </p:cNvPr>
+          <p:cNvSpPr/>
+          <p:nvPr/>
+        </p:nvSpPr>
+        <p:spPr>
+          <a:xfrm>
+            <a:off x="2690449" y="871745"/>
+            <a:ext cx="2296550" cy="384048"/>
+          </a:xfrm>
+          <a:prstGeom prst="rect">
+            <a:avLst/>
+          </a:prstGeom>
+          <a:noFill/>
+          <a:ln/>
+        </p:spPr>
+        <p:txBody>
+          <a:bodyPr wrap="square" lIns="0" tIns="0" rIns="0" bIns="0" rtlCol="0" anchor="ctr"/>
+          <a:lstStyle/>
+          <a:p>
+            <a:pPr algn="ctr"/>
+            <a:r>
+              <a:rPr lang="en-US" sz="1300" b="1" dirty="0">
+                <a:solidFill>
+                  <a:schemeClr val="bg1"/>
+                </a:solidFill>
+                <a:latin typeface="Ubuntu" panose="020B0504030602030204" pitchFamily="34" charset="0"/>
+                <a:ea typeface="Georgia" pitchFamily="34" charset="-122"/>
+                <a:cs typeface="Georgia" pitchFamily="34" charset="-120"/>
+              </a:rPr>
+              <a:t>Password hashing</a:t>
+            </a:r>
+            <a:endParaRPr lang="en-US" sz="1300" dirty="0">
+              <a:solidFill>
+                <a:schemeClr val="bg1"/>
+              </a:solidFill>
+              <a:latin typeface="Ubuntu" panose="020B0504030602030204" pitchFamily="34" charset="0"/>
+            </a:endParaRPr>
+          </a:p>
+        </p:txBody>
+      </p:sp>
+      <p:sp>
+        <p:nvSpPr>
+          <p:cNvPr id="36" name="ZoneTexte 35">
+            <a:extLst>
+              <a:ext uri="{FF2B5EF4-FFF2-40B4-BE49-F238E27FC236}">
+                <a16:creationId xmlns:a16="http://schemas.microsoft.com/office/drawing/2014/main" id="{854C84C1-FD49-F946-DD08-84F4D871BDBF}"/>
+              </a:ext>
+            </a:extLst>
+          </p:cNvPr>
+          <p:cNvSpPr txBox="1"/>
+          <p:nvPr/>
+        </p:nvSpPr>
+        <p:spPr>
+          <a:xfrm>
+            <a:off x="2658798" y="1254937"/>
+            <a:ext cx="2296552" cy="1580882"/>
+          </a:xfrm>
+          <a:prstGeom prst="rect">
+            <a:avLst/>
+          </a:prstGeom>
+          <a:noFill/>
+        </p:spPr>
+        <p:txBody>
+          <a:bodyPr wrap="square" rtlCol="0">
+            <a:spAutoFit/>
+          </a:bodyPr>
+          <a:lstStyle/>
+          <a:p>
+            <a:pPr algn="just">
+              <a:lnSpc>
+                <a:spcPct val="150000"/>
+              </a:lnSpc>
+            </a:pPr>
+            <a:r>
+              <a:rPr lang="en-US" sz="1100" dirty="0">
+                <a:latin typeface="Ubuntu" panose="020B0504030602030204" pitchFamily="34" charset="0"/>
+              </a:rPr>
+              <a:t>Password hashing transforms user passwords into secure, fixed-length, one-way cryptographic strings, ensuring passwords are not stored in plaintext. </a:t>
+            </a:r>
+          </a:p>
+        </p:txBody>
+      </p:sp>
+      <p:sp>
+        <p:nvSpPr>
+          <p:cNvPr id="37" name="Shape 4">
+            <a:extLst>
+              <a:ext uri="{FF2B5EF4-FFF2-40B4-BE49-F238E27FC236}">
+                <a16:creationId xmlns:a16="http://schemas.microsoft.com/office/drawing/2014/main" id="{952DDF15-B2C0-DEC5-A6F4-F8F716A38359}"/>
+              </a:ext>
+            </a:extLst>
+          </p:cNvPr>
+          <p:cNvSpPr/>
+          <p:nvPr/>
+        </p:nvSpPr>
+        <p:spPr>
+          <a:xfrm>
+            <a:off x="2722101" y="3493474"/>
+            <a:ext cx="6323425" cy="1073051"/>
+          </a:xfrm>
+          <a:prstGeom prst="rect">
+            <a:avLst/>
+          </a:prstGeom>
+          <a:solidFill>
+            <a:srgbClr val="FFFFFF"/>
+          </a:solidFill>
+          <a:ln/>
+          <a:effectLst>
+            <a:outerShdw blurRad="101600" dist="38100" dir="8100000" algn="bl" rotWithShape="0">
+              <a:srgbClr val="000000">
+                <a:alpha val="15000"/>
+              </a:srgbClr>
+            </a:outerShdw>
+          </a:effectLst>
+        </p:spPr>
+      </p:sp>
+      <p:sp>
+        <p:nvSpPr>
+          <p:cNvPr id="40" name="Shape 5">
+            <a:extLst>
+              <a:ext uri="{FF2B5EF4-FFF2-40B4-BE49-F238E27FC236}">
+                <a16:creationId xmlns:a16="http://schemas.microsoft.com/office/drawing/2014/main" id="{97DC8133-AF3B-0ED1-EED3-49FE553DBA72}"/>
+              </a:ext>
+            </a:extLst>
+          </p:cNvPr>
+          <p:cNvSpPr/>
+          <p:nvPr/>
+        </p:nvSpPr>
+        <p:spPr>
+          <a:xfrm>
+            <a:off x="2722100" y="3104082"/>
+            <a:ext cx="6323425" cy="384048"/>
+          </a:xfrm>
+          <a:prstGeom prst="rect">
+            <a:avLst/>
+          </a:prstGeom>
+          <a:solidFill>
+            <a:schemeClr val="bg1">
+              <a:lumMod val="50000"/>
+            </a:schemeClr>
+          </a:solidFill>
+          <a:ln/>
+        </p:spPr>
+        <p:txBody>
+          <a:bodyPr/>
+          <a:lstStyle/>
+          <a:p>
+            <a:endParaRPr lang="en-US" dirty="0">
+              <a:solidFill>
+                <a:srgbClr val="00B050"/>
+              </a:solidFill>
+            </a:endParaRPr>
+          </a:p>
+        </p:txBody>
+      </p:sp>
+      <p:sp>
+        <p:nvSpPr>
+          <p:cNvPr id="41" name="ZoneTexte 40">
+            <a:extLst>
+              <a:ext uri="{FF2B5EF4-FFF2-40B4-BE49-F238E27FC236}">
+                <a16:creationId xmlns:a16="http://schemas.microsoft.com/office/drawing/2014/main" id="{E5F28DCE-E615-2EED-5927-50B3F822E455}"/>
+              </a:ext>
+            </a:extLst>
+          </p:cNvPr>
+          <p:cNvSpPr txBox="1"/>
+          <p:nvPr/>
+        </p:nvSpPr>
+        <p:spPr>
+          <a:xfrm>
+            <a:off x="2722099" y="3419060"/>
+            <a:ext cx="6323427" cy="1073051"/>
+          </a:xfrm>
+          <a:prstGeom prst="rect">
+            <a:avLst/>
+          </a:prstGeom>
+          <a:noFill/>
+        </p:spPr>
+        <p:txBody>
+          <a:bodyPr wrap="square" rtlCol="0">
+            <a:spAutoFit/>
+          </a:bodyPr>
+          <a:lstStyle/>
+          <a:p>
+            <a:pPr algn="just">
+              <a:lnSpc>
+                <a:spcPct val="150000"/>
+              </a:lnSpc>
+            </a:pPr>
+            <a:r>
+              <a:rPr lang="en-US" sz="1100" dirty="0">
+                <a:latin typeface="Ubuntu" panose="020B0504030602030204" pitchFamily="34" charset="0"/>
+              </a:rPr>
+              <a:t>A JSON Web Token (JWT) is an open, industry-standard (RFC 7519) method for securely representing claims between two parties, commonly used for authorization and authentication in web apps. It is a compact, URL-safe, self-contained string comprising a header, payload, and signature, allowing servers to verify user identity without database lookups. </a:t>
+            </a:r>
+          </a:p>
+        </p:txBody>
+      </p:sp>
+      <p:sp>
+        <p:nvSpPr>
+          <p:cNvPr id="42" name="Text 6">
+            <a:extLst>
+              <a:ext uri="{FF2B5EF4-FFF2-40B4-BE49-F238E27FC236}">
+                <a16:creationId xmlns:a16="http://schemas.microsoft.com/office/drawing/2014/main" id="{5F55780B-C823-A6AB-99E9-9E757369A14F}"/>
+              </a:ext>
+            </a:extLst>
+          </p:cNvPr>
+          <p:cNvSpPr/>
+          <p:nvPr/>
+        </p:nvSpPr>
+        <p:spPr>
+          <a:xfrm>
+            <a:off x="2726780" y="3104900"/>
+            <a:ext cx="6318745" cy="404971"/>
+          </a:xfrm>
+          <a:prstGeom prst="rect">
+            <a:avLst/>
+          </a:prstGeom>
+          <a:noFill/>
+          <a:ln/>
+        </p:spPr>
+        <p:txBody>
+          <a:bodyPr wrap="square" lIns="0" tIns="0" rIns="0" bIns="0" rtlCol="0" anchor="ctr"/>
+          <a:lstStyle/>
+          <a:p>
+            <a:pPr algn="ctr"/>
+            <a:r>
+              <a:rPr lang="en-US" sz="1300" b="1" dirty="0">
+                <a:solidFill>
+                  <a:schemeClr val="bg1"/>
+                </a:solidFill>
+                <a:latin typeface="Ubuntu" panose="020B0504030602030204" pitchFamily="34" charset="0"/>
+                <a:ea typeface="Georgia" pitchFamily="34" charset="-122"/>
+                <a:cs typeface="Georgia" pitchFamily="34" charset="-120"/>
+              </a:rPr>
+              <a:t>JSON Web Token (JWT)</a:t>
+            </a:r>
+            <a:endParaRPr lang="en-US" sz="1300" dirty="0">
+              <a:solidFill>
+                <a:schemeClr val="bg1"/>
+              </a:solidFill>
+              <a:latin typeface="Ubuntu" panose="020B0504030602030204" pitchFamily="34" charset="0"/>
+            </a:endParaRPr>
+          </a:p>
+        </p:txBody>
+      </p:sp>
     </p:spTree>
+    <p:extLst>
+      <p:ext uri="{BB962C8B-B14F-4D97-AF65-F5344CB8AC3E}">
+        <p14:creationId xmlns:p14="http://schemas.microsoft.com/office/powerpoint/2010/main" val="1442282030"/>
+      </p:ext>
+    </p:extLst>
   </p:cSld>
   <p:clrMapOvr>
     <a:masterClrMapping/>
@@ -12270,99 +13466,26 @@
                 <a:solidFill>
                   <a:srgbClr val="FFFFFF"/>
                 </a:solidFill>
-                <a:latin typeface="Ubuntu" panose="020B0504030602030204" pitchFamily="34" charset="0"/>
+                <a:latin typeface="Georgia" pitchFamily="34" charset="0"/>
                 <a:ea typeface="Georgia" pitchFamily="34" charset="-122"/>
                 <a:cs typeface="Georgia" pitchFamily="34" charset="-120"/>
               </a:rPr>
               <a:t>Part 4 : Results &amp; Interpretation</a:t>
             </a:r>
-            <a:endParaRPr lang="en-US" sz="2200" dirty="0">
-              <a:latin typeface="Ubuntu" panose="020B0504030602030204" pitchFamily="34" charset="0"/>
-            </a:endParaRPr>
-          </a:p>
-        </p:txBody>
-      </p:sp>
-      <p:sp>
-        <p:nvSpPr>
-          <p:cNvPr id="8" name="Text 6"/>
-          <p:cNvSpPr/>
-          <p:nvPr/>
-        </p:nvSpPr>
-        <p:spPr>
-          <a:xfrm>
-            <a:off x="182880" y="896112"/>
-            <a:ext cx="2788920" cy="502920"/>
-          </a:xfrm>
-          <a:prstGeom prst="rect">
-            <a:avLst/>
-          </a:prstGeom>
-          <a:noFill/>
-          <a:ln/>
-        </p:spPr>
-        <p:txBody>
-          <a:bodyPr wrap="square" rtlCol="0" anchor="ctr"/>
-          <a:lstStyle/>
-          <a:p>
-            <a:pPr marL="0" indent="0" algn="ctr">
-              <a:buNone/>
-            </a:pPr>
-            <a:endParaRPr lang="en-US" sz="3000" dirty="0">
-              <a:latin typeface="Ubuntu" panose="020B0504030602030204" pitchFamily="34" charset="0"/>
-            </a:endParaRPr>
-          </a:p>
-        </p:txBody>
-      </p:sp>
-      <p:sp>
-        <p:nvSpPr>
-          <p:cNvPr id="9" name="Text 7"/>
-          <p:cNvSpPr/>
-          <p:nvPr/>
-        </p:nvSpPr>
-        <p:spPr>
-          <a:xfrm>
-            <a:off x="182880" y="1371600"/>
-            <a:ext cx="2788920" cy="320040"/>
-          </a:xfrm>
-          <a:prstGeom prst="rect">
-            <a:avLst/>
-          </a:prstGeom>
-          <a:noFill/>
-          <a:ln/>
-        </p:spPr>
-        <p:txBody>
-          <a:bodyPr wrap="square" lIns="0" tIns="0" rIns="0" bIns="0" rtlCol="0" anchor="ctr"/>
-          <a:lstStyle/>
-          <a:p>
-            <a:pPr marL="0" indent="0" algn="ctr">
-              <a:buNone/>
-            </a:pPr>
-            <a:r>
-              <a:rPr lang="en-US" sz="1200" b="1" dirty="0">
-                <a:solidFill>
-                  <a:srgbClr val="FFFFFF"/>
-                </a:solidFill>
-                <a:latin typeface="Ubuntu" panose="020B0504030602030204" pitchFamily="34" charset="0"/>
-                <a:ea typeface="Georgia" pitchFamily="34" charset="-122"/>
-                <a:cs typeface="Georgia" pitchFamily="34" charset="-120"/>
-              </a:rPr>
-              <a:t>Home Page</a:t>
-            </a:r>
-            <a:endParaRPr lang="en-US" sz="1200" dirty="0">
-              <a:latin typeface="Ubuntu" panose="020B0504030602030204" pitchFamily="34" charset="0"/>
-            </a:endParaRPr>
-          </a:p>
-        </p:txBody>
-      </p:sp>
-      <p:sp>
-        <p:nvSpPr>
-          <p:cNvPr id="11" name="Shape 9"/>
-          <p:cNvSpPr/>
-          <p:nvPr/>
-        </p:nvSpPr>
-        <p:spPr>
-          <a:xfrm>
-            <a:off x="77372" y="868679"/>
-            <a:ext cx="8968154" cy="4195689"/>
+            <a:endParaRPr lang="en-US" sz="2200" dirty="0"/>
+          </a:p>
+        </p:txBody>
+      </p:sp>
+      <p:sp>
+        <p:nvSpPr>
+          <p:cNvPr id="6" name="Shape 4"/>
+          <p:cNvSpPr/>
+          <p:nvPr/>
+        </p:nvSpPr>
+        <p:spPr>
+          <a:xfrm>
+            <a:off x="182880" y="868679"/>
+            <a:ext cx="8869680" cy="4209757"/>
           </a:xfrm>
           <a:prstGeom prst="rect">
             <a:avLst/>
@@ -12374,7 +13497,7 @@
           </a:solidFill>
           <a:ln w="12700">
             <a:solidFill>
-              <a:srgbClr val="D4A017"/>
+              <a:srgbClr val="C0392B"/>
             </a:solidFill>
             <a:prstDash val="solid"/>
           </a:ln>
@@ -12389,20 +13512,20 @@
       </p:sp>
       <p:sp>
         <p:nvSpPr>
-          <p:cNvPr id="12" name="Shape 10"/>
-          <p:cNvSpPr/>
-          <p:nvPr/>
-        </p:nvSpPr>
-        <p:spPr>
-          <a:xfrm>
-            <a:off x="77372" y="868680"/>
-            <a:ext cx="8968154" cy="777240"/>
-          </a:xfrm>
-          <a:prstGeom prst="rect">
-            <a:avLst/>
-          </a:prstGeom>
-          <a:solidFill>
-            <a:srgbClr val="D4A017">
+          <p:cNvPr id="7" name="Shape 5"/>
+          <p:cNvSpPr/>
+          <p:nvPr/>
+        </p:nvSpPr>
+        <p:spPr>
+          <a:xfrm>
+            <a:off x="182880" y="868680"/>
+            <a:ext cx="8869680" cy="777240"/>
+          </a:xfrm>
+          <a:prstGeom prst="rect">
+            <a:avLst/>
+          </a:prstGeom>
+          <a:solidFill>
+            <a:srgbClr val="C0392B">
               <a:alpha val="65000"/>
             </a:srgbClr>
           </a:solidFill>
@@ -12411,14 +13534,14 @@
       </p:sp>
       <p:sp>
         <p:nvSpPr>
-          <p:cNvPr id="13" name="Text 11"/>
-          <p:cNvSpPr/>
-          <p:nvPr/>
-        </p:nvSpPr>
-        <p:spPr>
-          <a:xfrm>
-            <a:off x="77372" y="896112"/>
-            <a:ext cx="8968154" cy="502920"/>
+          <p:cNvPr id="8" name="Text 6"/>
+          <p:cNvSpPr/>
+          <p:nvPr/>
+        </p:nvSpPr>
+        <p:spPr>
+          <a:xfrm>
+            <a:off x="182880" y="868680"/>
+            <a:ext cx="8869680" cy="530352"/>
           </a:xfrm>
           <a:prstGeom prst="rect">
             <a:avLst/>
@@ -12438,26 +13561,23 @@
                 <a:solidFill>
                   <a:srgbClr val="000000"/>
                 </a:solidFill>
-                <a:latin typeface="Ubuntu" panose="020B0504030602030204" pitchFamily="34" charset="0"/>
-              </a:rPr>
-              <a:t>🔍</a:t>
-            </a:r>
-            <a:endParaRPr lang="en-US" sz="3000" dirty="0">
-              <a:latin typeface="Ubuntu" panose="020B0504030602030204" pitchFamily="34" charset="0"/>
-            </a:endParaRPr>
-          </a:p>
-        </p:txBody>
-      </p:sp>
-      <p:sp>
-        <p:nvSpPr>
-          <p:cNvPr id="14" name="Text 12"/>
-          <p:cNvSpPr/>
-          <p:nvPr/>
-        </p:nvSpPr>
-        <p:spPr>
-          <a:xfrm>
-            <a:off x="77372" y="1371600"/>
-            <a:ext cx="8968154" cy="320040"/>
+              </a:rPr>
+              <a:t>🏠</a:t>
+            </a:r>
+            <a:endParaRPr lang="en-US" sz="3000" dirty="0"/>
+          </a:p>
+        </p:txBody>
+      </p:sp>
+      <p:sp>
+        <p:nvSpPr>
+          <p:cNvPr id="9" name="Text 7"/>
+          <p:cNvSpPr/>
+          <p:nvPr/>
+        </p:nvSpPr>
+        <p:spPr>
+          <a:xfrm>
+            <a:off x="182880" y="1371600"/>
+            <a:ext cx="8869680" cy="320040"/>
           </a:xfrm>
           <a:prstGeom prst="rect">
             <a:avLst/>
@@ -12477,15 +13597,13 @@
                 <a:solidFill>
                   <a:srgbClr val="FFFFFF"/>
                 </a:solidFill>
-                <a:latin typeface="Ubuntu" panose="020B0504030602030204" pitchFamily="34" charset="0"/>
+                <a:latin typeface="Georgia" pitchFamily="34" charset="0"/>
                 <a:ea typeface="Georgia" pitchFamily="34" charset="-122"/>
                 <a:cs typeface="Georgia" pitchFamily="34" charset="-120"/>
               </a:rPr>
-              <a:t>Search Results</a:t>
-            </a:r>
-            <a:endParaRPr lang="en-US" sz="1200" dirty="0">
-              <a:latin typeface="Ubuntu" panose="020B0504030602030204" pitchFamily="34" charset="0"/>
-            </a:endParaRPr>
+              <a:t>Home Page</a:t>
+            </a:r>
+            <a:endParaRPr lang="en-US" sz="1200" dirty="0"/>
           </a:p>
         </p:txBody>
       </p:sp>
@@ -12494,7 +13612,7 @@
           <p:cNvPr id="37" name="Image 36">
             <a:extLst>
               <a:ext uri="{FF2B5EF4-FFF2-40B4-BE49-F238E27FC236}">
-                <a16:creationId xmlns:a16="http://schemas.microsoft.com/office/drawing/2014/main" id="{A6EAECEA-640D-A117-B5C1-5090EDDD5266}"/>
+                <a16:creationId xmlns:a16="http://schemas.microsoft.com/office/drawing/2014/main" id="{C82B1C71-74A9-CA88-FB44-A5BED7EBC056}"/>
               </a:ext>
             </a:extLst>
           </p:cNvPr>
@@ -12511,8 +13629,8 @@
         </p:blipFill>
         <p:spPr>
           <a:xfrm>
-            <a:off x="77372" y="1636196"/>
-            <a:ext cx="8968154" cy="3428172"/>
+            <a:off x="182880" y="1645921"/>
+            <a:ext cx="8869680" cy="3432516"/>
           </a:xfrm>
           <a:prstGeom prst="rect">
             <a:avLst/>
@@ -12617,7 +13735,7 @@
                 <a:ea typeface="Georgia" pitchFamily="34" charset="-122"/>
                 <a:cs typeface="Georgia" pitchFamily="34" charset="-120"/>
               </a:rPr>
-              <a:t>Part 4 :Results &amp; Interpretation</a:t>
+              <a:t>Part 4 : Results &amp; Interpretation</a:t>
             </a:r>
             <a:endParaRPr lang="en-US" sz="2200" dirty="0">
               <a:latin typeface="Ubuntu" panose="020B0504030602030204" pitchFamily="34" charset="0"/>
@@ -12627,14 +13745,85 @@
       </p:sp>
       <p:sp>
         <p:nvSpPr>
-          <p:cNvPr id="21" name="Shape 19"/>
-          <p:cNvSpPr/>
-          <p:nvPr/>
-        </p:nvSpPr>
-        <p:spPr>
-          <a:xfrm>
-            <a:off x="91440" y="829291"/>
-            <a:ext cx="8961120" cy="4249146"/>
+          <p:cNvPr id="8" name="Text 6"/>
+          <p:cNvSpPr/>
+          <p:nvPr/>
+        </p:nvSpPr>
+        <p:spPr>
+          <a:xfrm>
+            <a:off x="182880" y="896112"/>
+            <a:ext cx="2788920" cy="502920"/>
+          </a:xfrm>
+          <a:prstGeom prst="rect">
+            <a:avLst/>
+          </a:prstGeom>
+          <a:noFill/>
+          <a:ln/>
+        </p:spPr>
+        <p:txBody>
+          <a:bodyPr wrap="square" rtlCol="0" anchor="ctr"/>
+          <a:lstStyle/>
+          <a:p>
+            <a:pPr marL="0" indent="0" algn="ctr">
+              <a:buNone/>
+            </a:pPr>
+            <a:endParaRPr lang="en-US" sz="3000" dirty="0">
+              <a:latin typeface="Ubuntu" panose="020B0504030602030204" pitchFamily="34" charset="0"/>
+            </a:endParaRPr>
+          </a:p>
+        </p:txBody>
+      </p:sp>
+      <p:sp>
+        <p:nvSpPr>
+          <p:cNvPr id="9" name="Text 7"/>
+          <p:cNvSpPr/>
+          <p:nvPr/>
+        </p:nvSpPr>
+        <p:spPr>
+          <a:xfrm>
+            <a:off x="182880" y="1371600"/>
+            <a:ext cx="2788920" cy="320040"/>
+          </a:xfrm>
+          <a:prstGeom prst="rect">
+            <a:avLst/>
+          </a:prstGeom>
+          <a:noFill/>
+          <a:ln/>
+        </p:spPr>
+        <p:txBody>
+          <a:bodyPr wrap="square" lIns="0" tIns="0" rIns="0" bIns="0" rtlCol="0" anchor="ctr"/>
+          <a:lstStyle/>
+          <a:p>
+            <a:pPr marL="0" indent="0" algn="ctr">
+              <a:buNone/>
+            </a:pPr>
+            <a:r>
+              <a:rPr lang="en-US" sz="1200" b="1" dirty="0">
+                <a:solidFill>
+                  <a:srgbClr val="FFFFFF"/>
+                </a:solidFill>
+                <a:latin typeface="Ubuntu" panose="020B0504030602030204" pitchFamily="34" charset="0"/>
+                <a:ea typeface="Georgia" pitchFamily="34" charset="-122"/>
+                <a:cs typeface="Georgia" pitchFamily="34" charset="-120"/>
+              </a:rPr>
+              <a:t>Home Page</a:t>
+            </a:r>
+            <a:endParaRPr lang="en-US" sz="1200" dirty="0">
+              <a:latin typeface="Ubuntu" panose="020B0504030602030204" pitchFamily="34" charset="0"/>
+            </a:endParaRPr>
+          </a:p>
+        </p:txBody>
+      </p:sp>
+      <p:sp>
+        <p:nvSpPr>
+          <p:cNvPr id="11" name="Shape 9"/>
+          <p:cNvSpPr/>
+          <p:nvPr/>
+        </p:nvSpPr>
+        <p:spPr>
+          <a:xfrm>
+            <a:off x="77372" y="868679"/>
+            <a:ext cx="8968154" cy="4195689"/>
           </a:xfrm>
           <a:prstGeom prst="rect">
             <a:avLst/>
@@ -12646,7 +13835,7 @@
           </a:solidFill>
           <a:ln w="12700">
             <a:solidFill>
-              <a:srgbClr val="7B2D8B"/>
+              <a:srgbClr val="D4A017"/>
             </a:solidFill>
             <a:prstDash val="solid"/>
           </a:ln>
@@ -12661,20 +13850,20 @@
       </p:sp>
       <p:sp>
         <p:nvSpPr>
-          <p:cNvPr id="22" name="Shape 20"/>
-          <p:cNvSpPr/>
-          <p:nvPr/>
-        </p:nvSpPr>
-        <p:spPr>
-          <a:xfrm>
-            <a:off x="91440" y="829291"/>
-            <a:ext cx="8961120" cy="777240"/>
-          </a:xfrm>
-          <a:prstGeom prst="rect">
-            <a:avLst/>
-          </a:prstGeom>
-          <a:solidFill>
-            <a:srgbClr val="7B2D8B">
+          <p:cNvPr id="12" name="Shape 10"/>
+          <p:cNvSpPr/>
+          <p:nvPr/>
+        </p:nvSpPr>
+        <p:spPr>
+          <a:xfrm>
+            <a:off x="77372" y="868680"/>
+            <a:ext cx="8968154" cy="777240"/>
+          </a:xfrm>
+          <a:prstGeom prst="rect">
+            <a:avLst/>
+          </a:prstGeom>
+          <a:solidFill>
+            <a:srgbClr val="D4A017">
               <a:alpha val="65000"/>
             </a:srgbClr>
           </a:solidFill>
@@ -12683,14 +13872,14 @@
       </p:sp>
       <p:sp>
         <p:nvSpPr>
-          <p:cNvPr id="23" name="Text 21"/>
-          <p:cNvSpPr/>
-          <p:nvPr/>
-        </p:nvSpPr>
-        <p:spPr>
-          <a:xfrm>
-            <a:off x="91440" y="856723"/>
-            <a:ext cx="8961120" cy="502920"/>
+          <p:cNvPr id="13" name="Text 11"/>
+          <p:cNvSpPr/>
+          <p:nvPr/>
+        </p:nvSpPr>
+        <p:spPr>
+          <a:xfrm>
+            <a:off x="77372" y="896112"/>
+            <a:ext cx="8968154" cy="502920"/>
           </a:xfrm>
           <a:prstGeom prst="rect">
             <a:avLst/>
@@ -12712,7 +13901,7 @@
                 </a:solidFill>
                 <a:latin typeface="Ubuntu" panose="020B0504030602030204" pitchFamily="34" charset="0"/>
               </a:rPr>
-              <a:t>🎛️</a:t>
+              <a:t>🔍</a:t>
             </a:r>
             <a:endParaRPr lang="en-US" sz="3000" dirty="0">
               <a:latin typeface="Ubuntu" panose="020B0504030602030204" pitchFamily="34" charset="0"/>
@@ -12722,14 +13911,14 @@
       </p:sp>
       <p:sp>
         <p:nvSpPr>
-          <p:cNvPr id="24" name="Text 22"/>
-          <p:cNvSpPr/>
-          <p:nvPr/>
-        </p:nvSpPr>
-        <p:spPr>
-          <a:xfrm>
-            <a:off x="91440" y="1332211"/>
-            <a:ext cx="8961120" cy="320040"/>
+          <p:cNvPr id="14" name="Text 12"/>
+          <p:cNvSpPr/>
+          <p:nvPr/>
+        </p:nvSpPr>
+        <p:spPr>
+          <a:xfrm>
+            <a:off x="77372" y="1371600"/>
+            <a:ext cx="8968154" cy="320040"/>
           </a:xfrm>
           <a:prstGeom prst="rect">
             <a:avLst/>
@@ -12753,7 +13942,7 @@
                 <a:ea typeface="Georgia" pitchFamily="34" charset="-122"/>
                 <a:cs typeface="Georgia" pitchFamily="34" charset="-120"/>
               </a:rPr>
-              <a:t>Admin Dashboard</a:t>
+              <a:t>Search Results</a:t>
             </a:r>
             <a:endParaRPr lang="en-US" sz="1200" dirty="0">
               <a:latin typeface="Ubuntu" panose="020B0504030602030204" pitchFamily="34" charset="0"/>
@@ -12766,7 +13955,7 @@
           <p:cNvPr id="37" name="Image 36">
             <a:extLst>
               <a:ext uri="{FF2B5EF4-FFF2-40B4-BE49-F238E27FC236}">
-                <a16:creationId xmlns:a16="http://schemas.microsoft.com/office/drawing/2014/main" id="{DE6F1983-2199-9378-70FD-1F615D78C0CB}"/>
+                <a16:creationId xmlns:a16="http://schemas.microsoft.com/office/drawing/2014/main" id="{A6EAECEA-640D-A117-B5C1-5090EDDD5266}"/>
               </a:ext>
             </a:extLst>
           </p:cNvPr>
@@ -12783,8 +13972,8 @@
         </p:blipFill>
         <p:spPr>
           <a:xfrm>
-            <a:off x="91440" y="1606532"/>
-            <a:ext cx="8961120" cy="3471906"/>
+            <a:off x="77372" y="1636196"/>
+            <a:ext cx="8968154" cy="3428172"/>
           </a:xfrm>
           <a:prstGeom prst="rect">
             <a:avLst/>

--- a/sha-ntieb.pptx
+++ b/sha-ntieb.pptx
@@ -5,7 +5,7 @@
     <p:sldMasterId id="2147483648" r:id="rId1"/>
   </p:sldMasterIdLst>
   <p:notesMasterIdLst>
-    <p:notesMasterId r:id="rId17"/>
+    <p:notesMasterId r:id="rId18"/>
   </p:notesMasterIdLst>
   <p:sldIdLst>
     <p:sldId id="256" r:id="rId2"/>
@@ -21,8 +21,9 @@
     <p:sldId id="274" r:id="rId12"/>
     <p:sldId id="275" r:id="rId13"/>
     <p:sldId id="276" r:id="rId14"/>
-    <p:sldId id="264" r:id="rId15"/>
-    <p:sldId id="265" r:id="rId16"/>
+    <p:sldId id="263" r:id="rId15"/>
+    <p:sldId id="264" r:id="rId16"/>
+    <p:sldId id="265" r:id="rId17"/>
   </p:sldIdLst>
   <p:sldSz cx="9144000" cy="5143500" type="screen16x9"/>
   <p:notesSz cx="5143500" cy="9144000"/>
@@ -839,6 +840,90 @@
 </p:notes>
 </file>
 
+<file path=ppt/notesSlides/notesSlide16.xml><?xml version="1.0" encoding="utf-8"?>
+<p:notes xmlns:a="http://schemas.openxmlformats.org/drawingml/2006/main" xmlns:r="http://schemas.openxmlformats.org/officeDocument/2006/relationships" xmlns:p="http://schemas.openxmlformats.org/presentationml/2006/main">
+  <p:cSld>
+    <p:spTree>
+      <p:nvGrpSpPr>
+        <p:cNvPr id="1" name=""/>
+        <p:cNvGrpSpPr/>
+        <p:nvPr/>
+      </p:nvGrpSpPr>
+      <p:grpSpPr>
+        <a:xfrm>
+          <a:off x="0" y="0"/>
+          <a:ext cx="0" cy="0"/>
+          <a:chOff x="0" y="0"/>
+          <a:chExt cx="0" cy="0"/>
+        </a:xfrm>
+      </p:grpSpPr>
+      <p:sp>
+        <p:nvSpPr>
+          <p:cNvPr id="2" name="Slide Image Placeholder 1"/>
+          <p:cNvSpPr>
+            <a:spLocks noGrp="1" noRot="1" noChangeAspect="1"/>
+          </p:cNvSpPr>
+          <p:nvPr>
+            <p:ph type="sldImg"/>
+          </p:nvPr>
+        </p:nvSpPr>
+        <p:spPr/>
+      </p:sp>
+      <p:sp>
+        <p:nvSpPr>
+          <p:cNvPr id="3" name="Notes Placeholder 2"/>
+          <p:cNvSpPr>
+            <a:spLocks noGrp="1"/>
+          </p:cNvSpPr>
+          <p:nvPr>
+            <p:ph type="body" idx="1"/>
+          </p:nvPr>
+        </p:nvSpPr>
+        <p:spPr/>
+        <p:txBody>
+          <a:bodyPr/>
+          <a:lstStyle/>
+          <a:p>
+            <a:endParaRPr lang="en-US" dirty="0"/>
+          </a:p>
+        </p:txBody>
+      </p:sp>
+      <p:sp>
+        <p:nvSpPr>
+          <p:cNvPr id="4" name="Slide Number Placeholder 3"/>
+          <p:cNvSpPr>
+            <a:spLocks noGrp="1"/>
+          </p:cNvSpPr>
+          <p:nvPr>
+            <p:ph type="sldNum" sz="quarter" idx="10"/>
+          </p:nvPr>
+        </p:nvSpPr>
+        <p:spPr/>
+        <p:txBody>
+          <a:bodyPr/>
+          <a:lstStyle/>
+          <a:p>
+            <a:fld id="{F7021451-1387-4CA6-816F-3879F97B5CBC}" type="slidenum">
+              <a:rPr lang="en-US"/>
+              <a:t>16</a:t>
+            </a:fld>
+            <a:endParaRPr lang="en-US"/>
+          </a:p>
+        </p:txBody>
+      </p:sp>
+    </p:spTree>
+    <p:extLst>
+      <p:ext uri="{BB962C8B-B14F-4D97-AF65-F5344CB8AC3E}">
+        <p14:creationId xmlns:p14="http://schemas.microsoft.com/office/powerpoint/2010/main" val="1024086991"/>
+      </p:ext>
+    </p:extLst>
+  </p:cSld>
+  <p:clrMapOvr>
+    <a:masterClrMapping/>
+  </p:clrMapOvr>
+</p:notes>
+</file>
+
 <file path=ppt/notesSlides/notesSlide2.xml><?xml version="1.0" encoding="utf-8"?>
 <p:notes xmlns:a="http://schemas.openxmlformats.org/drawingml/2006/main" xmlns:r="http://schemas.openxmlformats.org/officeDocument/2006/relationships" xmlns:p="http://schemas.openxmlformats.org/presentationml/2006/main">
   <p:cSld>
@@ -4467,87 +4552,10 @@
                 <a:ea typeface="Georgia" pitchFamily="34" charset="-122"/>
                 <a:cs typeface="Georgia" pitchFamily="34" charset="-120"/>
               </a:rPr>
-              <a:t>Part 5 : Conclusion</a:t>
-            </a:r>
-            <a:endParaRPr lang="en-US" sz="2200" dirty="0">
-              <a:latin typeface="Ubuntu" panose="020B0504030602030204" pitchFamily="34" charset="0"/>
-            </a:endParaRPr>
-          </a:p>
-        </p:txBody>
-      </p:sp>
-      <p:sp>
-        <p:nvSpPr>
-          <p:cNvPr id="6" name="Shape 4"/>
-          <p:cNvSpPr/>
-          <p:nvPr/>
-        </p:nvSpPr>
-        <p:spPr>
-          <a:xfrm>
-            <a:off x="182880" y="868680"/>
-            <a:ext cx="2834640" cy="4160520"/>
-          </a:xfrm>
-          <a:prstGeom prst="rect">
-            <a:avLst/>
-          </a:prstGeom>
-          <a:solidFill>
-            <a:srgbClr val="FFFFFF">
-              <a:alpha val="7000"/>
-            </a:srgbClr>
-          </a:solidFill>
-          <a:ln w="19050">
-            <a:solidFill>
-              <a:srgbClr val="C0392B"/>
-            </a:solidFill>
-            <a:prstDash val="solid"/>
-          </a:ln>
-        </p:spPr>
-      </p:sp>
-      <p:sp>
-        <p:nvSpPr>
-          <p:cNvPr id="7" name="Shape 5"/>
-          <p:cNvSpPr/>
-          <p:nvPr/>
-        </p:nvSpPr>
-        <p:spPr>
-          <a:xfrm>
-            <a:off x="182880" y="868680"/>
-            <a:ext cx="2834640" cy="502920"/>
-          </a:xfrm>
-          <a:prstGeom prst="rect">
-            <a:avLst/>
-          </a:prstGeom>
-          <a:solidFill>
-            <a:srgbClr val="C0392B"/>
-          </a:solidFill>
-          <a:ln/>
-        </p:spPr>
-      </p:sp>
-      <p:sp>
-        <p:nvSpPr>
-          <p:cNvPr id="8" name="Text 6"/>
-          <p:cNvSpPr/>
-          <p:nvPr/>
-        </p:nvSpPr>
-        <p:spPr>
-          <a:xfrm>
-            <a:off x="182880" y="868680"/>
-            <a:ext cx="2834640" cy="502920"/>
-          </a:xfrm>
-          <a:prstGeom prst="rect">
-            <a:avLst/>
-          </a:prstGeom>
-          <a:noFill/>
-          <a:ln/>
-        </p:spPr>
-        <p:txBody>
-          <a:bodyPr wrap="square" lIns="0" tIns="0" rIns="0" bIns="0" rtlCol="0" anchor="ctr"/>
-          <a:lstStyle/>
-          <a:p>
-            <a:pPr marL="0" indent="0" algn="ctr">
-              <a:buNone/>
-            </a:pPr>
-            <a:r>
-              <a:rPr lang="en-US" sz="1200" b="1" dirty="0">
+              <a:t>Part 5 </a:t>
+            </a:r>
+            <a:r>
+              <a:rPr lang="fr-FR" sz="2200" b="1" dirty="0">
                 <a:solidFill>
                   <a:srgbClr val="FFFFFF"/>
                 </a:solidFill>
@@ -4555,44 +4563,145 @@
                 <a:ea typeface="Georgia" pitchFamily="34" charset="-122"/>
                 <a:cs typeface="Georgia" pitchFamily="34" charset="-120"/>
               </a:rPr>
-              <a:t>📋 Summary of Work</a:t>
-            </a:r>
-            <a:endParaRPr lang="en-US" sz="1200" dirty="0">
-              <a:latin typeface="Ubuntu" panose="020B0504030602030204" pitchFamily="34" charset="0"/>
-            </a:endParaRPr>
-          </a:p>
-        </p:txBody>
-      </p:sp>
-      <p:sp>
-        <p:nvSpPr>
-          <p:cNvPr id="9" name="Shape 7"/>
-          <p:cNvSpPr/>
-          <p:nvPr/>
-        </p:nvSpPr>
-        <p:spPr>
-          <a:xfrm>
-            <a:off x="292608" y="1508760"/>
-            <a:ext cx="164592" cy="164592"/>
-          </a:xfrm>
-          <a:prstGeom prst="ellipse">
-            <a:avLst/>
-          </a:prstGeom>
-          <a:solidFill>
-            <a:srgbClr val="C0392B"/>
-          </a:solidFill>
-          <a:ln/>
-        </p:spPr>
-      </p:sp>
-      <p:sp>
-        <p:nvSpPr>
-          <p:cNvPr id="10" name="Text 8"/>
-          <p:cNvSpPr/>
-          <p:nvPr/>
-        </p:nvSpPr>
-        <p:spPr>
-          <a:xfrm>
-            <a:off x="530352" y="1481328"/>
-            <a:ext cx="2377440" cy="411480"/>
+              <a:t>:</a:t>
+            </a:r>
+            <a:r>
+              <a:rPr lang="en-US" sz="2200" b="1" dirty="0">
+                <a:solidFill>
+                  <a:srgbClr val="FFFFFF"/>
+                </a:solidFill>
+                <a:latin typeface="Ubuntu" panose="020B0504030602030204" pitchFamily="34" charset="0"/>
+                <a:ea typeface="Georgia" pitchFamily="34" charset="-122"/>
+                <a:cs typeface="Georgia" pitchFamily="34" charset="-120"/>
+              </a:rPr>
+              <a:t> Code Enhancement (pytest + flake8)</a:t>
+            </a:r>
+            <a:endParaRPr lang="en-US" sz="2200" dirty="0">
+              <a:latin typeface="Ubuntu" panose="020B0504030602030204" pitchFamily="34" charset="0"/>
+            </a:endParaRPr>
+          </a:p>
+        </p:txBody>
+      </p:sp>
+      <p:sp>
+        <p:nvSpPr>
+          <p:cNvPr id="6" name="Shape 4"/>
+          <p:cNvSpPr/>
+          <p:nvPr/>
+        </p:nvSpPr>
+        <p:spPr>
+          <a:xfrm>
+            <a:off x="228600" y="1283679"/>
+            <a:ext cx="4206240" cy="3569677"/>
+          </a:xfrm>
+          <a:prstGeom prst="rect">
+            <a:avLst/>
+          </a:prstGeom>
+          <a:solidFill>
+            <a:srgbClr val="FFFFFF"/>
+          </a:solidFill>
+          <a:ln/>
+          <a:effectLst>
+            <a:outerShdw blurRad="101600" dist="38100" dir="8100000" algn="bl" rotWithShape="0">
+              <a:srgbClr val="000000">
+                <a:alpha val="15000"/>
+              </a:srgbClr>
+            </a:outerShdw>
+          </a:effectLst>
+        </p:spPr>
+      </p:sp>
+      <p:sp>
+        <p:nvSpPr>
+          <p:cNvPr id="7" name="Shape 5"/>
+          <p:cNvSpPr/>
+          <p:nvPr/>
+        </p:nvSpPr>
+        <p:spPr>
+          <a:xfrm>
+            <a:off x="228600" y="1283679"/>
+            <a:ext cx="4206240" cy="457200"/>
+          </a:xfrm>
+          <a:prstGeom prst="rect">
+            <a:avLst/>
+          </a:prstGeom>
+          <a:solidFill>
+            <a:srgbClr val="1A6B3C"/>
+          </a:solidFill>
+          <a:ln/>
+        </p:spPr>
+      </p:sp>
+      <p:sp>
+        <p:nvSpPr>
+          <p:cNvPr id="8" name="Text 6"/>
+          <p:cNvSpPr/>
+          <p:nvPr/>
+        </p:nvSpPr>
+        <p:spPr>
+          <a:xfrm>
+            <a:off x="228600" y="1283679"/>
+            <a:ext cx="4206240" cy="457200"/>
+          </a:xfrm>
+          <a:prstGeom prst="rect">
+            <a:avLst/>
+          </a:prstGeom>
+          <a:noFill/>
+          <a:ln/>
+        </p:spPr>
+        <p:txBody>
+          <a:bodyPr wrap="square" lIns="0" tIns="0" rIns="0" bIns="0" rtlCol="0" anchor="ctr"/>
+          <a:lstStyle/>
+          <a:p>
+            <a:pPr marL="0" indent="0" algn="ctr">
+              <a:buNone/>
+            </a:pPr>
+            <a:r>
+              <a:rPr lang="en-US" sz="1400" b="1" dirty="0">
+                <a:solidFill>
+                  <a:srgbClr val="FFFFFF"/>
+                </a:solidFill>
+                <a:latin typeface="Ubuntu" panose="020B0504030602030204" pitchFamily="34" charset="0"/>
+                <a:ea typeface="Georgia" pitchFamily="34" charset="-122"/>
+                <a:cs typeface="Georgia" pitchFamily="34" charset="-120"/>
+              </a:rPr>
+              <a:t> </a:t>
+            </a:r>
+            <a:r>
+              <a:rPr lang="en-US" sz="1400" b="1" dirty="0" err="1">
+                <a:solidFill>
+                  <a:srgbClr val="FFFFFF"/>
+                </a:solidFill>
+                <a:latin typeface="Ubuntu" panose="020B0504030602030204" pitchFamily="34" charset="0"/>
+                <a:ea typeface="Georgia" pitchFamily="34" charset="-122"/>
+                <a:cs typeface="Georgia" pitchFamily="34" charset="-120"/>
+              </a:rPr>
+              <a:t>pytest</a:t>
+            </a:r>
+            <a:r>
+              <a:rPr lang="en-US" sz="1400" b="1" dirty="0">
+                <a:solidFill>
+                  <a:srgbClr val="FFFFFF"/>
+                </a:solidFill>
+                <a:latin typeface="Ubuntu" panose="020B0504030602030204" pitchFamily="34" charset="0"/>
+                <a:ea typeface="Georgia" pitchFamily="34" charset="-122"/>
+                <a:cs typeface="Georgia" pitchFamily="34" charset="-120"/>
+              </a:rPr>
+              <a:t> : Unit Testing</a:t>
+            </a:r>
+            <a:endParaRPr lang="en-US" sz="1400" dirty="0">
+              <a:latin typeface="Ubuntu" panose="020B0504030602030204" pitchFamily="34" charset="0"/>
+            </a:endParaRPr>
+          </a:p>
+        </p:txBody>
+      </p:sp>
+      <p:sp>
+        <p:nvSpPr>
+          <p:cNvPr id="9" name="Text 7"/>
+          <p:cNvSpPr/>
+          <p:nvPr/>
+        </p:nvSpPr>
+        <p:spPr>
+          <a:xfrm>
+            <a:off x="320040" y="2631364"/>
+            <a:ext cx="4023360" cy="2221992"/>
           </a:xfrm>
           <a:prstGeom prst="rect">
             <a:avLst/>
@@ -4608,142 +4717,495 @@
               <a:buNone/>
             </a:pPr>
             <a:r>
-              <a:rPr lang="en-US" sz="1000" dirty="0">
+              <a:rPr lang="en-US" sz="850" dirty="0">
+                <a:solidFill>
+                  <a:srgbClr val="5D4037"/>
+                </a:solidFill>
+                <a:latin typeface="Ubuntu" panose="020B0504030602030204" pitchFamily="34" charset="0"/>
+                <a:ea typeface="Consolas" pitchFamily="34" charset="-122"/>
+                <a:cs typeface="Consolas" pitchFamily="34" charset="-120"/>
+              </a:rPr>
+              <a:t># test_ai_engine.py</a:t>
+            </a:r>
+            <a:endParaRPr lang="en-US" sz="850" dirty="0">
+              <a:latin typeface="Ubuntu" panose="020B0504030602030204" pitchFamily="34" charset="0"/>
+            </a:endParaRPr>
+          </a:p>
+          <a:p>
+            <a:pPr marL="0" indent="0">
+              <a:buNone/>
+            </a:pPr>
+            <a:r>
+              <a:rPr lang="en-US" sz="850" dirty="0">
+                <a:solidFill>
+                  <a:srgbClr val="5D4037"/>
+                </a:solidFill>
+                <a:latin typeface="Ubuntu" panose="020B0504030602030204" pitchFamily="34" charset="0"/>
+                <a:ea typeface="Consolas" pitchFamily="34" charset="-122"/>
+                <a:cs typeface="Consolas" pitchFamily="34" charset="-120"/>
+              </a:rPr>
+              <a:t>from app.services.ai_engine import (</a:t>
+            </a:r>
+            <a:endParaRPr lang="en-US" sz="850" dirty="0">
+              <a:latin typeface="Ubuntu" panose="020B0504030602030204" pitchFamily="34" charset="0"/>
+            </a:endParaRPr>
+          </a:p>
+          <a:p>
+            <a:pPr marL="0" indent="0">
+              <a:buNone/>
+            </a:pPr>
+            <a:r>
+              <a:rPr lang="en-US" sz="850" dirty="0">
+                <a:solidFill>
+                  <a:srgbClr val="5D4037"/>
+                </a:solidFill>
+                <a:latin typeface="Ubuntu" panose="020B0504030602030204" pitchFamily="34" charset="0"/>
+                <a:ea typeface="Consolas" pitchFamily="34" charset="-122"/>
+                <a:cs typeface="Consolas" pitchFamily="34" charset="-120"/>
+              </a:rPr>
+              <a:t>    normalize, simple_match_score,</a:t>
+            </a:r>
+            <a:endParaRPr lang="en-US" sz="850" dirty="0">
+              <a:latin typeface="Ubuntu" panose="020B0504030602030204" pitchFamily="34" charset="0"/>
+            </a:endParaRPr>
+          </a:p>
+          <a:p>
+            <a:pPr marL="0" indent="0">
+              <a:buNone/>
+            </a:pPr>
+            <a:r>
+              <a:rPr lang="en-US" sz="850" dirty="0">
+                <a:solidFill>
+                  <a:srgbClr val="5D4037"/>
+                </a:solidFill>
+                <a:latin typeface="Ubuntu" panose="020B0504030602030204" pitchFamily="34" charset="0"/>
+                <a:ea typeface="Consolas" pitchFamily="34" charset="-122"/>
+                <a:cs typeface="Consolas" pitchFamily="34" charset="-120"/>
+              </a:rPr>
+              <a:t>    tfidf_similarity</a:t>
+            </a:r>
+            <a:endParaRPr lang="en-US" sz="850" dirty="0">
+              <a:latin typeface="Ubuntu" panose="020B0504030602030204" pitchFamily="34" charset="0"/>
+            </a:endParaRPr>
+          </a:p>
+          <a:p>
+            <a:pPr marL="0" indent="0">
+              <a:buNone/>
+            </a:pPr>
+            <a:r>
+              <a:rPr lang="en-US" sz="850" dirty="0">
+                <a:solidFill>
+                  <a:srgbClr val="5D4037"/>
+                </a:solidFill>
+                <a:latin typeface="Ubuntu" panose="020B0504030602030204" pitchFamily="34" charset="0"/>
+                <a:ea typeface="Consolas" pitchFamily="34" charset="-122"/>
+                <a:cs typeface="Consolas" pitchFamily="34" charset="-120"/>
+              </a:rPr>
+              <a:t>)</a:t>
+            </a:r>
+            <a:endParaRPr lang="en-US" sz="850" dirty="0">
+              <a:latin typeface="Ubuntu" panose="020B0504030602030204" pitchFamily="34" charset="0"/>
+            </a:endParaRPr>
+          </a:p>
+          <a:p>
+            <a:pPr marL="0" indent="0">
+              <a:buNone/>
+            </a:pPr>
+            <a:endParaRPr lang="en-US" sz="850" dirty="0">
+              <a:latin typeface="Ubuntu" panose="020B0504030602030204" pitchFamily="34" charset="0"/>
+            </a:endParaRPr>
+          </a:p>
+          <a:p>
+            <a:pPr marL="0" indent="0">
+              <a:buNone/>
+            </a:pPr>
+            <a:r>
+              <a:rPr lang="en-US" sz="850" dirty="0">
+                <a:solidFill>
+                  <a:srgbClr val="5D4037"/>
+                </a:solidFill>
+                <a:latin typeface="Ubuntu" panose="020B0504030602030204" pitchFamily="34" charset="0"/>
+                <a:ea typeface="Consolas" pitchFamily="34" charset="-122"/>
+                <a:cs typeface="Consolas" pitchFamily="34" charset="-120"/>
+              </a:rPr>
+              <a:t>def test_normalize_arabic():</a:t>
+            </a:r>
+            <a:endParaRPr lang="en-US" sz="850" dirty="0">
+              <a:latin typeface="Ubuntu" panose="020B0504030602030204" pitchFamily="34" charset="0"/>
+            </a:endParaRPr>
+          </a:p>
+          <a:p>
+            <a:pPr marL="0" indent="0">
+              <a:buNone/>
+            </a:pPr>
+            <a:r>
+              <a:rPr lang="en-US" sz="850" dirty="0">
+                <a:solidFill>
+                  <a:srgbClr val="5D4037"/>
+                </a:solidFill>
+                <a:latin typeface="Ubuntu" panose="020B0504030602030204" pitchFamily="34" charset="0"/>
+                <a:ea typeface="Consolas" pitchFamily="34" charset="-122"/>
+                <a:cs typeface="Consolas" pitchFamily="34" charset="-120"/>
+              </a:rPr>
+              <a:t>    assert normalize("أحمد") == "احمد"</a:t>
+            </a:r>
+            <a:endParaRPr lang="en-US" sz="850" dirty="0">
+              <a:latin typeface="Ubuntu" panose="020B0504030602030204" pitchFamily="34" charset="0"/>
+            </a:endParaRPr>
+          </a:p>
+          <a:p>
+            <a:pPr marL="0" indent="0">
+              <a:buNone/>
+            </a:pPr>
+            <a:r>
+              <a:rPr lang="en-US" sz="850" dirty="0">
+                <a:solidFill>
+                  <a:srgbClr val="5D4037"/>
+                </a:solidFill>
+                <a:latin typeface="Ubuntu" panose="020B0504030602030204" pitchFamily="34" charset="0"/>
+                <a:ea typeface="Consolas" pitchFamily="34" charset="-122"/>
+                <a:cs typeface="Consolas" pitchFamily="34" charset="-120"/>
+              </a:rPr>
+              <a:t>    assert normalize("تمرة") == "تمره"</a:t>
+            </a:r>
+            <a:endParaRPr lang="en-US" sz="850" dirty="0">
+              <a:latin typeface="Ubuntu" panose="020B0504030602030204" pitchFamily="34" charset="0"/>
+            </a:endParaRPr>
+          </a:p>
+          <a:p>
+            <a:pPr marL="0" indent="0">
+              <a:buNone/>
+            </a:pPr>
+            <a:endParaRPr lang="en-US" sz="850" dirty="0">
+              <a:latin typeface="Ubuntu" panose="020B0504030602030204" pitchFamily="34" charset="0"/>
+            </a:endParaRPr>
+          </a:p>
+          <a:p>
+            <a:pPr marL="0" indent="0">
+              <a:buNone/>
+            </a:pPr>
+            <a:r>
+              <a:rPr lang="en-US" sz="850" dirty="0">
+                <a:solidFill>
+                  <a:srgbClr val="5D4037"/>
+                </a:solidFill>
+                <a:latin typeface="Ubuntu" panose="020B0504030602030204" pitchFamily="34" charset="0"/>
+                <a:ea typeface="Consolas" pitchFamily="34" charset="-122"/>
+                <a:cs typeface="Consolas" pitchFamily="34" charset="-120"/>
+              </a:rPr>
+              <a:t>def test_simple_match():</a:t>
+            </a:r>
+            <a:endParaRPr lang="en-US" sz="850" dirty="0">
+              <a:latin typeface="Ubuntu" panose="020B0504030602030204" pitchFamily="34" charset="0"/>
+            </a:endParaRPr>
+          </a:p>
+          <a:p>
+            <a:pPr marL="0" indent="0">
+              <a:buNone/>
+            </a:pPr>
+            <a:r>
+              <a:rPr lang="en-US" sz="850" dirty="0">
+                <a:solidFill>
+                  <a:srgbClr val="5D4037"/>
+                </a:solidFill>
+                <a:latin typeface="Ubuntu" panose="020B0504030602030204" pitchFamily="34" charset="0"/>
+                <a:ea typeface="Consolas" pitchFamily="34" charset="-122"/>
+                <a:cs typeface="Consolas" pitchFamily="34" charset="-120"/>
+              </a:rPr>
+              <a:t>    user = ["جزر", "بطاطس"]</a:t>
+            </a:r>
+            <a:endParaRPr lang="en-US" sz="850" dirty="0">
+              <a:latin typeface="Ubuntu" panose="020B0504030602030204" pitchFamily="34" charset="0"/>
+            </a:endParaRPr>
+          </a:p>
+          <a:p>
+            <a:pPr marL="0" indent="0">
+              <a:buNone/>
+            </a:pPr>
+            <a:r>
+              <a:rPr lang="en-US" sz="850" dirty="0">
+                <a:solidFill>
+                  <a:srgbClr val="5D4037"/>
+                </a:solidFill>
+                <a:latin typeface="Ubuntu" panose="020B0504030602030204" pitchFamily="34" charset="0"/>
+                <a:ea typeface="Consolas" pitchFamily="34" charset="-122"/>
+                <a:cs typeface="Consolas" pitchFamily="34" charset="-120"/>
+              </a:rPr>
+              <a:t>    recipe = ["جزر", "بطاطس", "لحم"]</a:t>
+            </a:r>
+            <a:endParaRPr lang="en-US" sz="850" dirty="0">
+              <a:latin typeface="Ubuntu" panose="020B0504030602030204" pitchFamily="34" charset="0"/>
+            </a:endParaRPr>
+          </a:p>
+          <a:p>
+            <a:pPr marL="0" indent="0">
+              <a:buNone/>
+            </a:pPr>
+            <a:r>
+              <a:rPr lang="en-US" sz="850" dirty="0">
+                <a:solidFill>
+                  <a:srgbClr val="5D4037"/>
+                </a:solidFill>
+                <a:latin typeface="Ubuntu" panose="020B0504030602030204" pitchFamily="34" charset="0"/>
+                <a:ea typeface="Consolas" pitchFamily="34" charset="-122"/>
+                <a:cs typeface="Consolas" pitchFamily="34" charset="-120"/>
+              </a:rPr>
+              <a:t>    result = simple_match_score(user, recipe)</a:t>
+            </a:r>
+            <a:endParaRPr lang="en-US" sz="850" dirty="0">
+              <a:latin typeface="Ubuntu" panose="020B0504030602030204" pitchFamily="34" charset="0"/>
+            </a:endParaRPr>
+          </a:p>
+          <a:p>
+            <a:pPr marL="0" indent="0">
+              <a:buNone/>
+            </a:pPr>
+            <a:r>
+              <a:rPr lang="en-US" sz="850" dirty="0">
+                <a:solidFill>
+                  <a:srgbClr val="5D4037"/>
+                </a:solidFill>
+                <a:latin typeface="Ubuntu" panose="020B0504030602030204" pitchFamily="34" charset="0"/>
+                <a:ea typeface="Consolas" pitchFamily="34" charset="-122"/>
+                <a:cs typeface="Consolas" pitchFamily="34" charset="-120"/>
+              </a:rPr>
+              <a:t>    assert result["match_count"] == 2</a:t>
+            </a:r>
+            <a:endParaRPr lang="en-US" sz="850" dirty="0">
+              <a:latin typeface="Ubuntu" panose="020B0504030602030204" pitchFamily="34" charset="0"/>
+            </a:endParaRPr>
+          </a:p>
+          <a:p>
+            <a:pPr marL="0" indent="0">
+              <a:buNone/>
+            </a:pPr>
+            <a:r>
+              <a:rPr lang="en-US" sz="850" dirty="0">
+                <a:solidFill>
+                  <a:srgbClr val="5D4037"/>
+                </a:solidFill>
+                <a:latin typeface="Ubuntu" panose="020B0504030602030204" pitchFamily="34" charset="0"/>
+                <a:ea typeface="Consolas" pitchFamily="34" charset="-122"/>
+                <a:cs typeface="Consolas" pitchFamily="34" charset="-120"/>
+              </a:rPr>
+              <a:t>    assert result["match_percent"] == 67</a:t>
+            </a:r>
+            <a:endParaRPr lang="en-US" sz="850" dirty="0">
+              <a:latin typeface="Ubuntu" panose="020B0504030602030204" pitchFamily="34" charset="0"/>
+            </a:endParaRPr>
+          </a:p>
+        </p:txBody>
+      </p:sp>
+      <p:sp>
+        <p:nvSpPr>
+          <p:cNvPr id="10" name="Shape 8"/>
+          <p:cNvSpPr/>
+          <p:nvPr/>
+        </p:nvSpPr>
+        <p:spPr>
+          <a:xfrm>
+            <a:off x="4709160" y="1283678"/>
+            <a:ext cx="4206240" cy="3640013"/>
+          </a:xfrm>
+          <a:prstGeom prst="rect">
+            <a:avLst/>
+          </a:prstGeom>
+          <a:solidFill>
+            <a:srgbClr val="FFFFFF"/>
+          </a:solidFill>
+          <a:ln/>
+          <a:effectLst>
+            <a:outerShdw blurRad="101600" dist="38100" dir="8100000" algn="bl" rotWithShape="0">
+              <a:srgbClr val="000000">
+                <a:alpha val="15000"/>
+              </a:srgbClr>
+            </a:outerShdw>
+          </a:effectLst>
+        </p:spPr>
+      </p:sp>
+      <p:sp>
+        <p:nvSpPr>
+          <p:cNvPr id="11" name="Shape 9"/>
+          <p:cNvSpPr/>
+          <p:nvPr/>
+        </p:nvSpPr>
+        <p:spPr>
+          <a:xfrm>
+            <a:off x="4709160" y="1283679"/>
+            <a:ext cx="4206240" cy="457200"/>
+          </a:xfrm>
+          <a:prstGeom prst="rect">
+            <a:avLst/>
+          </a:prstGeom>
+          <a:solidFill>
+            <a:srgbClr val="15618A"/>
+          </a:solidFill>
+          <a:ln/>
+        </p:spPr>
+      </p:sp>
+      <p:sp>
+        <p:nvSpPr>
+          <p:cNvPr id="12" name="Text 10"/>
+          <p:cNvSpPr/>
+          <p:nvPr/>
+        </p:nvSpPr>
+        <p:spPr>
+          <a:xfrm>
+            <a:off x="4709160" y="1283679"/>
+            <a:ext cx="4206240" cy="457200"/>
+          </a:xfrm>
+          <a:prstGeom prst="rect">
+            <a:avLst/>
+          </a:prstGeom>
+          <a:noFill/>
+          <a:ln/>
+        </p:spPr>
+        <p:txBody>
+          <a:bodyPr wrap="square" lIns="0" tIns="0" rIns="0" bIns="0" rtlCol="0" anchor="ctr"/>
+          <a:lstStyle/>
+          <a:p>
+            <a:pPr marL="0" indent="0" algn="ctr">
+              <a:buNone/>
+            </a:pPr>
+            <a:r>
+              <a:rPr lang="en-US" sz="1400" b="1" dirty="0">
+                <a:solidFill>
+                  <a:srgbClr val="FFFFFF"/>
+                </a:solidFill>
+                <a:latin typeface="Ubuntu" panose="020B0504030602030204" pitchFamily="34" charset="0"/>
+                <a:ea typeface="Georgia" pitchFamily="34" charset="-122"/>
+                <a:cs typeface="Georgia" pitchFamily="34" charset="-120"/>
+              </a:rPr>
+              <a:t>flake8 : Code Quality</a:t>
+            </a:r>
+            <a:endParaRPr lang="en-US" sz="1400" dirty="0">
+              <a:latin typeface="Ubuntu" panose="020B0504030602030204" pitchFamily="34" charset="0"/>
+            </a:endParaRPr>
+          </a:p>
+        </p:txBody>
+      </p:sp>
+      <p:sp>
+        <p:nvSpPr>
+          <p:cNvPr id="13" name="Text 11"/>
+          <p:cNvSpPr/>
+          <p:nvPr/>
+        </p:nvSpPr>
+        <p:spPr>
+          <a:xfrm>
+            <a:off x="4846320" y="2551883"/>
+            <a:ext cx="3931920" cy="228600"/>
+          </a:xfrm>
+          <a:prstGeom prst="rect">
+            <a:avLst/>
+          </a:prstGeom>
+          <a:noFill/>
+          <a:ln/>
+        </p:spPr>
+        <p:txBody>
+          <a:bodyPr wrap="square" lIns="0" tIns="0" rIns="0" bIns="0" rtlCol="0" anchor="ctr"/>
+          <a:lstStyle/>
+          <a:p>
+            <a:pPr marL="0" indent="0">
+              <a:buNone/>
+            </a:pPr>
+            <a:r>
+              <a:rPr lang="en-US" sz="1100" dirty="0">
+                <a:solidFill>
+                  <a:srgbClr val="5D4037"/>
+                </a:solidFill>
                 <a:latin typeface="Ubuntu" panose="020B0504030602030204" pitchFamily="34" charset="0"/>
                 <a:ea typeface="Calibri" pitchFamily="34" charset="-122"/>
                 <a:cs typeface="Calibri" pitchFamily="34" charset="-120"/>
               </a:rPr>
-              <a:t>Built a full-stack web app for Algerian recipe recommendations</a:t>
-            </a:r>
-            <a:endParaRPr lang="en-US" sz="1000" dirty="0">
-              <a:latin typeface="Ubuntu" panose="020B0504030602030204" pitchFamily="34" charset="0"/>
-            </a:endParaRPr>
-          </a:p>
-        </p:txBody>
-      </p:sp>
-      <p:sp>
-        <p:nvSpPr>
-          <p:cNvPr id="11" name="Shape 9"/>
-          <p:cNvSpPr/>
-          <p:nvPr/>
-        </p:nvSpPr>
-        <p:spPr>
-          <a:xfrm>
-            <a:off x="292608" y="2167128"/>
-            <a:ext cx="164592" cy="164592"/>
-          </a:xfrm>
-          <a:prstGeom prst="ellipse">
-            <a:avLst/>
-          </a:prstGeom>
-          <a:solidFill>
-            <a:srgbClr val="C0392B"/>
-          </a:solidFill>
-          <a:ln/>
-        </p:spPr>
-      </p:sp>
-      <p:sp>
-        <p:nvSpPr>
-          <p:cNvPr id="12" name="Text 10"/>
-          <p:cNvSpPr/>
-          <p:nvPr/>
-        </p:nvSpPr>
-        <p:spPr>
-          <a:xfrm>
-            <a:off x="530352" y="2139696"/>
-            <a:ext cx="2377440" cy="411480"/>
-          </a:xfrm>
-          <a:prstGeom prst="rect">
-            <a:avLst/>
-          </a:prstGeom>
-          <a:noFill/>
-          <a:ln/>
-        </p:spPr>
-        <p:txBody>
-          <a:bodyPr wrap="square" lIns="0" tIns="0" rIns="0" bIns="0" rtlCol="0" anchor="ctr"/>
-          <a:lstStyle/>
-          <a:p>
-            <a:r>
-              <a:rPr lang="en-US" sz="1000" dirty="0">
+              <a:t>PEP8 compliance check</a:t>
+            </a:r>
+            <a:endParaRPr lang="en-US" sz="1100" dirty="0">
+              <a:latin typeface="Ubuntu" panose="020B0504030602030204" pitchFamily="34" charset="0"/>
+            </a:endParaRPr>
+          </a:p>
+        </p:txBody>
+      </p:sp>
+      <p:sp>
+        <p:nvSpPr>
+          <p:cNvPr id="14" name="Text 12"/>
+          <p:cNvSpPr/>
+          <p:nvPr/>
+        </p:nvSpPr>
+        <p:spPr>
+          <a:xfrm>
+            <a:off x="4846320" y="2807915"/>
+            <a:ext cx="3931920" cy="228600"/>
+          </a:xfrm>
+          <a:prstGeom prst="rect">
+            <a:avLst/>
+          </a:prstGeom>
+          <a:noFill/>
+          <a:ln/>
+        </p:spPr>
+        <p:txBody>
+          <a:bodyPr wrap="square" lIns="0" tIns="0" rIns="0" bIns="0" rtlCol="0" anchor="ctr"/>
+          <a:lstStyle/>
+          <a:p>
+            <a:pPr marL="0" indent="0">
+              <a:buNone/>
+            </a:pPr>
+            <a:r>
+              <a:rPr lang="en-US" sz="1100" dirty="0">
+                <a:solidFill>
+                  <a:srgbClr val="5D4037"/>
+                </a:solidFill>
                 <a:latin typeface="Ubuntu" panose="020B0504030602030204" pitchFamily="34" charset="0"/>
                 <a:ea typeface="Calibri" pitchFamily="34" charset="-122"/>
                 <a:cs typeface="Calibri" pitchFamily="34" charset="-120"/>
               </a:rPr>
-              <a:t>Implemented 3-level AI engine: Simple Match + TF-IDF + Transformers</a:t>
-            </a:r>
-          </a:p>
-        </p:txBody>
-      </p:sp>
-      <p:sp>
-        <p:nvSpPr>
-          <p:cNvPr id="13" name="Shape 11"/>
-          <p:cNvSpPr/>
-          <p:nvPr/>
-        </p:nvSpPr>
-        <p:spPr>
-          <a:xfrm>
-            <a:off x="292608" y="2825496"/>
-            <a:ext cx="164592" cy="164592"/>
-          </a:xfrm>
-          <a:prstGeom prst="ellipse">
-            <a:avLst/>
-          </a:prstGeom>
-          <a:solidFill>
-            <a:srgbClr val="C0392B"/>
-          </a:solidFill>
-          <a:ln/>
-        </p:spPr>
-      </p:sp>
-      <p:sp>
-        <p:nvSpPr>
-          <p:cNvPr id="14" name="Text 12"/>
-          <p:cNvSpPr/>
-          <p:nvPr/>
-        </p:nvSpPr>
-        <p:spPr>
-          <a:xfrm>
-            <a:off x="530352" y="2798064"/>
-            <a:ext cx="2377440" cy="411480"/>
-          </a:xfrm>
-          <a:prstGeom prst="rect">
-            <a:avLst/>
-          </a:prstGeom>
-          <a:noFill/>
-          <a:ln/>
-        </p:spPr>
-        <p:txBody>
-          <a:bodyPr wrap="square" lIns="0" tIns="0" rIns="0" bIns="0" rtlCol="0" anchor="ctr"/>
-          <a:lstStyle/>
-          <a:p>
-            <a:r>
-              <a:rPr lang="en-US" sz="1000" dirty="0">
+              <a:t>Max line length: 100 chars</a:t>
+            </a:r>
+            <a:endParaRPr lang="en-US" sz="1100" dirty="0">
+              <a:latin typeface="Ubuntu" panose="020B0504030602030204" pitchFamily="34" charset="0"/>
+            </a:endParaRPr>
+          </a:p>
+        </p:txBody>
+      </p:sp>
+      <p:sp>
+        <p:nvSpPr>
+          <p:cNvPr id="15" name="Text 13"/>
+          <p:cNvSpPr/>
+          <p:nvPr/>
+        </p:nvSpPr>
+        <p:spPr>
+          <a:xfrm>
+            <a:off x="4846320" y="3063947"/>
+            <a:ext cx="3931920" cy="228600"/>
+          </a:xfrm>
+          <a:prstGeom prst="rect">
+            <a:avLst/>
+          </a:prstGeom>
+          <a:noFill/>
+          <a:ln/>
+        </p:spPr>
+        <p:txBody>
+          <a:bodyPr wrap="square" lIns="0" tIns="0" rIns="0" bIns="0" rtlCol="0" anchor="ctr"/>
+          <a:lstStyle/>
+          <a:p>
+            <a:pPr marL="0" indent="0">
+              <a:buNone/>
+            </a:pPr>
+            <a:r>
+              <a:rPr lang="en-US" sz="1100" dirty="0">
+                <a:solidFill>
+                  <a:srgbClr val="5D4037"/>
+                </a:solidFill>
                 <a:latin typeface="Ubuntu" panose="020B0504030602030204" pitchFamily="34" charset="0"/>
                 <a:ea typeface="Calibri" pitchFamily="34" charset="-122"/>
                 <a:cs typeface="Calibri" pitchFamily="34" charset="-120"/>
               </a:rPr>
-              <a:t>Created Admin Dashboard with CSV import functionality</a:t>
-            </a:r>
-          </a:p>
-        </p:txBody>
-      </p:sp>
-      <p:sp>
-        <p:nvSpPr>
-          <p:cNvPr id="15" name="Shape 13"/>
-          <p:cNvSpPr/>
-          <p:nvPr/>
-        </p:nvSpPr>
-        <p:spPr>
-          <a:xfrm>
-            <a:off x="292608" y="3483864"/>
-            <a:ext cx="164592" cy="164592"/>
-          </a:xfrm>
-          <a:prstGeom prst="ellipse">
-            <a:avLst/>
-          </a:prstGeom>
-          <a:solidFill>
-            <a:srgbClr val="C0392B"/>
-          </a:solidFill>
-          <a:ln/>
-        </p:spPr>
+              <a:t>No unused imports</a:t>
+            </a:r>
+            <a:endParaRPr lang="en-US" sz="1100" dirty="0">
+              <a:latin typeface="Ubuntu" panose="020B0504030602030204" pitchFamily="34" charset="0"/>
+            </a:endParaRPr>
+          </a:p>
+        </p:txBody>
       </p:sp>
       <p:sp>
         <p:nvSpPr>
@@ -4753,791 +5215,288 @@
         </p:nvSpPr>
         <p:spPr>
           <a:xfrm>
-            <a:off x="530352" y="3456432"/>
-            <a:ext cx="2377440" cy="411480"/>
-          </a:xfrm>
-          <a:prstGeom prst="rect">
-            <a:avLst/>
-          </a:prstGeom>
-          <a:noFill/>
-          <a:ln/>
-        </p:spPr>
-        <p:txBody>
-          <a:bodyPr wrap="square" lIns="0" tIns="0" rIns="0" bIns="0" rtlCol="0" anchor="ctr"/>
-          <a:lstStyle/>
-          <a:p>
-            <a:r>
-              <a:rPr lang="en-US" sz="1000" dirty="0">
+            <a:off x="4846320" y="3319979"/>
+            <a:ext cx="3931920" cy="228600"/>
+          </a:xfrm>
+          <a:prstGeom prst="rect">
+            <a:avLst/>
+          </a:prstGeom>
+          <a:noFill/>
+          <a:ln/>
+        </p:spPr>
+        <p:txBody>
+          <a:bodyPr wrap="square" lIns="0" tIns="0" rIns="0" bIns="0" rtlCol="0" anchor="ctr"/>
+          <a:lstStyle/>
+          <a:p>
+            <a:pPr marL="0" indent="0">
+              <a:buNone/>
+            </a:pPr>
+            <a:r>
+              <a:rPr lang="en-US" sz="1100" dirty="0">
+                <a:solidFill>
+                  <a:srgbClr val="5D4037"/>
+                </a:solidFill>
                 <a:latin typeface="Ubuntu" panose="020B0504030602030204" pitchFamily="34" charset="0"/>
                 <a:ea typeface="Calibri" pitchFamily="34" charset="-122"/>
                 <a:cs typeface="Calibri" pitchFamily="34" charset="-120"/>
               </a:rPr>
-              <a:t>Developed bilingual support (Arabic RTL + English LTR)</a:t>
-            </a:r>
-          </a:p>
-        </p:txBody>
-      </p:sp>
-      <p:sp>
-        <p:nvSpPr>
-          <p:cNvPr id="17" name="Shape 15"/>
-          <p:cNvSpPr/>
-          <p:nvPr/>
-        </p:nvSpPr>
-        <p:spPr>
-          <a:xfrm>
-            <a:off x="292608" y="4142232"/>
-            <a:ext cx="164592" cy="164592"/>
-          </a:xfrm>
-          <a:prstGeom prst="ellipse">
-            <a:avLst/>
-          </a:prstGeom>
-          <a:solidFill>
-            <a:srgbClr val="C0392B"/>
-          </a:solidFill>
-          <a:ln/>
-        </p:spPr>
-      </p:sp>
-      <p:sp>
-        <p:nvSpPr>
-          <p:cNvPr id="18" name="Text 16"/>
-          <p:cNvSpPr/>
-          <p:nvPr/>
-        </p:nvSpPr>
-        <p:spPr>
-          <a:xfrm>
-            <a:off x="530352" y="4114800"/>
-            <a:ext cx="2377440" cy="411480"/>
-          </a:xfrm>
-          <a:prstGeom prst="rect">
-            <a:avLst/>
-          </a:prstGeom>
-          <a:noFill/>
-          <a:ln/>
-        </p:spPr>
-        <p:txBody>
-          <a:bodyPr wrap="square" lIns="0" tIns="0" rIns="0" bIns="0" rtlCol="0" anchor="ctr"/>
-          <a:lstStyle/>
-          <a:p>
-            <a:r>
-              <a:rPr lang="en-US" sz="1000" dirty="0">
+              <a:t>Proper indentation</a:t>
+            </a:r>
+            <a:endParaRPr lang="en-US" sz="1100" dirty="0">
+              <a:latin typeface="Ubuntu" panose="020B0504030602030204" pitchFamily="34" charset="0"/>
+            </a:endParaRPr>
+          </a:p>
+        </p:txBody>
+      </p:sp>
+      <p:sp>
+        <p:nvSpPr>
+          <p:cNvPr id="17" name="Text 15"/>
+          <p:cNvSpPr/>
+          <p:nvPr/>
+        </p:nvSpPr>
+        <p:spPr>
+          <a:xfrm>
+            <a:off x="4846320" y="3576011"/>
+            <a:ext cx="3931920" cy="228600"/>
+          </a:xfrm>
+          <a:prstGeom prst="rect">
+            <a:avLst/>
+          </a:prstGeom>
+          <a:noFill/>
+          <a:ln/>
+        </p:spPr>
+        <p:txBody>
+          <a:bodyPr wrap="square" lIns="0" tIns="0" rIns="0" bIns="0" rtlCol="0" anchor="ctr"/>
+          <a:lstStyle/>
+          <a:p>
+            <a:pPr marL="0" indent="0">
+              <a:buNone/>
+            </a:pPr>
+            <a:r>
+              <a:rPr lang="en-US" sz="1100" dirty="0">
+                <a:solidFill>
+                  <a:srgbClr val="5D4037"/>
+                </a:solidFill>
                 <a:latin typeface="Ubuntu" panose="020B0504030602030204" pitchFamily="34" charset="0"/>
                 <a:ea typeface="Calibri" pitchFamily="34" charset="-122"/>
                 <a:cs typeface="Calibri" pitchFamily="34" charset="-120"/>
               </a:rPr>
-              <a:t>Secured with JWT authentication and bcrypt password hashing</a:t>
-            </a:r>
-          </a:p>
-        </p:txBody>
-      </p:sp>
-      <p:sp>
-        <p:nvSpPr>
-          <p:cNvPr id="19" name="Shape 17"/>
-          <p:cNvSpPr/>
-          <p:nvPr/>
-        </p:nvSpPr>
-        <p:spPr>
-          <a:xfrm>
-            <a:off x="3172968" y="868680"/>
-            <a:ext cx="2834640" cy="4160520"/>
-          </a:xfrm>
-          <a:prstGeom prst="rect">
-            <a:avLst/>
-          </a:prstGeom>
-          <a:solidFill>
-            <a:srgbClr val="FFFFFF">
-              <a:alpha val="7000"/>
-            </a:srgbClr>
-          </a:solidFill>
-          <a:ln w="19050">
-            <a:solidFill>
-              <a:srgbClr val="D4A017"/>
-            </a:solidFill>
-            <a:prstDash val="solid"/>
-          </a:ln>
-        </p:spPr>
-      </p:sp>
-      <p:sp>
-        <p:nvSpPr>
-          <p:cNvPr id="20" name="Shape 18"/>
-          <p:cNvSpPr/>
-          <p:nvPr/>
-        </p:nvSpPr>
-        <p:spPr>
-          <a:xfrm>
-            <a:off x="3172968" y="868680"/>
-            <a:ext cx="2834640" cy="502920"/>
-          </a:xfrm>
-          <a:prstGeom prst="rect">
-            <a:avLst/>
-          </a:prstGeom>
-          <a:solidFill>
-            <a:srgbClr val="D4A017"/>
-          </a:solidFill>
-          <a:ln/>
-        </p:spPr>
-      </p:sp>
-      <p:sp>
-        <p:nvSpPr>
-          <p:cNvPr id="21" name="Text 19"/>
-          <p:cNvSpPr/>
-          <p:nvPr/>
-        </p:nvSpPr>
-        <p:spPr>
-          <a:xfrm>
-            <a:off x="3172968" y="868680"/>
-            <a:ext cx="2834640" cy="502920"/>
-          </a:xfrm>
-          <a:prstGeom prst="rect">
-            <a:avLst/>
-          </a:prstGeom>
-          <a:noFill/>
-          <a:ln/>
-        </p:spPr>
-        <p:txBody>
-          <a:bodyPr wrap="square" lIns="0" tIns="0" rIns="0" bIns="0" rtlCol="0" anchor="ctr"/>
-          <a:lstStyle/>
-          <a:p>
-            <a:pPr marL="0" indent="0" algn="ctr">
-              <a:buNone/>
-            </a:pPr>
-            <a:r>
-              <a:rPr lang="en-US" sz="1200" b="1" dirty="0">
-                <a:solidFill>
-                  <a:srgbClr val="FFFFFF"/>
-                </a:solidFill>
-                <a:latin typeface="Ubuntu" panose="020B0504030602030204" pitchFamily="34" charset="0"/>
-                <a:ea typeface="Georgia" pitchFamily="34" charset="-122"/>
-                <a:cs typeface="Georgia" pitchFamily="34" charset="-120"/>
-              </a:rPr>
-              <a:t>⚠️ Difficulties Encountered</a:t>
-            </a:r>
-            <a:endParaRPr lang="en-US" sz="1200" dirty="0">
-              <a:latin typeface="Ubuntu" panose="020B0504030602030204" pitchFamily="34" charset="0"/>
-            </a:endParaRPr>
-          </a:p>
-        </p:txBody>
-      </p:sp>
-      <p:sp>
-        <p:nvSpPr>
-          <p:cNvPr id="22" name="Shape 20"/>
-          <p:cNvSpPr/>
-          <p:nvPr/>
-        </p:nvSpPr>
-        <p:spPr>
-          <a:xfrm>
-            <a:off x="3282696" y="1508760"/>
-            <a:ext cx="164592" cy="164592"/>
-          </a:xfrm>
-          <a:prstGeom prst="ellipse">
-            <a:avLst/>
-          </a:prstGeom>
-          <a:solidFill>
-            <a:srgbClr val="D4A017"/>
-          </a:solidFill>
-          <a:ln/>
-        </p:spPr>
-      </p:sp>
-      <p:sp>
-        <p:nvSpPr>
-          <p:cNvPr id="23" name="Text 21"/>
-          <p:cNvSpPr/>
-          <p:nvPr/>
-        </p:nvSpPr>
-        <p:spPr>
-          <a:xfrm>
-            <a:off x="3520440" y="1481328"/>
-            <a:ext cx="2377440" cy="411480"/>
-          </a:xfrm>
-          <a:prstGeom prst="rect">
-            <a:avLst/>
-          </a:prstGeom>
-          <a:noFill/>
-          <a:ln/>
-        </p:spPr>
-        <p:txBody>
-          <a:bodyPr wrap="square" lIns="0" tIns="0" rIns="0" bIns="0" rtlCol="0" anchor="ctr"/>
-          <a:lstStyle/>
-          <a:p>
-            <a:r>
-              <a:rPr lang="en-US" sz="1000" dirty="0">
+              <a:t>No undefined variables</a:t>
+            </a:r>
+            <a:endParaRPr lang="en-US" sz="1100" dirty="0">
+              <a:latin typeface="Ubuntu" panose="020B0504030602030204" pitchFamily="34" charset="0"/>
+            </a:endParaRPr>
+          </a:p>
+        </p:txBody>
+      </p:sp>
+      <p:sp>
+        <p:nvSpPr>
+          <p:cNvPr id="29" name="ZoneTexte 28">
+            <a:extLst>
+              <a:ext uri="{FF2B5EF4-FFF2-40B4-BE49-F238E27FC236}">
+                <a16:creationId xmlns:a16="http://schemas.microsoft.com/office/drawing/2014/main" id="{3E2CD871-DCF4-4C46-4A67-8925D84350C9}"/>
+              </a:ext>
+            </a:extLst>
+          </p:cNvPr>
+          <p:cNvSpPr txBox="1"/>
+          <p:nvPr/>
+        </p:nvSpPr>
+        <p:spPr>
+          <a:xfrm>
+            <a:off x="320040" y="1906174"/>
+            <a:ext cx="4023360" cy="600164"/>
+          </a:xfrm>
+          <a:prstGeom prst="rect">
+            <a:avLst/>
+          </a:prstGeom>
+          <a:noFill/>
+          <a:ln/>
+        </p:spPr>
+        <p:txBody>
+          <a:bodyPr wrap="square" lIns="0" tIns="0" rIns="0" bIns="0" rtlCol="0" anchor="ctr"/>
+          <a:lstStyle>
+            <a:lvl1pPr indent="0">
+              <a:buNone/>
+              <a:defRPr sz="1100">
+                <a:solidFill>
+                  <a:srgbClr val="5D4037"/>
+                </a:solidFill>
                 <a:latin typeface="Ubuntu" panose="020B0504030602030204" pitchFamily="34" charset="0"/>
                 <a:ea typeface="Calibri" pitchFamily="34" charset="-122"/>
                 <a:cs typeface="Calibri" pitchFamily="34" charset="-120"/>
-              </a:rPr>
-              <a:t>bcrypt version conflict with </a:t>
-            </a:r>
-            <a:r>
-              <a:rPr lang="en-US" sz="1000" dirty="0" err="1">
+              </a:defRPr>
+            </a:lvl1pPr>
+          </a:lstStyle>
+          <a:p>
+            <a:r>
+              <a:rPr lang="en-US" dirty="0" err="1"/>
+              <a:t>pytest</a:t>
+            </a:r>
+            <a:r>
+              <a:rPr lang="en-US" dirty="0"/>
+              <a:t> is a Python testing framework that automatically verifies that functions produce the correct output</a:t>
+            </a:r>
+          </a:p>
+          <a:p>
+            <a:endParaRPr lang="en-US" dirty="0"/>
+          </a:p>
+        </p:txBody>
+      </p:sp>
+      <p:sp>
+        <p:nvSpPr>
+          <p:cNvPr id="30" name="ZoneTexte 29">
+            <a:extLst>
+              <a:ext uri="{FF2B5EF4-FFF2-40B4-BE49-F238E27FC236}">
+                <a16:creationId xmlns:a16="http://schemas.microsoft.com/office/drawing/2014/main" id="{CA8C5362-D27F-8FF2-F3D6-7162B961E681}"/>
+              </a:ext>
+            </a:extLst>
+          </p:cNvPr>
+          <p:cNvSpPr txBox="1"/>
+          <p:nvPr/>
+        </p:nvSpPr>
+        <p:spPr>
+          <a:xfrm>
+            <a:off x="320040" y="914400"/>
+            <a:ext cx="8219049" cy="738664"/>
+          </a:xfrm>
+          <a:prstGeom prst="rect">
+            <a:avLst/>
+          </a:prstGeom>
+          <a:noFill/>
+          <a:ln/>
+        </p:spPr>
+        <p:txBody>
+          <a:bodyPr wrap="square" lIns="0" tIns="0" rIns="0" bIns="0" rtlCol="0" anchor="ctr"/>
+          <a:lstStyle>
+            <a:lvl1pPr indent="0">
+              <a:buNone/>
+              <a:defRPr sz="1100">
+                <a:solidFill>
+                  <a:srgbClr val="5D4037"/>
+                </a:solidFill>
                 <a:latin typeface="Ubuntu" panose="020B0504030602030204" pitchFamily="34" charset="0"/>
                 <a:ea typeface="Calibri" pitchFamily="34" charset="-122"/>
                 <a:cs typeface="Calibri" pitchFamily="34" charset="-120"/>
-              </a:rPr>
-              <a:t>passlib</a:t>
-            </a:r>
-            <a:r>
-              <a:rPr lang="en-US" sz="1000" dirty="0">
+              </a:defRPr>
+            </a:lvl1pPr>
+          </a:lstStyle>
+          <a:p>
+            <a:r>
+              <a:rPr lang="en-US" dirty="0"/>
+              <a:t>We used </a:t>
+            </a:r>
+            <a:r>
+              <a:rPr lang="en-US" dirty="0" err="1"/>
+              <a:t>pytest</a:t>
+            </a:r>
+            <a:r>
+              <a:rPr lang="en-US" dirty="0"/>
+              <a:t> to test the correctness of our AI functions, and flake8 to ensure our code follows Python best practices (PEP8)</a:t>
+            </a:r>
+          </a:p>
+          <a:p>
+            <a:endParaRPr lang="en-US" dirty="0"/>
+          </a:p>
+        </p:txBody>
+      </p:sp>
+      <p:sp>
+        <p:nvSpPr>
+          <p:cNvPr id="31" name="Text 11">
+            <a:extLst>
+              <a:ext uri="{FF2B5EF4-FFF2-40B4-BE49-F238E27FC236}">
+                <a16:creationId xmlns:a16="http://schemas.microsoft.com/office/drawing/2014/main" id="{241990FB-8F8A-05BB-A3F0-C023645F9D9B}"/>
+              </a:ext>
+            </a:extLst>
+          </p:cNvPr>
+          <p:cNvSpPr/>
+          <p:nvPr/>
+        </p:nvSpPr>
+        <p:spPr>
+          <a:xfrm>
+            <a:off x="4846320" y="1927691"/>
+            <a:ext cx="3931920" cy="228600"/>
+          </a:xfrm>
+          <a:prstGeom prst="rect">
+            <a:avLst/>
+          </a:prstGeom>
+          <a:noFill/>
+          <a:ln/>
+        </p:spPr>
+        <p:txBody>
+          <a:bodyPr wrap="square" lIns="0" tIns="0" rIns="0" bIns="0" rtlCol="0" anchor="ctr"/>
+          <a:lstStyle/>
+          <a:p>
+            <a:r>
+              <a:rPr lang="en-US" sz="1100" dirty="0">
+                <a:solidFill>
+                  <a:srgbClr val="5D4037"/>
+                </a:solidFill>
                 <a:latin typeface="Ubuntu" panose="020B0504030602030204" pitchFamily="34" charset="0"/>
                 <a:ea typeface="Calibri" pitchFamily="34" charset="-122"/>
                 <a:cs typeface="Calibri" pitchFamily="34" charset="-120"/>
               </a:rPr>
-              <a:t> library</a:t>
-            </a:r>
-          </a:p>
-        </p:txBody>
-      </p:sp>
-      <p:sp>
-        <p:nvSpPr>
-          <p:cNvPr id="24" name="Shape 22"/>
-          <p:cNvSpPr/>
-          <p:nvPr/>
-        </p:nvSpPr>
-        <p:spPr>
-          <a:xfrm>
-            <a:off x="3282696" y="2167128"/>
-            <a:ext cx="164592" cy="164592"/>
-          </a:xfrm>
-          <a:prstGeom prst="ellipse">
-            <a:avLst/>
-          </a:prstGeom>
-          <a:solidFill>
-            <a:srgbClr val="D4A017"/>
-          </a:solidFill>
-          <a:ln/>
-        </p:spPr>
-      </p:sp>
-      <p:sp>
-        <p:nvSpPr>
-          <p:cNvPr id="25" name="Text 23"/>
-          <p:cNvSpPr/>
-          <p:nvPr/>
-        </p:nvSpPr>
-        <p:spPr>
-          <a:xfrm>
-            <a:off x="3520440" y="2139696"/>
-            <a:ext cx="2377440" cy="411480"/>
-          </a:xfrm>
-          <a:prstGeom prst="rect">
-            <a:avLst/>
-          </a:prstGeom>
-          <a:noFill/>
-          <a:ln/>
-        </p:spPr>
-        <p:txBody>
-          <a:bodyPr wrap="square" lIns="0" tIns="0" rIns="0" bIns="0" rtlCol="0" anchor="ctr"/>
-          <a:lstStyle/>
-          <a:p>
-            <a:r>
-              <a:rPr lang="en-US" sz="1000" dirty="0">
+              <a:t>flake8 is a code quality checker that enforces Python coding standards (PEP8) — detects unused imports, missing spaces, and long lines</a:t>
+            </a:r>
+          </a:p>
+        </p:txBody>
+      </p:sp>
+      <p:sp>
+        <p:nvSpPr>
+          <p:cNvPr id="32" name="Text 15">
+            <a:extLst>
+              <a:ext uri="{FF2B5EF4-FFF2-40B4-BE49-F238E27FC236}">
+                <a16:creationId xmlns:a16="http://schemas.microsoft.com/office/drawing/2014/main" id="{7259DFD5-D176-73F0-6F75-15241C7FEC6F}"/>
+              </a:ext>
+            </a:extLst>
+          </p:cNvPr>
+          <p:cNvSpPr/>
+          <p:nvPr/>
+        </p:nvSpPr>
+        <p:spPr>
+          <a:xfrm>
+            <a:off x="4846320" y="4135551"/>
+            <a:ext cx="3931920" cy="228600"/>
+          </a:xfrm>
+          <a:prstGeom prst="rect">
+            <a:avLst/>
+          </a:prstGeom>
+          <a:noFill/>
+          <a:ln/>
+        </p:spPr>
+        <p:txBody>
+          <a:bodyPr wrap="square" lIns="0" tIns="0" rIns="0" bIns="0" rtlCol="0" anchor="ctr"/>
+          <a:lstStyle/>
+          <a:p>
+            <a:r>
+              <a:rPr lang="en-US" sz="1600" b="1" dirty="0">
+                <a:solidFill>
+                  <a:srgbClr val="00B050"/>
+                </a:solidFill>
                 <a:latin typeface="Ubuntu" panose="020B0504030602030204" pitchFamily="34" charset="0"/>
                 <a:ea typeface="Calibri" pitchFamily="34" charset="-122"/>
                 <a:cs typeface="Calibri" pitchFamily="34" charset="-120"/>
               </a:rPr>
-              <a:t>CSV encoding issues with Arabic text (BOM, UTF-8-sig)</a:t>
-            </a:r>
-          </a:p>
-        </p:txBody>
-      </p:sp>
-      <p:sp>
-        <p:nvSpPr>
-          <p:cNvPr id="26" name="Shape 24"/>
-          <p:cNvSpPr/>
-          <p:nvPr/>
-        </p:nvSpPr>
-        <p:spPr>
-          <a:xfrm>
-            <a:off x="3282696" y="2825496"/>
-            <a:ext cx="164592" cy="164592"/>
-          </a:xfrm>
-          <a:prstGeom prst="ellipse">
-            <a:avLst/>
-          </a:prstGeom>
-          <a:solidFill>
-            <a:srgbClr val="D4A017"/>
-          </a:solidFill>
-          <a:ln/>
-        </p:spPr>
-      </p:sp>
-      <p:sp>
-        <p:nvSpPr>
-          <p:cNvPr id="27" name="Text 25"/>
-          <p:cNvSpPr/>
-          <p:nvPr/>
-        </p:nvSpPr>
-        <p:spPr>
-          <a:xfrm>
-            <a:off x="3520440" y="2798064"/>
-            <a:ext cx="2377440" cy="411480"/>
-          </a:xfrm>
-          <a:prstGeom prst="rect">
-            <a:avLst/>
-          </a:prstGeom>
-          <a:noFill/>
-          <a:ln/>
-        </p:spPr>
-        <p:txBody>
-          <a:bodyPr wrap="square" lIns="0" tIns="0" rIns="0" bIns="0" rtlCol="0" anchor="ctr"/>
-          <a:lstStyle/>
-          <a:p>
-            <a:r>
-              <a:rPr lang="en-US" sz="1000" dirty="0">
+              <a:t>pip install autopep8</a:t>
+            </a:r>
+          </a:p>
+          <a:p>
+            <a:r>
+              <a:rPr lang="en-US" sz="1600" b="1" dirty="0">
+                <a:solidFill>
+                  <a:srgbClr val="00B050"/>
+                </a:solidFill>
                 <a:latin typeface="Ubuntu" panose="020B0504030602030204" pitchFamily="34" charset="0"/>
                 <a:ea typeface="Calibri" pitchFamily="34" charset="-122"/>
                 <a:cs typeface="Calibri" pitchFamily="34" charset="-120"/>
               </a:rPr>
-              <a:t>MySQL foreign key constraints during data deletion</a:t>
-            </a:r>
-          </a:p>
-        </p:txBody>
-      </p:sp>
-      <p:sp>
-        <p:nvSpPr>
-          <p:cNvPr id="28" name="Shape 26"/>
-          <p:cNvSpPr/>
-          <p:nvPr/>
-        </p:nvSpPr>
-        <p:spPr>
-          <a:xfrm>
-            <a:off x="3282696" y="3483864"/>
-            <a:ext cx="164592" cy="164592"/>
-          </a:xfrm>
-          <a:prstGeom prst="ellipse">
-            <a:avLst/>
-          </a:prstGeom>
-          <a:solidFill>
-            <a:srgbClr val="D4A017"/>
-          </a:solidFill>
-          <a:ln/>
-        </p:spPr>
-      </p:sp>
-      <p:sp>
-        <p:nvSpPr>
-          <p:cNvPr id="29" name="Text 27"/>
-          <p:cNvSpPr/>
-          <p:nvPr/>
-        </p:nvSpPr>
-        <p:spPr>
-          <a:xfrm>
-            <a:off x="3520440" y="3456432"/>
-            <a:ext cx="2377440" cy="411480"/>
-          </a:xfrm>
-          <a:prstGeom prst="rect">
-            <a:avLst/>
-          </a:prstGeom>
-          <a:noFill/>
-          <a:ln/>
-        </p:spPr>
-        <p:txBody>
-          <a:bodyPr wrap="square" lIns="0" tIns="0" rIns="0" bIns="0" rtlCol="0" anchor="ctr"/>
-          <a:lstStyle/>
-          <a:p>
-            <a:r>
-              <a:rPr lang="en-US" sz="1000" dirty="0">
-                <a:latin typeface="Ubuntu" panose="020B0504030602030204" pitchFamily="34" charset="0"/>
-                <a:ea typeface="Calibri" pitchFamily="34" charset="-122"/>
-                <a:cs typeface="Calibri" pitchFamily="34" charset="-120"/>
-              </a:rPr>
-              <a:t>CORS configuration between FastAPI and Vue.js</a:t>
-            </a:r>
-          </a:p>
-        </p:txBody>
-      </p:sp>
-      <p:sp>
-        <p:nvSpPr>
-          <p:cNvPr id="30" name="Shape 28"/>
-          <p:cNvSpPr/>
-          <p:nvPr/>
-        </p:nvSpPr>
-        <p:spPr>
-          <a:xfrm>
-            <a:off x="3282696" y="4142232"/>
-            <a:ext cx="164592" cy="164592"/>
-          </a:xfrm>
-          <a:prstGeom prst="ellipse">
-            <a:avLst/>
-          </a:prstGeom>
-          <a:solidFill>
-            <a:srgbClr val="D4A017"/>
-          </a:solidFill>
-          <a:ln/>
-        </p:spPr>
-      </p:sp>
-      <p:sp>
-        <p:nvSpPr>
-          <p:cNvPr id="31" name="Text 29"/>
-          <p:cNvSpPr/>
-          <p:nvPr/>
-        </p:nvSpPr>
-        <p:spPr>
-          <a:xfrm>
-            <a:off x="3520440" y="4114800"/>
-            <a:ext cx="2377440" cy="411480"/>
-          </a:xfrm>
-          <a:prstGeom prst="rect">
-            <a:avLst/>
-          </a:prstGeom>
-          <a:noFill/>
-          <a:ln/>
-        </p:spPr>
-        <p:txBody>
-          <a:bodyPr wrap="square" lIns="0" tIns="0" rIns="0" bIns="0" rtlCol="0" anchor="ctr"/>
-          <a:lstStyle/>
-          <a:p>
-            <a:r>
-              <a:rPr lang="en-US" sz="1000" dirty="0">
-                <a:latin typeface="Ubuntu" panose="020B0504030602030204" pitchFamily="34" charset="0"/>
-                <a:ea typeface="Calibri" pitchFamily="34" charset="-122"/>
-                <a:cs typeface="Calibri" pitchFamily="34" charset="-120"/>
-              </a:rPr>
-              <a:t>Arabic text normalization for AI matching accuracy</a:t>
-            </a:r>
-          </a:p>
-        </p:txBody>
-      </p:sp>
-      <p:sp>
-        <p:nvSpPr>
-          <p:cNvPr id="32" name="Shape 30"/>
-          <p:cNvSpPr/>
-          <p:nvPr/>
-        </p:nvSpPr>
-        <p:spPr>
-          <a:xfrm>
-            <a:off x="6163056" y="868680"/>
-            <a:ext cx="2834640" cy="4160520"/>
-          </a:xfrm>
-          <a:prstGeom prst="rect">
-            <a:avLst/>
-          </a:prstGeom>
-          <a:solidFill>
-            <a:srgbClr val="FFFFFF">
-              <a:alpha val="7000"/>
-            </a:srgbClr>
-          </a:solidFill>
-          <a:ln w="19050">
-            <a:solidFill>
-              <a:srgbClr val="1A6B3C"/>
-            </a:solidFill>
-            <a:prstDash val="solid"/>
-          </a:ln>
-        </p:spPr>
-      </p:sp>
-      <p:sp>
-        <p:nvSpPr>
-          <p:cNvPr id="33" name="Shape 31"/>
-          <p:cNvSpPr/>
-          <p:nvPr/>
-        </p:nvSpPr>
-        <p:spPr>
-          <a:xfrm>
-            <a:off x="6163056" y="868680"/>
-            <a:ext cx="2834640" cy="502920"/>
-          </a:xfrm>
-          <a:prstGeom prst="rect">
-            <a:avLst/>
-          </a:prstGeom>
-          <a:solidFill>
-            <a:srgbClr val="1A6B3C"/>
-          </a:solidFill>
-          <a:ln/>
-        </p:spPr>
-      </p:sp>
-      <p:sp>
-        <p:nvSpPr>
-          <p:cNvPr id="34" name="Text 32"/>
-          <p:cNvSpPr/>
-          <p:nvPr/>
-        </p:nvSpPr>
-        <p:spPr>
-          <a:xfrm>
-            <a:off x="6163056" y="868680"/>
-            <a:ext cx="2834640" cy="502920"/>
-          </a:xfrm>
-          <a:prstGeom prst="rect">
-            <a:avLst/>
-          </a:prstGeom>
-          <a:noFill/>
-          <a:ln/>
-        </p:spPr>
-        <p:txBody>
-          <a:bodyPr wrap="square" lIns="0" tIns="0" rIns="0" bIns="0" rtlCol="0" anchor="ctr"/>
-          <a:lstStyle/>
-          <a:p>
-            <a:pPr marL="0" indent="0" algn="ctr">
-              <a:buNone/>
-            </a:pPr>
-            <a:r>
-              <a:rPr lang="en-US" sz="1200" b="1" dirty="0">
-                <a:solidFill>
-                  <a:srgbClr val="FFFFFF"/>
-                </a:solidFill>
-                <a:latin typeface="Ubuntu" panose="020B0504030602030204" pitchFamily="34" charset="0"/>
-                <a:ea typeface="Georgia" pitchFamily="34" charset="-122"/>
-                <a:cs typeface="Georgia" pitchFamily="34" charset="-120"/>
-              </a:rPr>
-              <a:t>🚀 Areas for Improvement</a:t>
-            </a:r>
-            <a:endParaRPr lang="en-US" sz="1200" dirty="0">
-              <a:latin typeface="Ubuntu" panose="020B0504030602030204" pitchFamily="34" charset="0"/>
-            </a:endParaRPr>
-          </a:p>
-        </p:txBody>
-      </p:sp>
-      <p:sp>
-        <p:nvSpPr>
-          <p:cNvPr id="35" name="Shape 33"/>
-          <p:cNvSpPr/>
-          <p:nvPr/>
-        </p:nvSpPr>
-        <p:spPr>
-          <a:xfrm>
-            <a:off x="6272784" y="1508760"/>
-            <a:ext cx="164592" cy="164592"/>
-          </a:xfrm>
-          <a:prstGeom prst="ellipse">
-            <a:avLst/>
-          </a:prstGeom>
-          <a:solidFill>
-            <a:srgbClr val="1A6B3C"/>
-          </a:solidFill>
-          <a:ln/>
-        </p:spPr>
-      </p:sp>
-      <p:sp>
-        <p:nvSpPr>
-          <p:cNvPr id="36" name="Text 34"/>
-          <p:cNvSpPr/>
-          <p:nvPr/>
-        </p:nvSpPr>
-        <p:spPr>
-          <a:xfrm>
-            <a:off x="6510528" y="1481328"/>
-            <a:ext cx="2377440" cy="411480"/>
-          </a:xfrm>
-          <a:prstGeom prst="rect">
-            <a:avLst/>
-          </a:prstGeom>
-          <a:noFill/>
-          <a:ln/>
-        </p:spPr>
-        <p:txBody>
-          <a:bodyPr wrap="square" lIns="0" tIns="0" rIns="0" bIns="0" rtlCol="0" anchor="ctr"/>
-          <a:lstStyle/>
-          <a:p>
-            <a:r>
-              <a:rPr lang="en-US" sz="1000" dirty="0">
-                <a:latin typeface="Ubuntu" panose="020B0504030602030204" pitchFamily="34" charset="0"/>
-                <a:ea typeface="Calibri" pitchFamily="34" charset="-122"/>
-                <a:cs typeface="Calibri" pitchFamily="34" charset="-120"/>
-              </a:rPr>
-              <a:t>Add Flutter mobile application for iOS/Android</a:t>
-            </a:r>
-          </a:p>
-        </p:txBody>
-      </p:sp>
-      <p:sp>
-        <p:nvSpPr>
-          <p:cNvPr id="37" name="Shape 35"/>
-          <p:cNvSpPr/>
-          <p:nvPr/>
-        </p:nvSpPr>
-        <p:spPr>
-          <a:xfrm>
-            <a:off x="6272784" y="2167128"/>
-            <a:ext cx="164592" cy="164592"/>
-          </a:xfrm>
-          <a:prstGeom prst="ellipse">
-            <a:avLst/>
-          </a:prstGeom>
-          <a:solidFill>
-            <a:srgbClr val="1A6B3C"/>
-          </a:solidFill>
-          <a:ln/>
-        </p:spPr>
-      </p:sp>
-      <p:sp>
-        <p:nvSpPr>
-          <p:cNvPr id="38" name="Text 36"/>
-          <p:cNvSpPr/>
-          <p:nvPr/>
-        </p:nvSpPr>
-        <p:spPr>
-          <a:xfrm>
-            <a:off x="6510528" y="2139696"/>
-            <a:ext cx="2377440" cy="411480"/>
-          </a:xfrm>
-          <a:prstGeom prst="rect">
-            <a:avLst/>
-          </a:prstGeom>
-          <a:noFill/>
-          <a:ln/>
-        </p:spPr>
-        <p:txBody>
-          <a:bodyPr wrap="square" lIns="0" tIns="0" rIns="0" bIns="0" rtlCol="0" anchor="ctr"/>
-          <a:lstStyle/>
-          <a:p>
-            <a:r>
-              <a:rPr lang="en-US" sz="1000" dirty="0">
-                <a:latin typeface="Ubuntu" panose="020B0504030602030204" pitchFamily="34" charset="0"/>
-                <a:ea typeface="Calibri" pitchFamily="34" charset="-122"/>
-                <a:cs typeface="Calibri" pitchFamily="34" charset="-120"/>
-              </a:rPr>
-              <a:t>Integrate GPT API for recipe explanation in Arabic</a:t>
-            </a:r>
-          </a:p>
-        </p:txBody>
-      </p:sp>
-      <p:sp>
-        <p:nvSpPr>
-          <p:cNvPr id="39" name="Shape 37"/>
-          <p:cNvSpPr/>
-          <p:nvPr/>
-        </p:nvSpPr>
-        <p:spPr>
-          <a:xfrm>
-            <a:off x="6272784" y="2825496"/>
-            <a:ext cx="164592" cy="164592"/>
-          </a:xfrm>
-          <a:prstGeom prst="ellipse">
-            <a:avLst/>
-          </a:prstGeom>
-          <a:solidFill>
-            <a:srgbClr val="1A6B3C"/>
-          </a:solidFill>
-          <a:ln/>
-        </p:spPr>
-      </p:sp>
-      <p:sp>
-        <p:nvSpPr>
-          <p:cNvPr id="40" name="Text 38"/>
-          <p:cNvSpPr/>
-          <p:nvPr/>
-        </p:nvSpPr>
-        <p:spPr>
-          <a:xfrm>
-            <a:off x="6510528" y="2798064"/>
-            <a:ext cx="2377440" cy="411480"/>
-          </a:xfrm>
-          <a:prstGeom prst="rect">
-            <a:avLst/>
-          </a:prstGeom>
-          <a:noFill/>
-          <a:ln/>
-        </p:spPr>
-        <p:txBody>
-          <a:bodyPr wrap="square" lIns="0" tIns="0" rIns="0" bIns="0" rtlCol="0" anchor="ctr"/>
-          <a:lstStyle/>
-          <a:p>
-            <a:r>
-              <a:rPr lang="en-US" sz="1000" dirty="0">
-                <a:latin typeface="Ubuntu" panose="020B0504030602030204" pitchFamily="34" charset="0"/>
-                <a:ea typeface="Calibri" pitchFamily="34" charset="-122"/>
-                <a:cs typeface="Calibri" pitchFamily="34" charset="-120"/>
-              </a:rPr>
-              <a:t>Calculate nutritional values and calories per recipe</a:t>
-            </a:r>
-          </a:p>
-        </p:txBody>
-      </p:sp>
-      <p:sp>
-        <p:nvSpPr>
-          <p:cNvPr id="41" name="Shape 39"/>
-          <p:cNvSpPr/>
-          <p:nvPr/>
-        </p:nvSpPr>
-        <p:spPr>
-          <a:xfrm>
-            <a:off x="6272784" y="3483864"/>
-            <a:ext cx="164592" cy="164592"/>
-          </a:xfrm>
-          <a:prstGeom prst="ellipse">
-            <a:avLst/>
-          </a:prstGeom>
-          <a:solidFill>
-            <a:srgbClr val="1A6B3C"/>
-          </a:solidFill>
-          <a:ln/>
-        </p:spPr>
-      </p:sp>
-      <p:sp>
-        <p:nvSpPr>
-          <p:cNvPr id="42" name="Text 40"/>
-          <p:cNvSpPr/>
-          <p:nvPr/>
-        </p:nvSpPr>
-        <p:spPr>
-          <a:xfrm>
-            <a:off x="6510528" y="3456432"/>
-            <a:ext cx="2377440" cy="411480"/>
-          </a:xfrm>
-          <a:prstGeom prst="rect">
-            <a:avLst/>
-          </a:prstGeom>
-          <a:noFill/>
-          <a:ln/>
-        </p:spPr>
-        <p:txBody>
-          <a:bodyPr wrap="square" lIns="0" tIns="0" rIns="0" bIns="0" rtlCol="0" anchor="ctr"/>
-          <a:lstStyle/>
-          <a:p>
-            <a:r>
-              <a:rPr lang="en-US" sz="1000" dirty="0">
-                <a:latin typeface="Ubuntu" panose="020B0504030602030204" pitchFamily="34" charset="0"/>
-                <a:ea typeface="Calibri" pitchFamily="34" charset="-122"/>
-                <a:cs typeface="Calibri" pitchFamily="34" charset="-120"/>
-              </a:rPr>
-              <a:t>Add voice search in Arabic using Speech Recognition</a:t>
-            </a:r>
-          </a:p>
-        </p:txBody>
-      </p:sp>
-      <p:sp>
-        <p:nvSpPr>
-          <p:cNvPr id="43" name="Shape 41"/>
-          <p:cNvSpPr/>
-          <p:nvPr/>
-        </p:nvSpPr>
-        <p:spPr>
-          <a:xfrm>
-            <a:off x="6272784" y="4142232"/>
-            <a:ext cx="164592" cy="164592"/>
-          </a:xfrm>
-          <a:prstGeom prst="ellipse">
-            <a:avLst/>
-          </a:prstGeom>
-          <a:solidFill>
-            <a:srgbClr val="1A6B3C"/>
-          </a:solidFill>
-          <a:ln/>
-        </p:spPr>
-      </p:sp>
-      <p:sp>
-        <p:nvSpPr>
-          <p:cNvPr id="44" name="Text 42"/>
-          <p:cNvSpPr/>
-          <p:nvPr/>
-        </p:nvSpPr>
-        <p:spPr>
-          <a:xfrm>
-            <a:off x="6510528" y="4114800"/>
-            <a:ext cx="2377440" cy="411480"/>
-          </a:xfrm>
-          <a:prstGeom prst="rect">
-            <a:avLst/>
-          </a:prstGeom>
-          <a:noFill/>
-          <a:ln/>
-        </p:spPr>
-        <p:txBody>
-          <a:bodyPr wrap="square" lIns="0" tIns="0" rIns="0" bIns="0" rtlCol="0" anchor="ctr"/>
-          <a:lstStyle/>
-          <a:p>
-            <a:r>
-              <a:rPr lang="en-US" sz="1000" dirty="0">
-                <a:latin typeface="Ubuntu" panose="020B0504030602030204" pitchFamily="34" charset="0"/>
-                <a:ea typeface="Calibri" pitchFamily="34" charset="-122"/>
-                <a:cs typeface="Calibri" pitchFamily="34" charset="-120"/>
-              </a:rPr>
-              <a:t>Build community features for users to share recipes</a:t>
-            </a:r>
+              <a:t>autopep8 --in-place --recursive app/</a:t>
+            </a:r>
+            <a:endParaRPr lang="en-US" sz="1600" b="1" dirty="0">
+              <a:solidFill>
+                <a:srgbClr val="00B050"/>
+              </a:solidFill>
+              <a:latin typeface="Ubuntu" panose="020B0504030602030204" pitchFamily="34" charset="0"/>
+            </a:endParaRPr>
           </a:p>
         </p:txBody>
       </p:sp>
@@ -5550,6 +5509,1178 @@
 </file>
 
 <file path=ppt/slides/slide15.xml><?xml version="1.0" encoding="utf-8"?>
+<p:sld xmlns:a="http://schemas.openxmlformats.org/drawingml/2006/main" xmlns:r="http://schemas.openxmlformats.org/officeDocument/2006/relationships" xmlns:p="http://schemas.openxmlformats.org/presentationml/2006/main">
+  <p:cSld>
+    <p:spTree>
+      <p:nvGrpSpPr>
+        <p:cNvPr id="1" name=""/>
+        <p:cNvGrpSpPr/>
+        <p:nvPr/>
+      </p:nvGrpSpPr>
+      <p:grpSpPr>
+        <a:xfrm>
+          <a:off x="0" y="0"/>
+          <a:ext cx="0" cy="0"/>
+          <a:chOff x="0" y="0"/>
+          <a:chExt cx="0" cy="0"/>
+        </a:xfrm>
+      </p:grpSpPr>
+      <p:sp>
+        <p:nvSpPr>
+          <p:cNvPr id="2" name="Shape 0"/>
+          <p:cNvSpPr/>
+          <p:nvPr/>
+        </p:nvSpPr>
+        <p:spPr>
+          <a:xfrm>
+            <a:off x="0" y="0"/>
+            <a:ext cx="9144000" cy="777240"/>
+          </a:xfrm>
+          <a:prstGeom prst="rect">
+            <a:avLst/>
+          </a:prstGeom>
+          <a:solidFill>
+            <a:srgbClr val="C0392B"/>
+          </a:solidFill>
+          <a:ln/>
+        </p:spPr>
+      </p:sp>
+      <p:sp>
+        <p:nvSpPr>
+          <p:cNvPr id="3" name="Shape 1"/>
+          <p:cNvSpPr/>
+          <p:nvPr/>
+        </p:nvSpPr>
+        <p:spPr>
+          <a:xfrm>
+            <a:off x="0" y="0"/>
+            <a:ext cx="457200" cy="777240"/>
+          </a:xfrm>
+          <a:prstGeom prst="rect">
+            <a:avLst/>
+          </a:prstGeom>
+          <a:solidFill>
+            <a:srgbClr val="C0392B"/>
+          </a:solidFill>
+          <a:ln/>
+        </p:spPr>
+      </p:sp>
+      <p:sp>
+        <p:nvSpPr>
+          <p:cNvPr id="4" name="Text 2"/>
+          <p:cNvSpPr/>
+          <p:nvPr/>
+        </p:nvSpPr>
+        <p:spPr>
+          <a:xfrm>
+            <a:off x="548640" y="0"/>
+            <a:ext cx="7315200" cy="777240"/>
+          </a:xfrm>
+          <a:prstGeom prst="rect">
+            <a:avLst/>
+          </a:prstGeom>
+          <a:noFill/>
+          <a:ln/>
+        </p:spPr>
+        <p:txBody>
+          <a:bodyPr wrap="square" lIns="0" tIns="0" rIns="0" bIns="0" rtlCol="0" anchor="ctr"/>
+          <a:lstStyle/>
+          <a:p>
+            <a:pPr marL="0" indent="0" algn="l">
+              <a:buNone/>
+            </a:pPr>
+            <a:r>
+              <a:rPr lang="en-US" sz="2200" b="1" dirty="0">
+                <a:solidFill>
+                  <a:srgbClr val="FFFFFF"/>
+                </a:solidFill>
+                <a:latin typeface="Ubuntu" panose="020B0504030602030204" pitchFamily="34" charset="0"/>
+                <a:ea typeface="Georgia" pitchFamily="34" charset="-122"/>
+                <a:cs typeface="Georgia" pitchFamily="34" charset="-120"/>
+              </a:rPr>
+              <a:t>Part 6 : Conclusion</a:t>
+            </a:r>
+            <a:endParaRPr lang="en-US" sz="2200" dirty="0">
+              <a:latin typeface="Ubuntu" panose="020B0504030602030204" pitchFamily="34" charset="0"/>
+            </a:endParaRPr>
+          </a:p>
+        </p:txBody>
+      </p:sp>
+      <p:sp>
+        <p:nvSpPr>
+          <p:cNvPr id="6" name="Shape 4"/>
+          <p:cNvSpPr/>
+          <p:nvPr/>
+        </p:nvSpPr>
+        <p:spPr>
+          <a:xfrm>
+            <a:off x="182880" y="868680"/>
+            <a:ext cx="2834640" cy="4160520"/>
+          </a:xfrm>
+          <a:prstGeom prst="rect">
+            <a:avLst/>
+          </a:prstGeom>
+          <a:solidFill>
+            <a:srgbClr val="FFFFFF">
+              <a:alpha val="7000"/>
+            </a:srgbClr>
+          </a:solidFill>
+          <a:ln w="19050">
+            <a:solidFill>
+              <a:srgbClr val="C0392B"/>
+            </a:solidFill>
+            <a:prstDash val="solid"/>
+          </a:ln>
+        </p:spPr>
+      </p:sp>
+      <p:sp>
+        <p:nvSpPr>
+          <p:cNvPr id="7" name="Shape 5"/>
+          <p:cNvSpPr/>
+          <p:nvPr/>
+        </p:nvSpPr>
+        <p:spPr>
+          <a:xfrm>
+            <a:off x="182880" y="868680"/>
+            <a:ext cx="2834640" cy="502920"/>
+          </a:xfrm>
+          <a:prstGeom prst="rect">
+            <a:avLst/>
+          </a:prstGeom>
+          <a:solidFill>
+            <a:srgbClr val="C0392B"/>
+          </a:solidFill>
+          <a:ln/>
+        </p:spPr>
+      </p:sp>
+      <p:sp>
+        <p:nvSpPr>
+          <p:cNvPr id="8" name="Text 6"/>
+          <p:cNvSpPr/>
+          <p:nvPr/>
+        </p:nvSpPr>
+        <p:spPr>
+          <a:xfrm>
+            <a:off x="182880" y="868680"/>
+            <a:ext cx="2834640" cy="502920"/>
+          </a:xfrm>
+          <a:prstGeom prst="rect">
+            <a:avLst/>
+          </a:prstGeom>
+          <a:noFill/>
+          <a:ln/>
+        </p:spPr>
+        <p:txBody>
+          <a:bodyPr wrap="square" lIns="0" tIns="0" rIns="0" bIns="0" rtlCol="0" anchor="ctr"/>
+          <a:lstStyle/>
+          <a:p>
+            <a:pPr marL="0" indent="0" algn="ctr">
+              <a:buNone/>
+            </a:pPr>
+            <a:r>
+              <a:rPr lang="en-US" sz="1200" b="1" dirty="0">
+                <a:solidFill>
+                  <a:srgbClr val="FFFFFF"/>
+                </a:solidFill>
+                <a:latin typeface="Ubuntu" panose="020B0504030602030204" pitchFamily="34" charset="0"/>
+                <a:ea typeface="Georgia" pitchFamily="34" charset="-122"/>
+                <a:cs typeface="Georgia" pitchFamily="34" charset="-120"/>
+              </a:rPr>
+              <a:t>📋 Summary of Work</a:t>
+            </a:r>
+            <a:endParaRPr lang="en-US" sz="1200" dirty="0">
+              <a:latin typeface="Ubuntu" panose="020B0504030602030204" pitchFamily="34" charset="0"/>
+            </a:endParaRPr>
+          </a:p>
+        </p:txBody>
+      </p:sp>
+      <p:sp>
+        <p:nvSpPr>
+          <p:cNvPr id="9" name="Shape 7"/>
+          <p:cNvSpPr/>
+          <p:nvPr/>
+        </p:nvSpPr>
+        <p:spPr>
+          <a:xfrm>
+            <a:off x="292608" y="1508760"/>
+            <a:ext cx="164592" cy="164592"/>
+          </a:xfrm>
+          <a:prstGeom prst="ellipse">
+            <a:avLst/>
+          </a:prstGeom>
+          <a:solidFill>
+            <a:srgbClr val="C0392B"/>
+          </a:solidFill>
+          <a:ln/>
+        </p:spPr>
+      </p:sp>
+      <p:sp>
+        <p:nvSpPr>
+          <p:cNvPr id="10" name="Text 8"/>
+          <p:cNvSpPr/>
+          <p:nvPr/>
+        </p:nvSpPr>
+        <p:spPr>
+          <a:xfrm>
+            <a:off x="530352" y="1481328"/>
+            <a:ext cx="2377440" cy="411480"/>
+          </a:xfrm>
+          <a:prstGeom prst="rect">
+            <a:avLst/>
+          </a:prstGeom>
+          <a:noFill/>
+          <a:ln/>
+        </p:spPr>
+        <p:txBody>
+          <a:bodyPr wrap="square" lIns="0" tIns="0" rIns="0" bIns="0" rtlCol="0" anchor="ctr"/>
+          <a:lstStyle/>
+          <a:p>
+            <a:pPr marL="0" indent="0">
+              <a:buNone/>
+            </a:pPr>
+            <a:r>
+              <a:rPr lang="en-US" sz="1000" dirty="0">
+                <a:latin typeface="Ubuntu" panose="020B0504030602030204" pitchFamily="34" charset="0"/>
+                <a:ea typeface="Calibri" pitchFamily="34" charset="-122"/>
+                <a:cs typeface="Calibri" pitchFamily="34" charset="-120"/>
+              </a:rPr>
+              <a:t>Built a full-stack web app for Algerian recipe recommendations</a:t>
+            </a:r>
+            <a:endParaRPr lang="en-US" sz="1000" dirty="0">
+              <a:latin typeface="Ubuntu" panose="020B0504030602030204" pitchFamily="34" charset="0"/>
+            </a:endParaRPr>
+          </a:p>
+        </p:txBody>
+      </p:sp>
+      <p:sp>
+        <p:nvSpPr>
+          <p:cNvPr id="11" name="Shape 9"/>
+          <p:cNvSpPr/>
+          <p:nvPr/>
+        </p:nvSpPr>
+        <p:spPr>
+          <a:xfrm>
+            <a:off x="292608" y="2167128"/>
+            <a:ext cx="164592" cy="164592"/>
+          </a:xfrm>
+          <a:prstGeom prst="ellipse">
+            <a:avLst/>
+          </a:prstGeom>
+          <a:solidFill>
+            <a:srgbClr val="C0392B"/>
+          </a:solidFill>
+          <a:ln/>
+        </p:spPr>
+      </p:sp>
+      <p:sp>
+        <p:nvSpPr>
+          <p:cNvPr id="12" name="Text 10"/>
+          <p:cNvSpPr/>
+          <p:nvPr/>
+        </p:nvSpPr>
+        <p:spPr>
+          <a:xfrm>
+            <a:off x="530352" y="2139696"/>
+            <a:ext cx="2377440" cy="411480"/>
+          </a:xfrm>
+          <a:prstGeom prst="rect">
+            <a:avLst/>
+          </a:prstGeom>
+          <a:noFill/>
+          <a:ln/>
+        </p:spPr>
+        <p:txBody>
+          <a:bodyPr wrap="square" lIns="0" tIns="0" rIns="0" bIns="0" rtlCol="0" anchor="ctr"/>
+          <a:lstStyle/>
+          <a:p>
+            <a:r>
+              <a:rPr lang="en-US" sz="1000" dirty="0">
+                <a:latin typeface="Ubuntu" panose="020B0504030602030204" pitchFamily="34" charset="0"/>
+                <a:ea typeface="Calibri" pitchFamily="34" charset="-122"/>
+                <a:cs typeface="Calibri" pitchFamily="34" charset="-120"/>
+              </a:rPr>
+              <a:t>Implemented 3-level AI engine: Simple Match + TF-IDF + Transformers</a:t>
+            </a:r>
+          </a:p>
+        </p:txBody>
+      </p:sp>
+      <p:sp>
+        <p:nvSpPr>
+          <p:cNvPr id="13" name="Shape 11"/>
+          <p:cNvSpPr/>
+          <p:nvPr/>
+        </p:nvSpPr>
+        <p:spPr>
+          <a:xfrm>
+            <a:off x="292608" y="2825496"/>
+            <a:ext cx="164592" cy="164592"/>
+          </a:xfrm>
+          <a:prstGeom prst="ellipse">
+            <a:avLst/>
+          </a:prstGeom>
+          <a:solidFill>
+            <a:srgbClr val="C0392B"/>
+          </a:solidFill>
+          <a:ln/>
+        </p:spPr>
+      </p:sp>
+      <p:sp>
+        <p:nvSpPr>
+          <p:cNvPr id="14" name="Text 12"/>
+          <p:cNvSpPr/>
+          <p:nvPr/>
+        </p:nvSpPr>
+        <p:spPr>
+          <a:xfrm>
+            <a:off x="530352" y="2798064"/>
+            <a:ext cx="2377440" cy="411480"/>
+          </a:xfrm>
+          <a:prstGeom prst="rect">
+            <a:avLst/>
+          </a:prstGeom>
+          <a:noFill/>
+          <a:ln/>
+        </p:spPr>
+        <p:txBody>
+          <a:bodyPr wrap="square" lIns="0" tIns="0" rIns="0" bIns="0" rtlCol="0" anchor="ctr"/>
+          <a:lstStyle/>
+          <a:p>
+            <a:r>
+              <a:rPr lang="en-US" sz="1000" dirty="0">
+                <a:latin typeface="Ubuntu" panose="020B0504030602030204" pitchFamily="34" charset="0"/>
+                <a:ea typeface="Calibri" pitchFamily="34" charset="-122"/>
+                <a:cs typeface="Calibri" pitchFamily="34" charset="-120"/>
+              </a:rPr>
+              <a:t>Created Admin Dashboard with CSV import functionality</a:t>
+            </a:r>
+          </a:p>
+        </p:txBody>
+      </p:sp>
+      <p:sp>
+        <p:nvSpPr>
+          <p:cNvPr id="15" name="Shape 13"/>
+          <p:cNvSpPr/>
+          <p:nvPr/>
+        </p:nvSpPr>
+        <p:spPr>
+          <a:xfrm>
+            <a:off x="292608" y="3483864"/>
+            <a:ext cx="164592" cy="164592"/>
+          </a:xfrm>
+          <a:prstGeom prst="ellipse">
+            <a:avLst/>
+          </a:prstGeom>
+          <a:solidFill>
+            <a:srgbClr val="C0392B"/>
+          </a:solidFill>
+          <a:ln/>
+        </p:spPr>
+      </p:sp>
+      <p:sp>
+        <p:nvSpPr>
+          <p:cNvPr id="16" name="Text 14"/>
+          <p:cNvSpPr/>
+          <p:nvPr/>
+        </p:nvSpPr>
+        <p:spPr>
+          <a:xfrm>
+            <a:off x="530352" y="3456432"/>
+            <a:ext cx="2377440" cy="411480"/>
+          </a:xfrm>
+          <a:prstGeom prst="rect">
+            <a:avLst/>
+          </a:prstGeom>
+          <a:noFill/>
+          <a:ln/>
+        </p:spPr>
+        <p:txBody>
+          <a:bodyPr wrap="square" lIns="0" tIns="0" rIns="0" bIns="0" rtlCol="0" anchor="ctr"/>
+          <a:lstStyle/>
+          <a:p>
+            <a:r>
+              <a:rPr lang="en-US" sz="1000" dirty="0">
+                <a:latin typeface="Ubuntu" panose="020B0504030602030204" pitchFamily="34" charset="0"/>
+                <a:ea typeface="Calibri" pitchFamily="34" charset="-122"/>
+                <a:cs typeface="Calibri" pitchFamily="34" charset="-120"/>
+              </a:rPr>
+              <a:t>Developed bilingual support (Arabic RTL + English LTR)</a:t>
+            </a:r>
+          </a:p>
+        </p:txBody>
+      </p:sp>
+      <p:sp>
+        <p:nvSpPr>
+          <p:cNvPr id="17" name="Shape 15"/>
+          <p:cNvSpPr/>
+          <p:nvPr/>
+        </p:nvSpPr>
+        <p:spPr>
+          <a:xfrm>
+            <a:off x="292608" y="4142232"/>
+            <a:ext cx="164592" cy="164592"/>
+          </a:xfrm>
+          <a:prstGeom prst="ellipse">
+            <a:avLst/>
+          </a:prstGeom>
+          <a:solidFill>
+            <a:srgbClr val="C0392B"/>
+          </a:solidFill>
+          <a:ln/>
+        </p:spPr>
+      </p:sp>
+      <p:sp>
+        <p:nvSpPr>
+          <p:cNvPr id="18" name="Text 16"/>
+          <p:cNvSpPr/>
+          <p:nvPr/>
+        </p:nvSpPr>
+        <p:spPr>
+          <a:xfrm>
+            <a:off x="530352" y="4114800"/>
+            <a:ext cx="2377440" cy="411480"/>
+          </a:xfrm>
+          <a:prstGeom prst="rect">
+            <a:avLst/>
+          </a:prstGeom>
+          <a:noFill/>
+          <a:ln/>
+        </p:spPr>
+        <p:txBody>
+          <a:bodyPr wrap="square" lIns="0" tIns="0" rIns="0" bIns="0" rtlCol="0" anchor="ctr"/>
+          <a:lstStyle/>
+          <a:p>
+            <a:r>
+              <a:rPr lang="en-US" sz="1000" dirty="0">
+                <a:latin typeface="Ubuntu" panose="020B0504030602030204" pitchFamily="34" charset="0"/>
+                <a:ea typeface="Calibri" pitchFamily="34" charset="-122"/>
+                <a:cs typeface="Calibri" pitchFamily="34" charset="-120"/>
+              </a:rPr>
+              <a:t>Secured with JWT authentication and bcrypt password hashing</a:t>
+            </a:r>
+          </a:p>
+        </p:txBody>
+      </p:sp>
+      <p:sp>
+        <p:nvSpPr>
+          <p:cNvPr id="19" name="Shape 17"/>
+          <p:cNvSpPr/>
+          <p:nvPr/>
+        </p:nvSpPr>
+        <p:spPr>
+          <a:xfrm>
+            <a:off x="3172968" y="868680"/>
+            <a:ext cx="2834640" cy="4160520"/>
+          </a:xfrm>
+          <a:prstGeom prst="rect">
+            <a:avLst/>
+          </a:prstGeom>
+          <a:solidFill>
+            <a:srgbClr val="FFFFFF">
+              <a:alpha val="7000"/>
+            </a:srgbClr>
+          </a:solidFill>
+          <a:ln w="19050">
+            <a:solidFill>
+              <a:srgbClr val="D4A017"/>
+            </a:solidFill>
+            <a:prstDash val="solid"/>
+          </a:ln>
+        </p:spPr>
+      </p:sp>
+      <p:sp>
+        <p:nvSpPr>
+          <p:cNvPr id="20" name="Shape 18"/>
+          <p:cNvSpPr/>
+          <p:nvPr/>
+        </p:nvSpPr>
+        <p:spPr>
+          <a:xfrm>
+            <a:off x="3172968" y="868680"/>
+            <a:ext cx="2834640" cy="502920"/>
+          </a:xfrm>
+          <a:prstGeom prst="rect">
+            <a:avLst/>
+          </a:prstGeom>
+          <a:solidFill>
+            <a:srgbClr val="D4A017"/>
+          </a:solidFill>
+          <a:ln/>
+        </p:spPr>
+      </p:sp>
+      <p:sp>
+        <p:nvSpPr>
+          <p:cNvPr id="21" name="Text 19"/>
+          <p:cNvSpPr/>
+          <p:nvPr/>
+        </p:nvSpPr>
+        <p:spPr>
+          <a:xfrm>
+            <a:off x="3172968" y="868680"/>
+            <a:ext cx="2834640" cy="502920"/>
+          </a:xfrm>
+          <a:prstGeom prst="rect">
+            <a:avLst/>
+          </a:prstGeom>
+          <a:noFill/>
+          <a:ln/>
+        </p:spPr>
+        <p:txBody>
+          <a:bodyPr wrap="square" lIns="0" tIns="0" rIns="0" bIns="0" rtlCol="0" anchor="ctr"/>
+          <a:lstStyle/>
+          <a:p>
+            <a:pPr marL="0" indent="0" algn="ctr">
+              <a:buNone/>
+            </a:pPr>
+            <a:r>
+              <a:rPr lang="en-US" sz="1200" b="1" dirty="0">
+                <a:solidFill>
+                  <a:srgbClr val="FFFFFF"/>
+                </a:solidFill>
+                <a:latin typeface="Ubuntu" panose="020B0504030602030204" pitchFamily="34" charset="0"/>
+                <a:ea typeface="Georgia" pitchFamily="34" charset="-122"/>
+                <a:cs typeface="Georgia" pitchFamily="34" charset="-120"/>
+              </a:rPr>
+              <a:t>⚠️ Difficulties Encountered</a:t>
+            </a:r>
+            <a:endParaRPr lang="en-US" sz="1200" dirty="0">
+              <a:latin typeface="Ubuntu" panose="020B0504030602030204" pitchFamily="34" charset="0"/>
+            </a:endParaRPr>
+          </a:p>
+        </p:txBody>
+      </p:sp>
+      <p:sp>
+        <p:nvSpPr>
+          <p:cNvPr id="22" name="Shape 20"/>
+          <p:cNvSpPr/>
+          <p:nvPr/>
+        </p:nvSpPr>
+        <p:spPr>
+          <a:xfrm>
+            <a:off x="3282696" y="1508760"/>
+            <a:ext cx="164592" cy="164592"/>
+          </a:xfrm>
+          <a:prstGeom prst="ellipse">
+            <a:avLst/>
+          </a:prstGeom>
+          <a:solidFill>
+            <a:srgbClr val="D4A017"/>
+          </a:solidFill>
+          <a:ln/>
+        </p:spPr>
+      </p:sp>
+      <p:sp>
+        <p:nvSpPr>
+          <p:cNvPr id="23" name="Text 21"/>
+          <p:cNvSpPr/>
+          <p:nvPr/>
+        </p:nvSpPr>
+        <p:spPr>
+          <a:xfrm>
+            <a:off x="3520440" y="1481328"/>
+            <a:ext cx="2377440" cy="411480"/>
+          </a:xfrm>
+          <a:prstGeom prst="rect">
+            <a:avLst/>
+          </a:prstGeom>
+          <a:noFill/>
+          <a:ln/>
+        </p:spPr>
+        <p:txBody>
+          <a:bodyPr wrap="square" lIns="0" tIns="0" rIns="0" bIns="0" rtlCol="0" anchor="ctr"/>
+          <a:lstStyle/>
+          <a:p>
+            <a:r>
+              <a:rPr lang="en-US" sz="1000" dirty="0">
+                <a:latin typeface="Ubuntu" panose="020B0504030602030204" pitchFamily="34" charset="0"/>
+                <a:ea typeface="Calibri" pitchFamily="34" charset="-122"/>
+                <a:cs typeface="Calibri" pitchFamily="34" charset="-120"/>
+              </a:rPr>
+              <a:t>bcrypt version conflict with </a:t>
+            </a:r>
+            <a:r>
+              <a:rPr lang="en-US" sz="1000" dirty="0" err="1">
+                <a:latin typeface="Ubuntu" panose="020B0504030602030204" pitchFamily="34" charset="0"/>
+                <a:ea typeface="Calibri" pitchFamily="34" charset="-122"/>
+                <a:cs typeface="Calibri" pitchFamily="34" charset="-120"/>
+              </a:rPr>
+              <a:t>passlib</a:t>
+            </a:r>
+            <a:r>
+              <a:rPr lang="en-US" sz="1000" dirty="0">
+                <a:latin typeface="Ubuntu" panose="020B0504030602030204" pitchFamily="34" charset="0"/>
+                <a:ea typeface="Calibri" pitchFamily="34" charset="-122"/>
+                <a:cs typeface="Calibri" pitchFamily="34" charset="-120"/>
+              </a:rPr>
+              <a:t> library</a:t>
+            </a:r>
+          </a:p>
+        </p:txBody>
+      </p:sp>
+      <p:sp>
+        <p:nvSpPr>
+          <p:cNvPr id="24" name="Shape 22"/>
+          <p:cNvSpPr/>
+          <p:nvPr/>
+        </p:nvSpPr>
+        <p:spPr>
+          <a:xfrm>
+            <a:off x="3282696" y="2167128"/>
+            <a:ext cx="164592" cy="164592"/>
+          </a:xfrm>
+          <a:prstGeom prst="ellipse">
+            <a:avLst/>
+          </a:prstGeom>
+          <a:solidFill>
+            <a:srgbClr val="D4A017"/>
+          </a:solidFill>
+          <a:ln/>
+        </p:spPr>
+      </p:sp>
+      <p:sp>
+        <p:nvSpPr>
+          <p:cNvPr id="25" name="Text 23"/>
+          <p:cNvSpPr/>
+          <p:nvPr/>
+        </p:nvSpPr>
+        <p:spPr>
+          <a:xfrm>
+            <a:off x="3520440" y="2139696"/>
+            <a:ext cx="2377440" cy="411480"/>
+          </a:xfrm>
+          <a:prstGeom prst="rect">
+            <a:avLst/>
+          </a:prstGeom>
+          <a:noFill/>
+          <a:ln/>
+        </p:spPr>
+        <p:txBody>
+          <a:bodyPr wrap="square" lIns="0" tIns="0" rIns="0" bIns="0" rtlCol="0" anchor="ctr"/>
+          <a:lstStyle/>
+          <a:p>
+            <a:r>
+              <a:rPr lang="en-US" sz="1000" dirty="0">
+                <a:latin typeface="Ubuntu" panose="020B0504030602030204" pitchFamily="34" charset="0"/>
+                <a:ea typeface="Calibri" pitchFamily="34" charset="-122"/>
+                <a:cs typeface="Calibri" pitchFamily="34" charset="-120"/>
+              </a:rPr>
+              <a:t>CSV encoding issues with Arabic text (BOM, UTF-8-sig)</a:t>
+            </a:r>
+          </a:p>
+        </p:txBody>
+      </p:sp>
+      <p:sp>
+        <p:nvSpPr>
+          <p:cNvPr id="26" name="Shape 24"/>
+          <p:cNvSpPr/>
+          <p:nvPr/>
+        </p:nvSpPr>
+        <p:spPr>
+          <a:xfrm>
+            <a:off x="3282696" y="2825496"/>
+            <a:ext cx="164592" cy="164592"/>
+          </a:xfrm>
+          <a:prstGeom prst="ellipse">
+            <a:avLst/>
+          </a:prstGeom>
+          <a:solidFill>
+            <a:srgbClr val="D4A017"/>
+          </a:solidFill>
+          <a:ln/>
+        </p:spPr>
+      </p:sp>
+      <p:sp>
+        <p:nvSpPr>
+          <p:cNvPr id="27" name="Text 25"/>
+          <p:cNvSpPr/>
+          <p:nvPr/>
+        </p:nvSpPr>
+        <p:spPr>
+          <a:xfrm>
+            <a:off x="3520440" y="2798064"/>
+            <a:ext cx="2377440" cy="411480"/>
+          </a:xfrm>
+          <a:prstGeom prst="rect">
+            <a:avLst/>
+          </a:prstGeom>
+          <a:noFill/>
+          <a:ln/>
+        </p:spPr>
+        <p:txBody>
+          <a:bodyPr wrap="square" lIns="0" tIns="0" rIns="0" bIns="0" rtlCol="0" anchor="ctr"/>
+          <a:lstStyle/>
+          <a:p>
+            <a:r>
+              <a:rPr lang="en-US" sz="1000" dirty="0">
+                <a:latin typeface="Ubuntu" panose="020B0504030602030204" pitchFamily="34" charset="0"/>
+                <a:ea typeface="Calibri" pitchFamily="34" charset="-122"/>
+                <a:cs typeface="Calibri" pitchFamily="34" charset="-120"/>
+              </a:rPr>
+              <a:t>MySQL foreign key constraints during data deletion</a:t>
+            </a:r>
+          </a:p>
+        </p:txBody>
+      </p:sp>
+      <p:sp>
+        <p:nvSpPr>
+          <p:cNvPr id="28" name="Shape 26"/>
+          <p:cNvSpPr/>
+          <p:nvPr/>
+        </p:nvSpPr>
+        <p:spPr>
+          <a:xfrm>
+            <a:off x="3282696" y="3483864"/>
+            <a:ext cx="164592" cy="164592"/>
+          </a:xfrm>
+          <a:prstGeom prst="ellipse">
+            <a:avLst/>
+          </a:prstGeom>
+          <a:solidFill>
+            <a:srgbClr val="D4A017"/>
+          </a:solidFill>
+          <a:ln/>
+        </p:spPr>
+      </p:sp>
+      <p:sp>
+        <p:nvSpPr>
+          <p:cNvPr id="29" name="Text 27"/>
+          <p:cNvSpPr/>
+          <p:nvPr/>
+        </p:nvSpPr>
+        <p:spPr>
+          <a:xfrm>
+            <a:off x="3520440" y="3456432"/>
+            <a:ext cx="2377440" cy="411480"/>
+          </a:xfrm>
+          <a:prstGeom prst="rect">
+            <a:avLst/>
+          </a:prstGeom>
+          <a:noFill/>
+          <a:ln/>
+        </p:spPr>
+        <p:txBody>
+          <a:bodyPr wrap="square" lIns="0" tIns="0" rIns="0" bIns="0" rtlCol="0" anchor="ctr"/>
+          <a:lstStyle/>
+          <a:p>
+            <a:r>
+              <a:rPr lang="en-US" sz="1000" dirty="0">
+                <a:latin typeface="Ubuntu" panose="020B0504030602030204" pitchFamily="34" charset="0"/>
+                <a:ea typeface="Calibri" pitchFamily="34" charset="-122"/>
+                <a:cs typeface="Calibri" pitchFamily="34" charset="-120"/>
+              </a:rPr>
+              <a:t>CORS configuration between FastAPI and Vue.js</a:t>
+            </a:r>
+          </a:p>
+        </p:txBody>
+      </p:sp>
+      <p:sp>
+        <p:nvSpPr>
+          <p:cNvPr id="30" name="Shape 28"/>
+          <p:cNvSpPr/>
+          <p:nvPr/>
+        </p:nvSpPr>
+        <p:spPr>
+          <a:xfrm>
+            <a:off x="3282696" y="4142232"/>
+            <a:ext cx="164592" cy="164592"/>
+          </a:xfrm>
+          <a:prstGeom prst="ellipse">
+            <a:avLst/>
+          </a:prstGeom>
+          <a:solidFill>
+            <a:srgbClr val="D4A017"/>
+          </a:solidFill>
+          <a:ln/>
+        </p:spPr>
+      </p:sp>
+      <p:sp>
+        <p:nvSpPr>
+          <p:cNvPr id="31" name="Text 29"/>
+          <p:cNvSpPr/>
+          <p:nvPr/>
+        </p:nvSpPr>
+        <p:spPr>
+          <a:xfrm>
+            <a:off x="3520440" y="4114800"/>
+            <a:ext cx="2377440" cy="411480"/>
+          </a:xfrm>
+          <a:prstGeom prst="rect">
+            <a:avLst/>
+          </a:prstGeom>
+          <a:noFill/>
+          <a:ln/>
+        </p:spPr>
+        <p:txBody>
+          <a:bodyPr wrap="square" lIns="0" tIns="0" rIns="0" bIns="0" rtlCol="0" anchor="ctr"/>
+          <a:lstStyle/>
+          <a:p>
+            <a:r>
+              <a:rPr lang="en-US" sz="1000" dirty="0">
+                <a:latin typeface="Ubuntu" panose="020B0504030602030204" pitchFamily="34" charset="0"/>
+                <a:ea typeface="Calibri" pitchFamily="34" charset="-122"/>
+                <a:cs typeface="Calibri" pitchFamily="34" charset="-120"/>
+              </a:rPr>
+              <a:t>Arabic text normalization for AI matching accuracy</a:t>
+            </a:r>
+          </a:p>
+        </p:txBody>
+      </p:sp>
+      <p:sp>
+        <p:nvSpPr>
+          <p:cNvPr id="32" name="Shape 30"/>
+          <p:cNvSpPr/>
+          <p:nvPr/>
+        </p:nvSpPr>
+        <p:spPr>
+          <a:xfrm>
+            <a:off x="6163056" y="868680"/>
+            <a:ext cx="2834640" cy="4160520"/>
+          </a:xfrm>
+          <a:prstGeom prst="rect">
+            <a:avLst/>
+          </a:prstGeom>
+          <a:solidFill>
+            <a:srgbClr val="FFFFFF">
+              <a:alpha val="7000"/>
+            </a:srgbClr>
+          </a:solidFill>
+          <a:ln w="19050">
+            <a:solidFill>
+              <a:srgbClr val="1A6B3C"/>
+            </a:solidFill>
+            <a:prstDash val="solid"/>
+          </a:ln>
+        </p:spPr>
+      </p:sp>
+      <p:sp>
+        <p:nvSpPr>
+          <p:cNvPr id="33" name="Shape 31"/>
+          <p:cNvSpPr/>
+          <p:nvPr/>
+        </p:nvSpPr>
+        <p:spPr>
+          <a:xfrm>
+            <a:off x="6163056" y="868680"/>
+            <a:ext cx="2834640" cy="502920"/>
+          </a:xfrm>
+          <a:prstGeom prst="rect">
+            <a:avLst/>
+          </a:prstGeom>
+          <a:solidFill>
+            <a:srgbClr val="1A6B3C"/>
+          </a:solidFill>
+          <a:ln/>
+        </p:spPr>
+      </p:sp>
+      <p:sp>
+        <p:nvSpPr>
+          <p:cNvPr id="34" name="Text 32"/>
+          <p:cNvSpPr/>
+          <p:nvPr/>
+        </p:nvSpPr>
+        <p:spPr>
+          <a:xfrm>
+            <a:off x="6163056" y="868680"/>
+            <a:ext cx="2834640" cy="502920"/>
+          </a:xfrm>
+          <a:prstGeom prst="rect">
+            <a:avLst/>
+          </a:prstGeom>
+          <a:noFill/>
+          <a:ln/>
+        </p:spPr>
+        <p:txBody>
+          <a:bodyPr wrap="square" lIns="0" tIns="0" rIns="0" bIns="0" rtlCol="0" anchor="ctr"/>
+          <a:lstStyle/>
+          <a:p>
+            <a:pPr marL="0" indent="0" algn="ctr">
+              <a:buNone/>
+            </a:pPr>
+            <a:r>
+              <a:rPr lang="en-US" sz="1200" b="1" dirty="0">
+                <a:solidFill>
+                  <a:srgbClr val="FFFFFF"/>
+                </a:solidFill>
+                <a:latin typeface="Ubuntu" panose="020B0504030602030204" pitchFamily="34" charset="0"/>
+                <a:ea typeface="Georgia" pitchFamily="34" charset="-122"/>
+                <a:cs typeface="Georgia" pitchFamily="34" charset="-120"/>
+              </a:rPr>
+              <a:t>🚀 Areas for Improvement</a:t>
+            </a:r>
+            <a:endParaRPr lang="en-US" sz="1200" dirty="0">
+              <a:latin typeface="Ubuntu" panose="020B0504030602030204" pitchFamily="34" charset="0"/>
+            </a:endParaRPr>
+          </a:p>
+        </p:txBody>
+      </p:sp>
+      <p:sp>
+        <p:nvSpPr>
+          <p:cNvPr id="35" name="Shape 33"/>
+          <p:cNvSpPr/>
+          <p:nvPr/>
+        </p:nvSpPr>
+        <p:spPr>
+          <a:xfrm>
+            <a:off x="6272784" y="1508760"/>
+            <a:ext cx="164592" cy="164592"/>
+          </a:xfrm>
+          <a:prstGeom prst="ellipse">
+            <a:avLst/>
+          </a:prstGeom>
+          <a:solidFill>
+            <a:srgbClr val="1A6B3C"/>
+          </a:solidFill>
+          <a:ln/>
+        </p:spPr>
+      </p:sp>
+      <p:sp>
+        <p:nvSpPr>
+          <p:cNvPr id="36" name="Text 34"/>
+          <p:cNvSpPr/>
+          <p:nvPr/>
+        </p:nvSpPr>
+        <p:spPr>
+          <a:xfrm>
+            <a:off x="6510528" y="1481328"/>
+            <a:ext cx="2377440" cy="411480"/>
+          </a:xfrm>
+          <a:prstGeom prst="rect">
+            <a:avLst/>
+          </a:prstGeom>
+          <a:noFill/>
+          <a:ln/>
+        </p:spPr>
+        <p:txBody>
+          <a:bodyPr wrap="square" lIns="0" tIns="0" rIns="0" bIns="0" rtlCol="0" anchor="ctr"/>
+          <a:lstStyle/>
+          <a:p>
+            <a:r>
+              <a:rPr lang="en-US" sz="1000" dirty="0">
+                <a:latin typeface="Ubuntu" panose="020B0504030602030204" pitchFamily="34" charset="0"/>
+                <a:ea typeface="Calibri" pitchFamily="34" charset="-122"/>
+                <a:cs typeface="Calibri" pitchFamily="34" charset="-120"/>
+              </a:rPr>
+              <a:t>Add Flutter mobile application for iOS/Android</a:t>
+            </a:r>
+          </a:p>
+        </p:txBody>
+      </p:sp>
+      <p:sp>
+        <p:nvSpPr>
+          <p:cNvPr id="37" name="Shape 35"/>
+          <p:cNvSpPr/>
+          <p:nvPr/>
+        </p:nvSpPr>
+        <p:spPr>
+          <a:xfrm>
+            <a:off x="6272784" y="2167128"/>
+            <a:ext cx="164592" cy="164592"/>
+          </a:xfrm>
+          <a:prstGeom prst="ellipse">
+            <a:avLst/>
+          </a:prstGeom>
+          <a:solidFill>
+            <a:srgbClr val="1A6B3C"/>
+          </a:solidFill>
+          <a:ln/>
+        </p:spPr>
+      </p:sp>
+      <p:sp>
+        <p:nvSpPr>
+          <p:cNvPr id="38" name="Text 36"/>
+          <p:cNvSpPr/>
+          <p:nvPr/>
+        </p:nvSpPr>
+        <p:spPr>
+          <a:xfrm>
+            <a:off x="6510528" y="2139696"/>
+            <a:ext cx="2377440" cy="411480"/>
+          </a:xfrm>
+          <a:prstGeom prst="rect">
+            <a:avLst/>
+          </a:prstGeom>
+          <a:noFill/>
+          <a:ln/>
+        </p:spPr>
+        <p:txBody>
+          <a:bodyPr wrap="square" lIns="0" tIns="0" rIns="0" bIns="0" rtlCol="0" anchor="ctr"/>
+          <a:lstStyle/>
+          <a:p>
+            <a:r>
+              <a:rPr lang="en-US" sz="1000" dirty="0">
+                <a:latin typeface="Ubuntu" panose="020B0504030602030204" pitchFamily="34" charset="0"/>
+                <a:ea typeface="Calibri" pitchFamily="34" charset="-122"/>
+                <a:cs typeface="Calibri" pitchFamily="34" charset="-120"/>
+              </a:rPr>
+              <a:t>Integrate GPT API for recipe explanation in Arabic</a:t>
+            </a:r>
+          </a:p>
+        </p:txBody>
+      </p:sp>
+      <p:sp>
+        <p:nvSpPr>
+          <p:cNvPr id="39" name="Shape 37"/>
+          <p:cNvSpPr/>
+          <p:nvPr/>
+        </p:nvSpPr>
+        <p:spPr>
+          <a:xfrm>
+            <a:off x="6272784" y="2825496"/>
+            <a:ext cx="164592" cy="164592"/>
+          </a:xfrm>
+          <a:prstGeom prst="ellipse">
+            <a:avLst/>
+          </a:prstGeom>
+          <a:solidFill>
+            <a:srgbClr val="1A6B3C"/>
+          </a:solidFill>
+          <a:ln/>
+        </p:spPr>
+      </p:sp>
+      <p:sp>
+        <p:nvSpPr>
+          <p:cNvPr id="40" name="Text 38"/>
+          <p:cNvSpPr/>
+          <p:nvPr/>
+        </p:nvSpPr>
+        <p:spPr>
+          <a:xfrm>
+            <a:off x="6510528" y="2798064"/>
+            <a:ext cx="2377440" cy="411480"/>
+          </a:xfrm>
+          <a:prstGeom prst="rect">
+            <a:avLst/>
+          </a:prstGeom>
+          <a:noFill/>
+          <a:ln/>
+        </p:spPr>
+        <p:txBody>
+          <a:bodyPr wrap="square" lIns="0" tIns="0" rIns="0" bIns="0" rtlCol="0" anchor="ctr"/>
+          <a:lstStyle/>
+          <a:p>
+            <a:r>
+              <a:rPr lang="en-US" sz="1000" dirty="0">
+                <a:latin typeface="Ubuntu" panose="020B0504030602030204" pitchFamily="34" charset="0"/>
+                <a:ea typeface="Calibri" pitchFamily="34" charset="-122"/>
+                <a:cs typeface="Calibri" pitchFamily="34" charset="-120"/>
+              </a:rPr>
+              <a:t>Calculate nutritional values and calories per recipe</a:t>
+            </a:r>
+          </a:p>
+        </p:txBody>
+      </p:sp>
+      <p:sp>
+        <p:nvSpPr>
+          <p:cNvPr id="41" name="Shape 39"/>
+          <p:cNvSpPr/>
+          <p:nvPr/>
+        </p:nvSpPr>
+        <p:spPr>
+          <a:xfrm>
+            <a:off x="6272784" y="3483864"/>
+            <a:ext cx="164592" cy="164592"/>
+          </a:xfrm>
+          <a:prstGeom prst="ellipse">
+            <a:avLst/>
+          </a:prstGeom>
+          <a:solidFill>
+            <a:srgbClr val="1A6B3C"/>
+          </a:solidFill>
+          <a:ln/>
+        </p:spPr>
+      </p:sp>
+      <p:sp>
+        <p:nvSpPr>
+          <p:cNvPr id="42" name="Text 40"/>
+          <p:cNvSpPr/>
+          <p:nvPr/>
+        </p:nvSpPr>
+        <p:spPr>
+          <a:xfrm>
+            <a:off x="6510528" y="3456432"/>
+            <a:ext cx="2377440" cy="411480"/>
+          </a:xfrm>
+          <a:prstGeom prst="rect">
+            <a:avLst/>
+          </a:prstGeom>
+          <a:noFill/>
+          <a:ln/>
+        </p:spPr>
+        <p:txBody>
+          <a:bodyPr wrap="square" lIns="0" tIns="0" rIns="0" bIns="0" rtlCol="0" anchor="ctr"/>
+          <a:lstStyle/>
+          <a:p>
+            <a:r>
+              <a:rPr lang="en-US" sz="1000" dirty="0">
+                <a:latin typeface="Ubuntu" panose="020B0504030602030204" pitchFamily="34" charset="0"/>
+                <a:ea typeface="Calibri" pitchFamily="34" charset="-122"/>
+                <a:cs typeface="Calibri" pitchFamily="34" charset="-120"/>
+              </a:rPr>
+              <a:t>Add voice search in Arabic using Speech Recognition</a:t>
+            </a:r>
+          </a:p>
+        </p:txBody>
+      </p:sp>
+      <p:sp>
+        <p:nvSpPr>
+          <p:cNvPr id="43" name="Shape 41"/>
+          <p:cNvSpPr/>
+          <p:nvPr/>
+        </p:nvSpPr>
+        <p:spPr>
+          <a:xfrm>
+            <a:off x="6272784" y="4142232"/>
+            <a:ext cx="164592" cy="164592"/>
+          </a:xfrm>
+          <a:prstGeom prst="ellipse">
+            <a:avLst/>
+          </a:prstGeom>
+          <a:solidFill>
+            <a:srgbClr val="1A6B3C"/>
+          </a:solidFill>
+          <a:ln/>
+        </p:spPr>
+      </p:sp>
+      <p:sp>
+        <p:nvSpPr>
+          <p:cNvPr id="44" name="Text 42"/>
+          <p:cNvSpPr/>
+          <p:nvPr/>
+        </p:nvSpPr>
+        <p:spPr>
+          <a:xfrm>
+            <a:off x="6510528" y="4114800"/>
+            <a:ext cx="2377440" cy="411480"/>
+          </a:xfrm>
+          <a:prstGeom prst="rect">
+            <a:avLst/>
+          </a:prstGeom>
+          <a:noFill/>
+          <a:ln/>
+        </p:spPr>
+        <p:txBody>
+          <a:bodyPr wrap="square" lIns="0" tIns="0" rIns="0" bIns="0" rtlCol="0" anchor="ctr"/>
+          <a:lstStyle/>
+          <a:p>
+            <a:r>
+              <a:rPr lang="en-US" sz="1000" dirty="0">
+                <a:latin typeface="Ubuntu" panose="020B0504030602030204" pitchFamily="34" charset="0"/>
+                <a:ea typeface="Calibri" pitchFamily="34" charset="-122"/>
+                <a:cs typeface="Calibri" pitchFamily="34" charset="-120"/>
+              </a:rPr>
+              <a:t>Build community features for users to share recipes</a:t>
+            </a:r>
+          </a:p>
+        </p:txBody>
+      </p:sp>
+    </p:spTree>
+  </p:cSld>
+  <p:clrMapOvr>
+    <a:masterClrMapping/>
+  </p:clrMapOvr>
+</p:sld>
+</file>
+
+<file path=ppt/slides/slide16.xml><?xml version="1.0" encoding="utf-8"?>
 <p:sld xmlns:a="http://schemas.openxmlformats.org/drawingml/2006/main" xmlns:r="http://schemas.openxmlformats.org/officeDocument/2006/relationships" xmlns:p="http://schemas.openxmlformats.org/presentationml/2006/main">
   <p:cSld name="Slide 10">
     <p:bg>
